--- a/slides/incident-aware-optimization-v2.pptx
+++ b/slides/incident-aware-optimization-v2.pptx
@@ -33,6 +33,13 @@
     <p:sldId id="281" r:id="rId33"/>
     <p:sldId id="282" r:id="rId34"/>
     <p:sldId id="283" r:id="rId35"/>
+    <p:sldId id="284" r:id="rId36"/>
+    <p:sldId id="285" r:id="rId37"/>
+    <p:sldId id="286" r:id="rId38"/>
+    <p:sldId id="287" r:id="rId39"/>
+    <p:sldId id="288" r:id="rId40"/>
+    <p:sldId id="289" r:id="rId41"/>
+    <p:sldId id="290" r:id="rId42"/>
   </p:sldIdLst>
   <p:sldSz cx="12191695" cy="6858000" type="screen4x3"/>
   <p:notesSz cx="6858000" cy="9144000"/>
@@ -554,6 +561,230 @@
 </p:notes>
 </file>
 
+<file path=ppt/notesSlides/notesSlide10.xml><?xml version="1.0" encoding="utf-8"?>
+<p:notes xmlns:a="http://schemas.openxmlformats.org/drawingml/2006/main" xmlns:p="http://schemas.openxmlformats.org/presentationml/2006/main" xmlns:r="http://schemas.openxmlformats.org/officeDocument/2006/relationships">
+  <p:cSld>
+    <p:spTree>
+      <p:nvGrpSpPr>
+        <p:cNvPr id="1" name=""/>
+        <p:cNvGrpSpPr/>
+        <p:nvPr/>
+      </p:nvGrpSpPr>
+      <p:grpSpPr>
+        <a:xfrm>
+          <a:off x="0" y="0"/>
+          <a:ext cx="0" cy="0"/>
+          <a:chOff x="0" y="0"/>
+          <a:chExt cx="0" cy="0"/>
+        </a:xfrm>
+      </p:grpSpPr>
+      <p:sp>
+        <p:nvSpPr>
+          <p:cNvPr id="2" name="Slide Image Placeholder 1"/>
+          <p:cNvSpPr>
+            <a:spLocks noGrp="1"/>
+          </p:cNvSpPr>
+          <p:nvPr>
+            <p:ph type="sldImg" idx="2"/>
+          </p:nvPr>
+        </p:nvSpPr>
+        <p:spPr/>
+      </p:sp>
+      <p:sp>
+        <p:nvSpPr>
+          <p:cNvPr id="3" name="Notes Placeholder 2"/>
+          <p:cNvSpPr>
+            <a:spLocks noGrp="1"/>
+          </p:cNvSpPr>
+          <p:nvPr>
+            <p:ph type="body" idx="3" sz="quarter"/>
+          </p:nvPr>
+        </p:nvSpPr>
+        <p:spPr/>
+        <p:txBody>
+          <a:bodyPr/>
+          <a:lstStyle/>
+          <a:p>
+            <a:r>
+              <a:t>Sources checked 2026-10-05. Replay implications and admission rules are design assessments, not completed replications or estimates of the original laboratories' expenditure.</a:t>
+            </a:r>
+          </a:p>
+          <a:p/>
+          <a:p>
+            <a:r>
+              <a:t>OpenAI o1 System Card, section 3: https://cdn.openai.com/o1-system-card-20241205.pdf</a:t>
+            </a:r>
+          </a:p>
+          <a:p>
+            <a:r>
+              <a:t>Baker et al. (2025), sections 2–3 and Appendix C: https://arxiv.org/html/2503.11926v1</a:t>
+            </a:r>
+          </a:p>
+          <a:p>
+            <a:r>
+              <a:t>Palisade shutdown study: https://palisaderesearch.org/research/shutdown-resistance</a:t>
+            </a:r>
+          </a:p>
+          <a:p>
+            <a:r>
+              <a:t>Palisade public harness: https://github.com/PalisadeResearch/shutdown_avoidance</a:t>
+            </a:r>
+          </a:p>
+          <a:p>
+            <a:r>
+              <a:t>Apollo scheming demo: https://www.apolloresearch.ai/science/demo-example-scheming-reasoning-evaluations</a:t>
+            </a:r>
+          </a:p>
+          <a:p>
+            <a:r>
+              <a:t>OpenAI reasoning visibility: https://developers.openai.com/api/docs/guides/reasoning</a:t>
+            </a:r>
+          </a:p>
+          <a:p>
+            <a:r>
+              <a:t>OpenAI model availability: https://developers.openai.com/api/docs/deprecations</a:t>
+            </a:r>
+          </a:p>
+          <a:p/>
+          <a:p>
+            <a:r>
+              <a:t>This is a proposed mechanism study inspired by test-harness reward hacking, not a report that it has been run. The core hypothesis is that a mismatch between apparent task success and independently observed effects, combined with a relevant opportunity and incentive, permits the failure. Keep those ingredients explicit. An accessible actor must independently exhibit the behavior before claiming behavioral reproduction under the declared prompts. A script or an explicitly attack-instructed actor can qualify an effect/guard fixture but cannot establish naturally occurring misbehavior; keep these populations separate. A negative control should remove the suspected opportunity while preserving the legitimate task, and the benign twin must verify that a defense does not merely block all useful work. If behavior does not occur, report an inconclusive behavioral reproduction rather than forcing it and relabeling it as natural. Mechanism preservation is a hypothesis tested by controls, not something guaranteed by constructing a plausible sandbox. This does not reproduce the emergence of a failure during RL, or transport a measured rate to another model or real deployment.</a:t>
+            </a:r>
+          </a:p>
+        </p:txBody>
+      </p:sp>
+      <p:sp>
+        <p:nvSpPr>
+          <p:cNvPr id="4" name="Slide Number Placeholder 3"/>
+          <p:cNvSpPr>
+            <a:spLocks noGrp="1"/>
+          </p:cNvSpPr>
+          <p:nvPr>
+            <p:ph type="sldNum" idx="5" sz="quarter"/>
+          </p:nvPr>
+        </p:nvSpPr>
+        <p:spPr/>
+      </p:sp>
+    </p:spTree>
+  </p:cSld>
+  <p:clrMapOvr>
+    <a:masterClrMapping/>
+  </p:clrMapOvr>
+</p:notes>
+</file>
+
+<file path=ppt/notesSlides/notesSlide11.xml><?xml version="1.0" encoding="utf-8"?>
+<p:notes xmlns:a="http://schemas.openxmlformats.org/drawingml/2006/main" xmlns:p="http://schemas.openxmlformats.org/presentationml/2006/main" xmlns:r="http://schemas.openxmlformats.org/officeDocument/2006/relationships">
+  <p:cSld>
+    <p:spTree>
+      <p:nvGrpSpPr>
+        <p:cNvPr id="1" name=""/>
+        <p:cNvGrpSpPr/>
+        <p:nvPr/>
+      </p:nvGrpSpPr>
+      <p:grpSpPr>
+        <a:xfrm>
+          <a:off x="0" y="0"/>
+          <a:ext cx="0" cy="0"/>
+          <a:chOff x="0" y="0"/>
+          <a:chExt cx="0" cy="0"/>
+        </a:xfrm>
+      </p:grpSpPr>
+      <p:sp>
+        <p:nvSpPr>
+          <p:cNvPr id="2" name="Slide Image Placeholder 1"/>
+          <p:cNvSpPr>
+            <a:spLocks noGrp="1"/>
+          </p:cNvSpPr>
+          <p:nvPr>
+            <p:ph type="sldImg" idx="2"/>
+          </p:nvPr>
+        </p:nvSpPr>
+        <p:spPr/>
+      </p:sp>
+      <p:sp>
+        <p:nvSpPr>
+          <p:cNvPr id="3" name="Notes Placeholder 2"/>
+          <p:cNvSpPr>
+            <a:spLocks noGrp="1"/>
+          </p:cNvSpPr>
+          <p:nvPr>
+            <p:ph type="body" idx="3" sz="quarter"/>
+          </p:nvPr>
+        </p:nvSpPr>
+        <p:spPr/>
+        <p:txBody>
+          <a:bodyPr/>
+          <a:lstStyle/>
+          <a:p>
+            <a:r>
+              <a:t>Sources checked 2026-10-05. Replay implications and admission rules are design assessments, not completed replications or estimates of the original laboratories' expenditure.</a:t>
+            </a:r>
+          </a:p>
+          <a:p/>
+          <a:p>
+            <a:r>
+              <a:t>OpenAI o1 System Card, section 3: https://cdn.openai.com/o1-system-card-20241205.pdf</a:t>
+            </a:r>
+          </a:p>
+          <a:p>
+            <a:r>
+              <a:t>Baker et al. (2025), sections 2–3 and Appendix C: https://arxiv.org/html/2503.11926v1</a:t>
+            </a:r>
+          </a:p>
+          <a:p>
+            <a:r>
+              <a:t>Palisade shutdown study: https://palisaderesearch.org/research/shutdown-resistance</a:t>
+            </a:r>
+          </a:p>
+          <a:p>
+            <a:r>
+              <a:t>Palisade public harness: https://github.com/PalisadeResearch/shutdown_avoidance</a:t>
+            </a:r>
+          </a:p>
+          <a:p>
+            <a:r>
+              <a:t>Apollo scheming demo: https://www.apolloresearch.ai/science/demo-example-scheming-reasoning-evaluations</a:t>
+            </a:r>
+          </a:p>
+          <a:p>
+            <a:r>
+              <a:t>OpenAI reasoning visibility: https://developers.openai.com/api/docs/guides/reasoning</a:t>
+            </a:r>
+          </a:p>
+          <a:p>
+            <a:r>
+              <a:t>OpenAI model availability: https://developers.openai.com/api/docs/deprecations</a:t>
+            </a:r>
+          </a:p>
+          <a:p/>
+          <a:p>
+            <a:r>
+              <a:t>Proposed admission metadata: incident/source lineage; evidence grade A/B/C; execution mode; historical fidelity; model/checkpoint and access status; prompt/scaffold hashes; environment/state references; observer visibility; controls and qualification result; missing dependencies; request/token/GPU/wall-time limits and actual usage; intended and unsupported claims. Grade A can describe an executable mechanism fixture without establishing historical model equivalence. Start with own runs and public reproducible harnesses, since logs and snapshots can be captured at source. For private cases, the owner could run a versioned adapter in its existing infrastructure and share permitted evidence; that is owner-run evidence, not independently reproduced access. Choose full replay when the needed scientific claim depends on the exact actor/environment and access plus cost make it feasible. Choose a controlled mechanism study only when the narrower claim is useful and the relevant causal structure can be tested. Otherwise defer. Keep narrative leads and unsupported labels out of automatic optimizer feedback. Regression gates operate on qualified, declared suites; unknowns never become passes. Track reports considered, artifacts obtained, environments built, qualified cases, blocked reasons and measured costs. Report outcomes by fidelity and lineage instead of pooling historical, surrogate and trace-only cases. This makes the limits of the deck's incident-to-regression vision explicit.</a:t>
+            </a:r>
+          </a:p>
+        </p:txBody>
+      </p:sp>
+      <p:sp>
+        <p:nvSpPr>
+          <p:cNvPr id="4" name="Slide Number Placeholder 3"/>
+          <p:cNvSpPr>
+            <a:spLocks noGrp="1"/>
+          </p:cNvSpPr>
+          <p:nvPr>
+            <p:ph type="sldNum" idx="5" sz="quarter"/>
+          </p:nvPr>
+        </p:nvSpPr>
+        <p:spPr/>
+      </p:sp>
+    </p:spTree>
+  </p:cSld>
+  <p:clrMapOvr>
+    <a:masterClrMapping/>
+  </p:clrMapOvr>
+</p:notes>
+</file>
+
 <file path=ppt/notesSlides/notesSlide2.xml><?xml version="1.0" encoding="utf-8"?>
 <p:notes xmlns:a="http://schemas.openxmlformats.org/drawingml/2006/main" xmlns:p="http://schemas.openxmlformats.org/presentationml/2006/main" xmlns:r="http://schemas.openxmlformats.org/officeDocument/2006/relationships">
   <p:cSld>
@@ -740,6 +971,566 @@
           <a:p>
             <a:r>
               <a:t>Foundation: counterfactual evaluation infrastructure offline stages passed (4 cases, 320 transition checks, 17 grader cases).</a:t>
+            </a:r>
+          </a:p>
+        </p:txBody>
+      </p:sp>
+      <p:sp>
+        <p:nvSpPr>
+          <p:cNvPr id="4" name="Slide Number Placeholder 3"/>
+          <p:cNvSpPr>
+            <a:spLocks noGrp="1"/>
+          </p:cNvSpPr>
+          <p:nvPr>
+            <p:ph type="sldNum" idx="5" sz="quarter"/>
+          </p:nvPr>
+        </p:nvSpPr>
+        <p:spPr/>
+      </p:sp>
+    </p:spTree>
+  </p:cSld>
+  <p:clrMapOvr>
+    <a:masterClrMapping/>
+  </p:clrMapOvr>
+</p:notes>
+</file>
+
+<file path=ppt/notesSlides/notesSlide5.xml><?xml version="1.0" encoding="utf-8"?>
+<p:notes xmlns:a="http://schemas.openxmlformats.org/drawingml/2006/main" xmlns:p="http://schemas.openxmlformats.org/presentationml/2006/main" xmlns:r="http://schemas.openxmlformats.org/officeDocument/2006/relationships">
+  <p:cSld>
+    <p:spTree>
+      <p:nvGrpSpPr>
+        <p:cNvPr id="1" name=""/>
+        <p:cNvGrpSpPr/>
+        <p:nvPr/>
+      </p:nvGrpSpPr>
+      <p:grpSpPr>
+        <a:xfrm>
+          <a:off x="0" y="0"/>
+          <a:ext cx="0" cy="0"/>
+          <a:chOff x="0" y="0"/>
+          <a:chExt cx="0" cy="0"/>
+        </a:xfrm>
+      </p:grpSpPr>
+      <p:sp>
+        <p:nvSpPr>
+          <p:cNvPr id="2" name="Slide Image Placeholder 1"/>
+          <p:cNvSpPr>
+            <a:spLocks noGrp="1"/>
+          </p:cNvSpPr>
+          <p:nvPr>
+            <p:ph type="sldImg" idx="2"/>
+          </p:nvPr>
+        </p:nvSpPr>
+        <p:spPr/>
+      </p:sp>
+      <p:sp>
+        <p:nvSpPr>
+          <p:cNvPr id="3" name="Notes Placeholder 2"/>
+          <p:cNvSpPr>
+            <a:spLocks noGrp="1"/>
+          </p:cNvSpPr>
+          <p:nvPr>
+            <p:ph type="body" idx="3" sz="quarter"/>
+          </p:nvPr>
+        </p:nvSpPr>
+        <p:spPr/>
+        <p:txBody>
+          <a:bodyPr/>
+          <a:lstStyle/>
+          <a:p>
+            <a:r>
+              <a:t>Sources checked 2026-10-05. Replay implications and admission rules are design assessments, not completed replications or estimates of the original laboratories' expenditure.</a:t>
+            </a:r>
+          </a:p>
+          <a:p/>
+          <a:p>
+            <a:r>
+              <a:t>OpenAI o1 System Card, section 3: https://cdn.openai.com/o1-system-card-20241205.pdf</a:t>
+            </a:r>
+          </a:p>
+          <a:p>
+            <a:r>
+              <a:t>Baker et al. (2025), sections 2–3 and Appendix C: https://arxiv.org/html/2503.11926v1</a:t>
+            </a:r>
+          </a:p>
+          <a:p>
+            <a:r>
+              <a:t>Palisade shutdown study: https://palisaderesearch.org/research/shutdown-resistance</a:t>
+            </a:r>
+          </a:p>
+          <a:p>
+            <a:r>
+              <a:t>Palisade public harness: https://github.com/PalisadeResearch/shutdown_avoidance</a:t>
+            </a:r>
+          </a:p>
+          <a:p>
+            <a:r>
+              <a:t>Apollo scheming demo: https://www.apolloresearch.ai/science/demo-example-scheming-reasoning-evaluations</a:t>
+            </a:r>
+          </a:p>
+          <a:p>
+            <a:r>
+              <a:t>OpenAI reasoning visibility: https://developers.openai.com/api/docs/guides/reasoning</a:t>
+            </a:r>
+          </a:p>
+          <a:p>
+            <a:r>
+              <a:t>OpenAI model availability: https://developers.openai.com/api/docs/deprecations</a:t>
+            </a:r>
+          </a:p>
+          <a:p/>
+          <a:p>
+            <a:r>
+              <a:t>This is an artifact-by-artifact feasibility assessment. Do not infer that every OpenAI incident used an unreleased model, or that every evaluation detail is secret. Public checkpoint names, prompts, code or traces can each help without establishing access to the entire original experiment. Full replay here means rerunning under materially matched conditions and measuring uncertainty, not guaranteeing a byte-identical stochastic trajectory. The public reasoning API exposes summaries rather than raw reasoning text; an observation-dependent evaluator may therefore be impossible to match.</a:t>
+            </a:r>
+          </a:p>
+        </p:txBody>
+      </p:sp>
+      <p:sp>
+        <p:nvSpPr>
+          <p:cNvPr id="4" name="Slide Number Placeholder 3"/>
+          <p:cNvSpPr>
+            <a:spLocks noGrp="1"/>
+          </p:cNvSpPr>
+          <p:nvPr>
+            <p:ph type="sldNum" idx="5" sz="quarter"/>
+          </p:nvPr>
+        </p:nvSpPr>
+        <p:spPr/>
+      </p:sp>
+    </p:spTree>
+  </p:cSld>
+  <p:clrMapOvr>
+    <a:masterClrMapping/>
+  </p:clrMapOvr>
+</p:notes>
+</file>
+
+<file path=ppt/notesSlides/notesSlide6.xml><?xml version="1.0" encoding="utf-8"?>
+<p:notes xmlns:a="http://schemas.openxmlformats.org/drawingml/2006/main" xmlns:p="http://schemas.openxmlformats.org/presentationml/2006/main" xmlns:r="http://schemas.openxmlformats.org/officeDocument/2006/relationships">
+  <p:cSld>
+    <p:spTree>
+      <p:nvGrpSpPr>
+        <p:cNvPr id="1" name=""/>
+        <p:cNvGrpSpPr/>
+        <p:nvPr/>
+      </p:nvGrpSpPr>
+      <p:grpSpPr>
+        <a:xfrm>
+          <a:off x="0" y="0"/>
+          <a:ext cx="0" cy="0"/>
+          <a:chOff x="0" y="0"/>
+          <a:chExt cx="0" cy="0"/>
+        </a:xfrm>
+      </p:grpSpPr>
+      <p:sp>
+        <p:nvSpPr>
+          <p:cNvPr id="2" name="Slide Image Placeholder 1"/>
+          <p:cNvSpPr>
+            <a:spLocks noGrp="1"/>
+          </p:cNvSpPr>
+          <p:nvPr>
+            <p:ph type="sldImg" idx="2"/>
+          </p:nvPr>
+        </p:nvSpPr>
+        <p:spPr/>
+      </p:sp>
+      <p:sp>
+        <p:nvSpPr>
+          <p:cNvPr id="3" name="Notes Placeholder 2"/>
+          <p:cNvSpPr>
+            <a:spLocks noGrp="1"/>
+          </p:cNvSpPr>
+          <p:nvPr>
+            <p:ph type="body" idx="3" sz="quarter"/>
+          </p:nvPr>
+        </p:nvSpPr>
+        <p:spPr/>
+        <p:txBody>
+          <a:bodyPr/>
+          <a:lstStyle/>
+          <a:p>
+            <a:r>
+              <a:t>Sources checked 2026-10-05. Replay implications and admission rules are design assessments, not completed replications or estimates of the original laboratories' expenditure.</a:t>
+            </a:r>
+          </a:p>
+          <a:p/>
+          <a:p>
+            <a:r>
+              <a:t>OpenAI o1 System Card, section 3: https://cdn.openai.com/o1-system-card-20241205.pdf</a:t>
+            </a:r>
+          </a:p>
+          <a:p>
+            <a:r>
+              <a:t>Baker et al. (2025), sections 2–3 and Appendix C: https://arxiv.org/html/2503.11926v1</a:t>
+            </a:r>
+          </a:p>
+          <a:p>
+            <a:r>
+              <a:t>Palisade shutdown study: https://palisaderesearch.org/research/shutdown-resistance</a:t>
+            </a:r>
+          </a:p>
+          <a:p>
+            <a:r>
+              <a:t>Palisade public harness: https://github.com/PalisadeResearch/shutdown_avoidance</a:t>
+            </a:r>
+          </a:p>
+          <a:p>
+            <a:r>
+              <a:t>Apollo scheming demo: https://www.apolloresearch.ai/science/demo-example-scheming-reasoning-evaluations</a:t>
+            </a:r>
+          </a:p>
+          <a:p>
+            <a:r>
+              <a:t>OpenAI reasoning visibility: https://developers.openai.com/api/docs/guides/reasoning</a:t>
+            </a:r>
+          </a:p>
+          <a:p>
+            <a:r>
+              <a:t>OpenAI model availability: https://developers.openai.com/api/docs/deprecations</a:t>
+            </a:r>
+          </a:p>
+          <a:p/>
+          <a:p>
+            <a:r>
+              <a:t>Sources: o1 System Card section 3; Baker et al. sections 2–3 and Appendix C; Palisade's public shutdown_avoidance repository. The last column is our inference about requirements, not a claim that an exhaustive artifact search has proved every item unavailable. Account access and retired snapshots must be checked separately. The shutdown example is an external study of an OpenAI model, unlike the training-time examples. Do not pool their reproduction feasibility.</a:t>
+            </a:r>
+          </a:p>
+        </p:txBody>
+      </p:sp>
+      <p:sp>
+        <p:nvSpPr>
+          <p:cNvPr id="4" name="Slide Number Placeholder 3"/>
+          <p:cNvSpPr>
+            <a:spLocks noGrp="1"/>
+          </p:cNvSpPr>
+          <p:nvPr>
+            <p:ph type="sldNum" idx="5" sz="quarter"/>
+          </p:nvPr>
+        </p:nvSpPr>
+        <p:spPr/>
+      </p:sp>
+    </p:spTree>
+  </p:cSld>
+  <p:clrMapOvr>
+    <a:masterClrMapping/>
+  </p:clrMapOvr>
+</p:notes>
+</file>
+
+<file path=ppt/notesSlides/notesSlide7.xml><?xml version="1.0" encoding="utf-8"?>
+<p:notes xmlns:a="http://schemas.openxmlformats.org/drawingml/2006/main" xmlns:p="http://schemas.openxmlformats.org/presentationml/2006/main" xmlns:r="http://schemas.openxmlformats.org/officeDocument/2006/relationships">
+  <p:cSld>
+    <p:spTree>
+      <p:nvGrpSpPr>
+        <p:cNvPr id="1" name=""/>
+        <p:cNvGrpSpPr/>
+        <p:nvPr/>
+      </p:nvGrpSpPr>
+      <p:grpSpPr>
+        <a:xfrm>
+          <a:off x="0" y="0"/>
+          <a:ext cx="0" cy="0"/>
+          <a:chOff x="0" y="0"/>
+          <a:chExt cx="0" cy="0"/>
+        </a:xfrm>
+      </p:grpSpPr>
+      <p:sp>
+        <p:nvSpPr>
+          <p:cNvPr id="2" name="Slide Image Placeholder 1"/>
+          <p:cNvSpPr>
+            <a:spLocks noGrp="1"/>
+          </p:cNvSpPr>
+          <p:nvPr>
+            <p:ph type="sldImg" idx="2"/>
+          </p:nvPr>
+        </p:nvSpPr>
+        <p:spPr/>
+      </p:sp>
+      <p:sp>
+        <p:nvSpPr>
+          <p:cNvPr id="3" name="Notes Placeholder 2"/>
+          <p:cNvSpPr>
+            <a:spLocks noGrp="1"/>
+          </p:cNvSpPr>
+          <p:nvPr>
+            <p:ph type="body" idx="3" sz="quarter"/>
+          </p:nvPr>
+        </p:nvSpPr>
+        <p:spPr/>
+        <p:txBody>
+          <a:bodyPr/>
+          <a:lstStyle/>
+          <a:p>
+            <a:r>
+              <a:t>Sources checked 2026-10-05. Replay implications and admission rules are design assessments, not completed replications or estimates of the original laboratories' expenditure.</a:t>
+            </a:r>
+          </a:p>
+          <a:p/>
+          <a:p>
+            <a:r>
+              <a:t>OpenAI o1 System Card, section 3: https://cdn.openai.com/o1-system-card-20241205.pdf</a:t>
+            </a:r>
+          </a:p>
+          <a:p>
+            <a:r>
+              <a:t>Baker et al. (2025), sections 2–3 and Appendix C: https://arxiv.org/html/2503.11926v1</a:t>
+            </a:r>
+          </a:p>
+          <a:p>
+            <a:r>
+              <a:t>Palisade shutdown study: https://palisaderesearch.org/research/shutdown-resistance</a:t>
+            </a:r>
+          </a:p>
+          <a:p>
+            <a:r>
+              <a:t>Palisade public harness: https://github.com/PalisadeResearch/shutdown_avoidance</a:t>
+            </a:r>
+          </a:p>
+          <a:p>
+            <a:r>
+              <a:t>Apollo scheming demo: https://www.apolloresearch.ai/science/demo-example-scheming-reasoning-evaluations</a:t>
+            </a:r>
+          </a:p>
+          <a:p>
+            <a:r>
+              <a:t>OpenAI reasoning visibility: https://developers.openai.com/api/docs/guides/reasoning</a:t>
+            </a:r>
+          </a:p>
+          <a:p>
+            <a:r>
+              <a:t>OpenAI model availability: https://developers.openai.com/api/docs/deprecations</a:t>
+            </a:r>
+          </a:p>
+          <a:p/>
+          <a:p>
+            <a:r>
+              <a:t>The first two modes can be useful even if the incident-generating model is unavailable. Re-scoring can consume judge API calls; fixed-action execution can consume environment resources. Neither is automatically cost-free. Selected public traces can support a conditional detection evaluation but do not provide a population denominator. An injected action tests a control against that action, not whether a policy prevents an agent from independently selecting another action. Changing a tool response invalidates a recorded future as a behavioral counterfactual: resample the actor from the intervention point, or limit the claim to the fixed-action effect. This matches the distinction in docs/counterfactual-replay.md.</a:t>
+            </a:r>
+          </a:p>
+        </p:txBody>
+      </p:sp>
+      <p:sp>
+        <p:nvSpPr>
+          <p:cNvPr id="4" name="Slide Number Placeholder 3"/>
+          <p:cNvSpPr>
+            <a:spLocks noGrp="1"/>
+          </p:cNvSpPr>
+          <p:nvPr>
+            <p:ph type="sldNum" idx="5" sz="quarter"/>
+          </p:nvPr>
+        </p:nvSpPr>
+        <p:spPr/>
+      </p:sp>
+    </p:spTree>
+  </p:cSld>
+  <p:clrMapOvr>
+    <a:masterClrMapping/>
+  </p:clrMapOvr>
+</p:notes>
+</file>
+
+<file path=ppt/notesSlides/notesSlide8.xml><?xml version="1.0" encoding="utf-8"?>
+<p:notes xmlns:a="http://schemas.openxmlformats.org/drawingml/2006/main" xmlns:p="http://schemas.openxmlformats.org/presentationml/2006/main" xmlns:r="http://schemas.openxmlformats.org/officeDocument/2006/relationships">
+  <p:cSld>
+    <p:spTree>
+      <p:nvGrpSpPr>
+        <p:cNvPr id="1" name=""/>
+        <p:cNvGrpSpPr/>
+        <p:nvPr/>
+      </p:nvGrpSpPr>
+      <p:grpSpPr>
+        <a:xfrm>
+          <a:off x="0" y="0"/>
+          <a:ext cx="0" cy="0"/>
+          <a:chOff x="0" y="0"/>
+          <a:chExt cx="0" cy="0"/>
+        </a:xfrm>
+      </p:grpSpPr>
+      <p:sp>
+        <p:nvSpPr>
+          <p:cNvPr id="2" name="Slide Image Placeholder 1"/>
+          <p:cNvSpPr>
+            <a:spLocks noGrp="1"/>
+          </p:cNvSpPr>
+          <p:nvPr>
+            <p:ph type="sldImg" idx="2"/>
+          </p:nvPr>
+        </p:nvSpPr>
+        <p:spPr/>
+      </p:sp>
+      <p:sp>
+        <p:nvSpPr>
+          <p:cNvPr id="3" name="Notes Placeholder 2"/>
+          <p:cNvSpPr>
+            <a:spLocks noGrp="1"/>
+          </p:cNvSpPr>
+          <p:nvPr>
+            <p:ph type="body" idx="3" sz="quarter"/>
+          </p:nvPr>
+        </p:nvSpPr>
+        <p:spPr/>
+        <p:txBody>
+          <a:bodyPr/>
+          <a:lstStyle/>
+          <a:p>
+            <a:r>
+              <a:t>Sources checked 2026-10-05. Replay implications and admission rules are design assessments, not completed replications or estimates of the original laboratories' expenditure.</a:t>
+            </a:r>
+          </a:p>
+          <a:p/>
+          <a:p>
+            <a:r>
+              <a:t>OpenAI o1 System Card, section 3: https://cdn.openai.com/o1-system-card-20241205.pdf</a:t>
+            </a:r>
+          </a:p>
+          <a:p>
+            <a:r>
+              <a:t>Baker et al. (2025), sections 2–3 and Appendix C: https://arxiv.org/html/2503.11926v1</a:t>
+            </a:r>
+          </a:p>
+          <a:p>
+            <a:r>
+              <a:t>Palisade shutdown study: https://palisaderesearch.org/research/shutdown-resistance</a:t>
+            </a:r>
+          </a:p>
+          <a:p>
+            <a:r>
+              <a:t>Palisade public harness: https://github.com/PalisadeResearch/shutdown_avoidance</a:t>
+            </a:r>
+          </a:p>
+          <a:p>
+            <a:r>
+              <a:t>Apollo scheming demo: https://www.apolloresearch.ai/science/demo-example-scheming-reasoning-evaluations</a:t>
+            </a:r>
+          </a:p>
+          <a:p>
+            <a:r>
+              <a:t>OpenAI reasoning visibility: https://developers.openai.com/api/docs/guides/reasoning</a:t>
+            </a:r>
+          </a:p>
+          <a:p>
+            <a:r>
+              <a:t>OpenAI model availability: https://developers.openai.com/api/docs/deprecations</a:t>
+            </a:r>
+          </a:p>
+          <a:p/>
+          <a:p>
+            <a:r>
+              <a:t>These are proposed qualification requirements, not a statement that this project already supports arbitrary evaluator infrastructure. A harness adapter needs snapshot/reset, tool input/output interception and trusted event capture. External services, time, randomness, authentication and asynchronous actions can make snapshots incomplete. Mocks must preserve the state transitions relevant to the tested mechanism; their deviations must be declared. Independently check the effect rather than trusting a score the agent can manipulate. For a grader-induced failure, the grader configuration is itself a critical dependency. Reject or narrow the causal claim when it cannot be recovered. See docs/counterfactual-replay.md and docs/standardized-benchmarks.md.</a:t>
+            </a:r>
+          </a:p>
+        </p:txBody>
+      </p:sp>
+      <p:sp>
+        <p:nvSpPr>
+          <p:cNvPr id="4" name="Slide Number Placeholder 3"/>
+          <p:cNvSpPr>
+            <a:spLocks noGrp="1"/>
+          </p:cNvSpPr>
+          <p:nvPr>
+            <p:ph type="sldNum" idx="5" sz="quarter"/>
+          </p:nvPr>
+        </p:nvSpPr>
+        <p:spPr/>
+      </p:sp>
+    </p:spTree>
+  </p:cSld>
+  <p:clrMapOvr>
+    <a:masterClrMapping/>
+  </p:clrMapOvr>
+</p:notes>
+</file>
+
+<file path=ppt/notesSlides/notesSlide9.xml><?xml version="1.0" encoding="utf-8"?>
+<p:notes xmlns:a="http://schemas.openxmlformats.org/drawingml/2006/main" xmlns:p="http://schemas.openxmlformats.org/presentationml/2006/main" xmlns:r="http://schemas.openxmlformats.org/officeDocument/2006/relationships">
+  <p:cSld>
+    <p:spTree>
+      <p:nvGrpSpPr>
+        <p:cNvPr id="1" name=""/>
+        <p:cNvGrpSpPr/>
+        <p:nvPr/>
+      </p:nvGrpSpPr>
+      <p:grpSpPr>
+        <a:xfrm>
+          <a:off x="0" y="0"/>
+          <a:ext cx="0" cy="0"/>
+          <a:chOff x="0" y="0"/>
+          <a:chExt cx="0" cy="0"/>
+        </a:xfrm>
+      </p:grpSpPr>
+      <p:sp>
+        <p:nvSpPr>
+          <p:cNvPr id="2" name="Slide Image Placeholder 1"/>
+          <p:cNvSpPr>
+            <a:spLocks noGrp="1"/>
+          </p:cNvSpPr>
+          <p:nvPr>
+            <p:ph type="sldImg" idx="2"/>
+          </p:nvPr>
+        </p:nvSpPr>
+        <p:spPr/>
+      </p:sp>
+      <p:sp>
+        <p:nvSpPr>
+          <p:cNvPr id="3" name="Notes Placeholder 2"/>
+          <p:cNvSpPr>
+            <a:spLocks noGrp="1"/>
+          </p:cNvSpPr>
+          <p:nvPr>
+            <p:ph type="body" idx="3" sz="quarter"/>
+          </p:nvPr>
+        </p:nvSpPr>
+        <p:spPr/>
+        <p:txBody>
+          <a:bodyPr/>
+          <a:lstStyle/>
+          <a:p>
+            <a:r>
+              <a:t>Sources checked 2026-10-05. Replay implications and admission rules are design assessments, not completed replications or estimates of the original laboratories' expenditure.</a:t>
+            </a:r>
+          </a:p>
+          <a:p/>
+          <a:p>
+            <a:r>
+              <a:t>OpenAI o1 System Card, section 3: https://cdn.openai.com/o1-system-card-20241205.pdf</a:t>
+            </a:r>
+          </a:p>
+          <a:p>
+            <a:r>
+              <a:t>Baker et al. (2025), sections 2–3 and Appendix C: https://arxiv.org/html/2503.11926v1</a:t>
+            </a:r>
+          </a:p>
+          <a:p>
+            <a:r>
+              <a:t>Palisade shutdown study: https://palisaderesearch.org/research/shutdown-resistance</a:t>
+            </a:r>
+          </a:p>
+          <a:p>
+            <a:r>
+              <a:t>Palisade public harness: https://github.com/PalisadeResearch/shutdown_avoidance</a:t>
+            </a:r>
+          </a:p>
+          <a:p>
+            <a:r>
+              <a:t>Apollo scheming demo: https://www.apolloresearch.ai/science/demo-example-scheming-reasoning-evaluations</a:t>
+            </a:r>
+          </a:p>
+          <a:p>
+            <a:r>
+              <a:t>OpenAI reasoning visibility: https://developers.openai.com/api/docs/guides/reasoning</a:t>
+            </a:r>
+          </a:p>
+          <a:p>
+            <a:r>
+              <a:t>OpenAI model availability: https://developers.openai.com/api/docs/deprecations</a:t>
+            </a:r>
+          </a:p>
+          <a:p/>
+          <a:p>
+            <a:r>
+              <a:t>Resource accounting: sum billed input/output tokens times the selected model rates for actor and judge calls; include repeated history, hidden reasoning, retries and failed usage. For self-hosting, measure GPU-hours, memory, throughput and utilization on the actual checkpoint/context, then apply the applicable hardware rate. Add CPU/IO, reset, storage, engineering and human qualification. A public inference API quote does not estimate an internal RL experiment or buy access to missing weights. Large models need not be trained again merely to rerun inference if the exact checkpoint is accessible; reproducing a training-dependent cause is a different study. Dollar totals are premature before these dependencies are known. API availability/rate limits and engineering lead time can dominate even when per-token cost is modest. The sampling illustration is ceil(log(0.05)/log(1-0.001)) = 2,995 under independent, fixed-rate Bernoulli trials. This is not an empirical rate, a safety certificate, or the sample size for a policy comparison. Correlated variants do not replace independent lineages. Reuse shared fixed-pool development trajectories where valid; do not count them twice for B3/B4 or reuse test outcomes for selection. Cap requests, tokens, GPU-hours and wall time; timeouts remain unknown outcomes.</a:t>
             </a:r>
           </a:p>
         </p:txBody>
@@ -21982,7 +22773,7 @@
                 </a:solidFill>
                 <a:latin typeface="Arial"/>
               </a:rPr>
-              <a:t>Summary</a:t>
+              <a:t>Full incident replay starts with an access problem</a:t>
             </a:r>
           </a:p>
         </p:txBody>
@@ -21995,8 +22786,8 @@
         </p:nvSpPr>
         <p:spPr>
           <a:xfrm>
-            <a:off x="8503920" y="109728"/>
-            <a:ext cx="3200400" cy="274320"/>
+            <a:off x="640080" y="868680"/>
+            <a:ext cx="10972800" cy="365760"/>
           </a:xfrm>
           <a:prstGeom prst="rect">
             <a:avLst/>
@@ -22009,6 +22800,45 @@
           </a:bodyPr>
           <a:lstStyle/>
           <a:p>
+            <a:pPr algn="l">
+              <a:lnSpc>
+                <a:spcPct val="110000"/>
+              </a:lnSpc>
+            </a:pPr>
+            <a:r>
+              <a:rPr sz="1300" b="0" i="0">
+                <a:solidFill>
+                  <a:srgbClr val="666666"/>
+                </a:solidFill>
+                <a:latin typeface="Arial"/>
+              </a:rPr>
+              <a:t>Assess faithful reproduction first; a credible report is not automatically a replayable case</a:t>
+            </a:r>
+          </a:p>
+        </p:txBody>
+      </p:sp>
+      <p:sp>
+        <p:nvSpPr>
+          <p:cNvPr id="5" name="TextBox 4"/>
+          <p:cNvSpPr txBox="1"/>
+          <p:nvPr/>
+        </p:nvSpPr>
+        <p:spPr>
+          <a:xfrm>
+            <a:off x="8503920" y="109728"/>
+            <a:ext cx="3200400" cy="274320"/>
+          </a:xfrm>
+          <a:prstGeom prst="rect">
+            <a:avLst/>
+          </a:prstGeom>
+          <a:noFill/>
+        </p:spPr>
+        <p:txBody>
+          <a:bodyPr wrap="square" lIns="45720" rIns="45720" tIns="27432" bIns="27432" anchor="t">
+            <a:spAutoFit/>
+          </a:bodyPr>
+          <a:lstStyle/>
+          <a:p>
             <a:pPr algn="r">
               <a:lnSpc>
                 <a:spcPct val="110000"/>
@@ -22021,14 +22851,14 @@
                 </a:solidFill>
                 <a:latin typeface="Arial"/>
               </a:rPr>
-              <a:t>SUMMARY</a:t>
+              <a:t>7 · REPLAY FEASIBILITY</a:t>
             </a:r>
           </a:p>
         </p:txBody>
       </p:sp>
       <p:cxnSp>
         <p:nvCxnSpPr>
-          <p:cNvPr id="5" name="Connector 4"/>
+          <p:cNvPr id="6" name="Connector 5"/>
           <p:cNvCxnSpPr/>
           <p:nvPr/>
         </p:nvCxnSpPr>
@@ -22063,7 +22893,7 @@
       </p:cxnSp>
       <p:sp>
         <p:nvSpPr>
-          <p:cNvPr id="6" name="TextBox 5"/>
+          <p:cNvPr id="7" name="TextBox 6"/>
           <p:cNvSpPr txBox="1"/>
           <p:nvPr/>
         </p:nvSpPr>
@@ -22102,7 +22932,7 @@
       </p:sp>
       <p:sp>
         <p:nvSpPr>
-          <p:cNvPr id="7" name="TextBox 6"/>
+          <p:cNvPr id="8" name="TextBox 7"/>
           <p:cNvSpPr txBox="1"/>
           <p:nvPr/>
         </p:nvSpPr>
@@ -22141,113 +22971,14 @@
       </p:sp>
       <p:sp>
         <p:nvSpPr>
-          <p:cNvPr id="8" name="TextBox 7"/>
-          <p:cNvSpPr txBox="1"/>
-          <p:nvPr/>
-        </p:nvSpPr>
-        <p:spPr>
-          <a:xfrm>
-            <a:off x="457200" y="1325880"/>
-            <a:ext cx="6583680" cy="3840480"/>
-          </a:xfrm>
-          <a:prstGeom prst="rect">
-            <a:avLst/>
-          </a:prstGeom>
-          <a:noFill/>
-        </p:spPr>
-        <p:txBody>
-          <a:bodyPr wrap="square" lIns="45720" rIns="45720">
-            <a:spAutoFit/>
-          </a:bodyPr>
-          <a:lstStyle/>
-          <a:p>
-            <a:pPr>
-              <a:lnSpc>
-                <a:spcPct val="112000"/>
-              </a:lnSpc>
-              <a:spcAft>
-                <a:spcPts val="1000"/>
-              </a:spcAft>
-            </a:pPr>
-            <a:r>
-              <a:rPr sz="1800" b="0" i="0">
-                <a:solidFill>
-                  <a:srgbClr val="111111"/>
-                </a:solidFill>
-                <a:latin typeface="Arial"/>
-              </a:rPr>
-              <a:t>•  Incidents will keep happening; a scorer cannot see them, an observer can</a:t>
-            </a:r>
-          </a:p>
-          <a:p>
-            <a:pPr>
-              <a:lnSpc>
-                <a:spcPct val="112000"/>
-              </a:lnSpc>
-              <a:spcAft>
-                <a:spcPts val="1000"/>
-              </a:spcAft>
-            </a:pPr>
-            <a:r>
-              <a:rPr sz="1800" b="0" i="0">
-                <a:solidFill>
-                  <a:srgbClr val="111111"/>
-                </a:solidFill>
-                <a:latin typeface="Arial"/>
-              </a:rPr>
-              <a:t>•  Each verified incident becomes an executable case with a benign twin</a:t>
-            </a:r>
-          </a:p>
-          <a:p>
-            <a:pPr>
-              <a:lnSpc>
-                <a:spcPct val="112000"/>
-              </a:lnSpc>
-              <a:spcAft>
-                <a:spcPts val="1000"/>
-              </a:spcAft>
-            </a:pPr>
-            <a:r>
-              <a:rPr sz="1800" b="0" i="0">
-                <a:solidFill>
-                  <a:srgbClr val="111111"/>
-                </a:solidFill>
-                <a:latin typeface="Arial"/>
-              </a:rPr>
-              <a:t>•  A scheduled loop replays, revises and releases only what passes a regression gate and a human</a:t>
-            </a:r>
-          </a:p>
-          <a:p>
-            <a:pPr>
-              <a:lnSpc>
-                <a:spcPct val="112000"/>
-              </a:lnSpc>
-              <a:spcAft>
-                <a:spcPts val="1000"/>
-              </a:spcAft>
-            </a:pPr>
-            <a:r>
-              <a:rPr sz="1800" b="0" i="0">
-                <a:solidFill>
-                  <a:srgbClr val="111111"/>
-                </a:solidFill>
-                <a:latin typeface="Arial"/>
-              </a:rPr>
-              <a:t>•  The frozen policy is judged on untouched tasks and on incidents reported after the cutoff</a:t>
-            </a:r>
-          </a:p>
-        </p:txBody>
-      </p:sp>
-      <p:sp>
-        <p:nvSpPr>
           <p:cNvPr id="9" name="Rounded Rectangle 8"/>
           <p:cNvSpPr/>
           <p:nvPr/>
         </p:nvSpPr>
         <p:spPr>
           <a:xfrm>
-            <a:off x="7406640" y="1325880"/>
-            <a:ext cx="4325112" cy="3840480"/>
+            <a:off x="457200" y="1325880"/>
+            <a:ext cx="3657600" cy="3063240"/>
           </a:xfrm>
           <a:prstGeom prst="roundRect">
             <a:avLst>
@@ -22255,11 +22986,11 @@
             </a:avLst>
           </a:prstGeom>
           <a:solidFill>
-            <a:srgbClr val="EAF5EF"/>
+            <a:srgbClr val="EDF4FB"/>
           </a:solidFill>
           <a:ln w="12700">
             <a:solidFill>
-              <a:srgbClr val="2E7D5B"/>
+              <a:srgbClr val="365E9E"/>
             </a:solidFill>
           </a:ln>
           <a:effectLst/>
@@ -22292,8 +23023,8 @@
         </p:nvSpPr>
         <p:spPr>
           <a:xfrm>
-            <a:off x="7516368" y="1399032"/>
-            <a:ext cx="4123944" cy="365760"/>
+            <a:off x="566928" y="1399032"/>
+            <a:ext cx="3456432" cy="365760"/>
           </a:xfrm>
           <a:prstGeom prst="rect">
             <a:avLst/>
@@ -22314,11 +23045,11 @@
             <a:r>
               <a:rPr sz="1600" b="1" i="0">
                 <a:solidFill>
-                  <a:srgbClr val="2E7D5B"/>
-                </a:solidFill>
-                <a:latin typeface="Arial"/>
-              </a:rPr>
-              <a:t>Decisions to make</a:t>
+                  <a:srgbClr val="365E9E"/>
+                </a:solidFill>
+                <a:latin typeface="Arial"/>
+              </a:rPr>
+              <a:t>Model / checkpoint</a:t>
             </a:r>
           </a:p>
         </p:txBody>
@@ -22331,8 +23062,8 @@
         </p:nvSpPr>
         <p:spPr>
           <a:xfrm>
-            <a:off x="7479792" y="1764792"/>
-            <a:ext cx="4178808" cy="3337560"/>
+            <a:off x="530352" y="1764792"/>
+            <a:ext cx="3511296" cy="2560320"/>
           </a:xfrm>
           <a:prstGeom prst="rect">
             <a:avLst/>
@@ -22360,7 +23091,7 @@
                 </a:solidFill>
                 <a:latin typeface="Arial"/>
               </a:rPr>
-              <a:t>•  Opt-in plugin first?</a:t>
+              <a:t>•  Internal, pre-mitigation or intermediate checkpoints may be inaccessible</a:t>
             </a:r>
           </a:p>
           <a:p>
@@ -22379,7 +23110,7 @@
                 </a:solidFill>
                 <a:latin typeface="Arial"/>
               </a:rPr>
-              <a:t>•  First benchmark for B3 vs B4?</a:t>
+              <a:t>•  A public model name does not identify the incident checkpoint</a:t>
             </a:r>
           </a:p>
           <a:p>
@@ -22398,9 +23129,117 @@
                 </a:solidFill>
                 <a:latin typeface="Arial"/>
               </a:rPr>
-              <a:t>•  Who qualifies shared cases?</a:t>
-            </a:r>
-          </a:p>
+              <a:t>•  More GPU / API budget cannot recover unavailable weights or access</a:t>
+            </a:r>
+          </a:p>
+        </p:txBody>
+      </p:sp>
+      <p:sp>
+        <p:nvSpPr>
+          <p:cNvPr id="12" name="Rounded Rectangle 11"/>
+          <p:cNvSpPr/>
+          <p:nvPr/>
+        </p:nvSpPr>
+        <p:spPr>
+          <a:xfrm>
+            <a:off x="4270248" y="1325880"/>
+            <a:ext cx="3657600" cy="3063240"/>
+          </a:xfrm>
+          <a:prstGeom prst="roundRect">
+            <a:avLst>
+              <a:gd name="adj" fmla="val 6000"/>
+            </a:avLst>
+          </a:prstGeom>
+          <a:solidFill>
+            <a:srgbClr val="FDF3E7"/>
+          </a:solidFill>
+          <a:ln w="12700">
+            <a:solidFill>
+              <a:srgbClr val="B8732A"/>
+            </a:solidFill>
+          </a:ln>
+          <a:effectLst/>
+        </p:spPr>
+        <p:style>
+          <a:lnRef idx="1">
+            <a:schemeClr val="accent1"/>
+          </a:lnRef>
+          <a:fillRef idx="3">
+            <a:schemeClr val="accent1"/>
+          </a:fillRef>
+          <a:effectRef idx="2">
+            <a:schemeClr val="accent1"/>
+          </a:effectRef>
+          <a:fontRef idx="minor">
+            <a:schemeClr val="lt1"/>
+          </a:fontRef>
+        </p:style>
+        <p:txBody>
+          <a:bodyPr rtlCol="0" anchor="ctr"/>
+          <a:lstStyle/>
+          <a:p/>
+        </p:txBody>
+      </p:sp>
+      <p:sp>
+        <p:nvSpPr>
+          <p:cNvPr id="13" name="TextBox 12"/>
+          <p:cNvSpPr txBox="1"/>
+          <p:nvPr/>
+        </p:nvSpPr>
+        <p:spPr>
+          <a:xfrm>
+            <a:off x="4379976" y="1399032"/>
+            <a:ext cx="3456432" cy="365760"/>
+          </a:xfrm>
+          <a:prstGeom prst="rect">
+            <a:avLst/>
+          </a:prstGeom>
+          <a:noFill/>
+        </p:spPr>
+        <p:txBody>
+          <a:bodyPr wrap="square" lIns="45720" rIns="45720" tIns="27432" bIns="27432" anchor="t">
+            <a:spAutoFit/>
+          </a:bodyPr>
+          <a:lstStyle/>
+          <a:p>
+            <a:pPr algn="l">
+              <a:lnSpc>
+                <a:spcPct val="110000"/>
+              </a:lnSpc>
+            </a:pPr>
+            <a:r>
+              <a:rPr sz="1600" b="1" i="0">
+                <a:solidFill>
+                  <a:srgbClr val="B8732A"/>
+                </a:solidFill>
+                <a:latin typeface="Arial"/>
+              </a:rPr>
+              <a:t>Evaluator / environment</a:t>
+            </a:r>
+          </a:p>
+        </p:txBody>
+      </p:sp>
+      <p:sp>
+        <p:nvSpPr>
+          <p:cNvPr id="14" name="TextBox 13"/>
+          <p:cNvSpPr txBox="1"/>
+          <p:nvPr/>
+        </p:nvSpPr>
+        <p:spPr>
+          <a:xfrm>
+            <a:off x="4343400" y="1764792"/>
+            <a:ext cx="3511296" cy="2560320"/>
+          </a:xfrm>
+          <a:prstGeom prst="rect">
+            <a:avLst/>
+          </a:prstGeom>
+          <a:noFill/>
+        </p:spPr>
+        <p:txBody>
+          <a:bodyPr wrap="square" lIns="45720" rIns="45720">
+            <a:spAutoFit/>
+          </a:bodyPr>
+          <a:lstStyle/>
           <a:p>
             <a:pPr>
               <a:lnSpc>
@@ -22417,21 +23256,224 @@
                 </a:solidFill>
                 <a:latin typeface="Arial"/>
               </a:rPr>
-              <a:t>•  Budget for Phases 2 and 3?</a:t>
-            </a:r>
-          </a:p>
-        </p:txBody>
-      </p:sp>
-      <p:sp>
-        <p:nvSpPr>
-          <p:cNvPr id="12" name="Rounded Rectangle 11"/>
+              <a:t>•  Prompts, tools, permissions, hidden tests and rewards can shape the incident</a:t>
+            </a:r>
+          </a:p>
+          <a:p>
+            <a:pPr>
+              <a:lnSpc>
+                <a:spcPct val="108000"/>
+              </a:lnSpc>
+              <a:spcAft>
+                <a:spcPts val="200"/>
+              </a:spcAft>
+            </a:pPr>
+            <a:r>
+              <a:rPr sz="1500" b="0" i="0">
+                <a:solidFill>
+                  <a:srgbClr val="111111"/>
+                </a:solidFill>
+                <a:latin typeface="Arial"/>
+              </a:rPr>
+              <a:t>•  Reports may omit state, versions or setup details</a:t>
+            </a:r>
+          </a:p>
+          <a:p>
+            <a:pPr>
+              <a:lnSpc>
+                <a:spcPct val="108000"/>
+              </a:lnSpc>
+              <a:spcAft>
+                <a:spcPts val="200"/>
+              </a:spcAft>
+            </a:pPr>
+            <a:r>
+              <a:rPr sz="1500" b="0" i="0">
+                <a:solidFill>
+                  <a:srgbClr val="111111"/>
+                </a:solidFill>
+                <a:latin typeface="Arial"/>
+              </a:rPr>
+              <a:t>•  A plausible reconstruction can change the failure mechanism</a:t>
+            </a:r>
+          </a:p>
+        </p:txBody>
+      </p:sp>
+      <p:sp>
+        <p:nvSpPr>
+          <p:cNvPr id="15" name="Rounded Rectangle 14"/>
           <p:cNvSpPr/>
           <p:nvPr/>
         </p:nvSpPr>
         <p:spPr>
           <a:xfrm>
-            <a:off x="457200" y="5440680"/>
-            <a:ext cx="11277295" cy="822960"/>
+            <a:off x="8074152" y="1325880"/>
+            <a:ext cx="3657600" cy="3063240"/>
+          </a:xfrm>
+          <a:prstGeom prst="roundRect">
+            <a:avLst>
+              <a:gd name="adj" fmla="val 6000"/>
+            </a:avLst>
+          </a:prstGeom>
+          <a:solidFill>
+            <a:srgbClr val="FBEFEC"/>
+          </a:solidFill>
+          <a:ln w="12700">
+            <a:solidFill>
+              <a:srgbClr val="B34831"/>
+            </a:solidFill>
+          </a:ln>
+          <a:effectLst/>
+        </p:spPr>
+        <p:style>
+          <a:lnRef idx="1">
+            <a:schemeClr val="accent1"/>
+          </a:lnRef>
+          <a:fillRef idx="3">
+            <a:schemeClr val="accent1"/>
+          </a:fillRef>
+          <a:effectRef idx="2">
+            <a:schemeClr val="accent1"/>
+          </a:effectRef>
+          <a:fontRef idx="minor">
+            <a:schemeClr val="lt1"/>
+          </a:fontRef>
+        </p:style>
+        <p:txBody>
+          <a:bodyPr rtlCol="0" anchor="ctr"/>
+          <a:lstStyle/>
+          <a:p/>
+        </p:txBody>
+      </p:sp>
+      <p:sp>
+        <p:nvSpPr>
+          <p:cNvPr id="16" name="TextBox 15"/>
+          <p:cNvSpPr txBox="1"/>
+          <p:nvPr/>
+        </p:nvSpPr>
+        <p:spPr>
+          <a:xfrm>
+            <a:off x="8183880" y="1399032"/>
+            <a:ext cx="3456432" cy="365760"/>
+          </a:xfrm>
+          <a:prstGeom prst="rect">
+            <a:avLst/>
+          </a:prstGeom>
+          <a:noFill/>
+        </p:spPr>
+        <p:txBody>
+          <a:bodyPr wrap="square" lIns="45720" rIns="45720" tIns="27432" bIns="27432" anchor="t">
+            <a:spAutoFit/>
+          </a:bodyPr>
+          <a:lstStyle/>
+          <a:p>
+            <a:pPr algn="l">
+              <a:lnSpc>
+                <a:spcPct val="110000"/>
+              </a:lnSpc>
+            </a:pPr>
+            <a:r>
+              <a:rPr sz="1600" b="1" i="0">
+                <a:solidFill>
+                  <a:srgbClr val="B34831"/>
+                </a:solidFill>
+                <a:latin typeface="Arial"/>
+              </a:rPr>
+              <a:t>Evidence / observability</a:t>
+            </a:r>
+          </a:p>
+        </p:txBody>
+      </p:sp>
+      <p:sp>
+        <p:nvSpPr>
+          <p:cNvPr id="17" name="TextBox 16"/>
+          <p:cNvSpPr txBox="1"/>
+          <p:nvPr/>
+        </p:nvSpPr>
+        <p:spPr>
+          <a:xfrm>
+            <a:off x="8147304" y="1764792"/>
+            <a:ext cx="3511296" cy="2560320"/>
+          </a:xfrm>
+          <a:prstGeom prst="rect">
+            <a:avLst/>
+          </a:prstGeom>
+          <a:noFill/>
+        </p:spPr>
+        <p:txBody>
+          <a:bodyPr wrap="square" lIns="45720" rIns="45720">
+            <a:spAutoFit/>
+          </a:bodyPr>
+          <a:lstStyle/>
+          <a:p>
+            <a:pPr>
+              <a:lnSpc>
+                <a:spcPct val="108000"/>
+              </a:lnSpc>
+              <a:spcAft>
+                <a:spcPts val="200"/>
+              </a:spcAft>
+            </a:pPr>
+            <a:r>
+              <a:rPr sz="1500" b="0" i="0">
+                <a:solidFill>
+                  <a:srgbClr val="111111"/>
+                </a:solidFill>
+                <a:latin typeface="Arial"/>
+              </a:rPr>
+              <a:t>•  Excerpts may omit actions, tool results or pre-incident state</a:t>
+            </a:r>
+          </a:p>
+          <a:p>
+            <a:pPr>
+              <a:lnSpc>
+                <a:spcPct val="108000"/>
+              </a:lnSpc>
+              <a:spcAft>
+                <a:spcPts val="200"/>
+              </a:spcAft>
+            </a:pPr>
+            <a:r>
+              <a:rPr sz="1500" b="0" i="0">
+                <a:solidFill>
+                  <a:srgbClr val="111111"/>
+                </a:solidFill>
+                <a:latin typeface="Arial"/>
+              </a:rPr>
+              <a:t>•  An internal monitor may see raw reasoning unavailable through the API</a:t>
+            </a:r>
+          </a:p>
+          <a:p>
+            <a:pPr>
+              <a:lnSpc>
+                <a:spcPct val="108000"/>
+              </a:lnSpc>
+              <a:spcAft>
+                <a:spcPts val="200"/>
+              </a:spcAft>
+            </a:pPr>
+            <a:r>
+              <a:rPr sz="1500" b="0" i="0">
+                <a:solidFill>
+                  <a:srgbClr val="111111"/>
+                </a:solidFill>
+                <a:latin typeface="Arial"/>
+              </a:rPr>
+              <a:t>•  Without an independent outcome check, replay success is ambiguous</a:t>
+            </a:r>
+          </a:p>
+        </p:txBody>
+      </p:sp>
+      <p:sp>
+        <p:nvSpPr>
+          <p:cNvPr id="18" name="Rounded Rectangle 17"/>
+          <p:cNvSpPr/>
+          <p:nvPr/>
+        </p:nvSpPr>
+        <p:spPr>
+          <a:xfrm>
+            <a:off x="457200" y="4654296"/>
+            <a:ext cx="11277295" cy="896112"/>
           </a:xfrm>
           <a:prstGeom prst="roundRect">
             <a:avLst>
@@ -22468,14 +23510,14 @@
       </p:sp>
       <p:sp>
         <p:nvSpPr>
-          <p:cNvPr id="13" name="TextBox 12"/>
+          <p:cNvPr id="19" name="TextBox 18"/>
           <p:cNvSpPr txBox="1"/>
           <p:nvPr/>
         </p:nvSpPr>
         <p:spPr>
           <a:xfrm>
-            <a:off x="685800" y="5513832"/>
-            <a:ext cx="10820095" cy="676656"/>
+            <a:off x="685800" y="4727448"/>
+            <a:ext cx="10820095" cy="749808"/>
           </a:xfrm>
           <a:prstGeom prst="rect">
             <a:avLst/>
@@ -22494,13 +23536,52 @@
               </a:lnSpc>
             </a:pPr>
             <a:r>
-              <a:rPr sz="1400" b="0" i="0">
+              <a:rPr sz="1600" b="0" i="0">
                 <a:solidFill>
                   <a:srgbClr val="111111"/>
                 </a:solidFill>
                 <a:latin typeface="Arial"/>
               </a:rPr>
-              <a:t>No benchmark-level safety or utility improvement has been measured. The figures are design overviews, not results.</a:t>
+              <a:t>Separate three outcomes: access is blocked; reconstruction is incomplete; faithful replay is feasible but too costly. Each needs a different response.</a:t>
+            </a:r>
+          </a:p>
+        </p:txBody>
+      </p:sp>
+      <p:sp>
+        <p:nvSpPr>
+          <p:cNvPr id="20" name="TextBox 19"/>
+          <p:cNvSpPr txBox="1"/>
+          <p:nvPr/>
+        </p:nvSpPr>
+        <p:spPr>
+          <a:xfrm>
+            <a:off x="457200" y="5715000"/>
+            <a:ext cx="11277295" cy="475488"/>
+          </a:xfrm>
+          <a:prstGeom prst="rect">
+            <a:avLst/>
+          </a:prstGeom>
+          <a:noFill/>
+        </p:spPr>
+        <p:txBody>
+          <a:bodyPr wrap="square" lIns="45720" rIns="45720" tIns="27432" bIns="27432" anchor="t">
+            <a:spAutoFit/>
+          </a:bodyPr>
+          <a:lstStyle/>
+          <a:p>
+            <a:pPr algn="l">
+              <a:lnSpc>
+                <a:spcPct val="110000"/>
+              </a:lnSpc>
+            </a:pPr>
+            <a:r>
+              <a:rPr sz="1150" b="0" i="0">
+                <a:solidFill>
+                  <a:srgbClr val="666666"/>
+                </a:solidFill>
+                <a:latin typeface="Arial"/>
+              </a:rPr>
+              <a:t>Basis: OpenAI o1 System Card §3; Baker et al. (2025); OpenAI reasoning documentation. Sources and qualifications in speaker notes.</a:t>
             </a:r>
           </a:p>
         </p:txBody>
@@ -22593,13 +23674,13 @@
               </a:lnSpc>
             </a:pPr>
             <a:r>
-              <a:rPr sz="2600" b="1" i="0">
+              <a:rPr sz="2300" b="1" i="0">
                 <a:solidFill>
                   <a:srgbClr val="111111"/>
                 </a:solidFill>
                 <a:latin typeface="Arial"/>
               </a:rPr>
-              <a:t>References</a:t>
+              <a:t>What the published OpenAI examples let us reproduce</a:t>
             </a:r>
           </a:p>
         </p:txBody>
@@ -22612,8 +23693,8 @@
         </p:nvSpPr>
         <p:spPr>
           <a:xfrm>
-            <a:off x="8503920" y="109728"/>
-            <a:ext cx="3200400" cy="274320"/>
+            <a:off x="640080" y="868680"/>
+            <a:ext cx="10972800" cy="365760"/>
           </a:xfrm>
           <a:prstGeom prst="rect">
             <a:avLst/>
@@ -22626,6 +23707,45 @@
           </a:bodyPr>
           <a:lstStyle/>
           <a:p>
+            <a:pPr algn="l">
+              <a:lnSpc>
+                <a:spcPct val="110000"/>
+              </a:lnSpc>
+            </a:pPr>
+            <a:r>
+              <a:rPr sz="1300" b="0" i="0">
+                <a:solidFill>
+                  <a:srgbClr val="666666"/>
+                </a:solidFill>
+                <a:latin typeface="Arial"/>
+              </a:rPr>
+              <a:t>Published facts are separated from our assessment of the remaining replay requirements</a:t>
+            </a:r>
+          </a:p>
+        </p:txBody>
+      </p:sp>
+      <p:sp>
+        <p:nvSpPr>
+          <p:cNvPr id="5" name="TextBox 4"/>
+          <p:cNvSpPr txBox="1"/>
+          <p:nvPr/>
+        </p:nvSpPr>
+        <p:spPr>
+          <a:xfrm>
+            <a:off x="8503920" y="109728"/>
+            <a:ext cx="3200400" cy="274320"/>
+          </a:xfrm>
+          <a:prstGeom prst="rect">
+            <a:avLst/>
+          </a:prstGeom>
+          <a:noFill/>
+        </p:spPr>
+        <p:txBody>
+          <a:bodyPr wrap="square" lIns="45720" rIns="45720" tIns="27432" bIns="27432" anchor="t">
+            <a:spAutoFit/>
+          </a:bodyPr>
+          <a:lstStyle/>
+          <a:p>
             <a:pPr algn="r">
               <a:lnSpc>
                 <a:spcPct val="110000"/>
@@ -22638,14 +23758,14 @@
                 </a:solidFill>
                 <a:latin typeface="Arial"/>
               </a:rPr>
-              <a:t>REFERENCES</a:t>
+              <a:t>7 · REPLAY FEASIBILITY</a:t>
             </a:r>
           </a:p>
         </p:txBody>
       </p:sp>
       <p:cxnSp>
         <p:nvCxnSpPr>
-          <p:cNvPr id="5" name="Connector 4"/>
+          <p:cNvPr id="6" name="Connector 5"/>
           <p:cNvCxnSpPr/>
           <p:nvPr/>
         </p:nvCxnSpPr>
@@ -22680,7 +23800,7 @@
       </p:cxnSp>
       <p:sp>
         <p:nvSpPr>
-          <p:cNvPr id="6" name="TextBox 5"/>
+          <p:cNvPr id="7" name="TextBox 6"/>
           <p:cNvSpPr txBox="1"/>
           <p:nvPr/>
         </p:nvSpPr>
@@ -22719,7 +23839,7 @@
       </p:sp>
       <p:sp>
         <p:nvSpPr>
-          <p:cNvPr id="7" name="TextBox 6"/>
+          <p:cNvPr id="8" name="TextBox 7"/>
           <p:cNvSpPr txBox="1"/>
           <p:nvPr/>
         </p:nvSpPr>
@@ -22756,16 +23876,451 @@
           </a:p>
         </p:txBody>
       </p:sp>
-      <p:sp>
-        <p:nvSpPr>
-          <p:cNvPr id="8" name="TextBox 7"/>
+      <p:graphicFrame>
+        <p:nvGraphicFramePr>
+          <p:cNvPr id="9" name="Table 8"/>
+          <p:cNvGraphicFramePr>
+            <a:graphicFrameLocks noGrp="1"/>
+          </p:cNvGraphicFramePr>
+          <p:nvPr/>
+        </p:nvGraphicFramePr>
+        <p:xfrm>
+          <a:off x="457200" y="1325880"/>
+          <a:ext cx="11277294" cy="4069080"/>
+        </p:xfrm>
+        <a:graphic>
+          <a:graphicData uri="http://schemas.openxmlformats.org/drawingml/2006/table">
+            <a:tbl>
+              <a:tblPr firstRow="1" bandRow="1">
+                <a:tableStyleId>{5C22544A-7EE6-4342-B048-85BDC9FD1C3A}</a:tableStyleId>
+              </a:tblPr>
+              <a:tblGrid>
+                <a:gridCol w="3018254"/>
+                <a:gridCol w="4024338"/>
+                <a:gridCol w="4234702"/>
+              </a:tblGrid>
+              <a:tr h="1017270">
+                <a:tc>
+                  <a:txBody>
+                    <a:bodyPr wrap="square"/>
+                    <a:lstStyle/>
+                    <a:p>
+                      <a:pPr>
+                        <a:lnSpc>
+                          <a:spcPct val="105000"/>
+                        </a:lnSpc>
+                      </a:pPr>
+                      <a:r>
+                        <a:rPr sz="1450" b="1" i="0">
+                          <a:solidFill>
+                            <a:srgbClr val="FFFFFF"/>
+                          </a:solidFill>
+                          <a:latin typeface="Arial"/>
+                        </a:rPr>
+                        <a:t>Example</a:t>
+                      </a:r>
+                    </a:p>
+                  </a:txBody>
+                  <a:tcPr marL="54864" marR="54864" marT="27432" marB="27432">
+                    <a:solidFill>
+                      <a:srgbClr val="365E9E"/>
+                    </a:solidFill>
+                  </a:tcPr>
+                </a:tc>
+                <a:tc>
+                  <a:txBody>
+                    <a:bodyPr wrap="square"/>
+                    <a:lstStyle/>
+                    <a:p>
+                      <a:pPr>
+                        <a:lnSpc>
+                          <a:spcPct val="105000"/>
+                        </a:lnSpc>
+                      </a:pPr>
+                      <a:r>
+                        <a:rPr sz="1450" b="1" i="0">
+                          <a:solidFill>
+                            <a:srgbClr val="FFFFFF"/>
+                          </a:solidFill>
+                          <a:latin typeface="Arial"/>
+                        </a:rPr>
+                        <a:t>What is disclosed</a:t>
+                      </a:r>
+                    </a:p>
+                  </a:txBody>
+                  <a:tcPr marL="54864" marR="54864" marT="27432" marB="27432">
+                    <a:solidFill>
+                      <a:srgbClr val="365E9E"/>
+                    </a:solidFill>
+                  </a:tcPr>
+                </a:tc>
+                <a:tc>
+                  <a:txBody>
+                    <a:bodyPr wrap="square"/>
+                    <a:lstStyle/>
+                    <a:p>
+                      <a:pPr>
+                        <a:lnSpc>
+                          <a:spcPct val="105000"/>
+                        </a:lnSpc>
+                      </a:pPr>
+                      <a:r>
+                        <a:rPr sz="1450" b="1" i="0">
+                          <a:solidFill>
+                            <a:srgbClr val="FFFFFF"/>
+                          </a:solidFill>
+                          <a:latin typeface="Arial"/>
+                        </a:rPr>
+                        <a:t>Implication for faithful replay</a:t>
+                      </a:r>
+                    </a:p>
+                  </a:txBody>
+                  <a:tcPr marL="54864" marR="54864" marT="27432" marB="27432">
+                    <a:solidFill>
+                      <a:srgbClr val="365E9E"/>
+                    </a:solidFill>
+                  </a:tcPr>
+                </a:tc>
+              </a:tr>
+              <a:tr h="1017270">
+                <a:tc>
+                  <a:txBody>
+                    <a:bodyPr wrap="square"/>
+                    <a:lstStyle/>
+                    <a:p>
+                      <a:pPr>
+                        <a:lnSpc>
+                          <a:spcPct val="105000"/>
+                        </a:lnSpc>
+                      </a:pPr>
+                      <a:r>
+                        <a:rPr sz="1450" b="1" i="0">
+                          <a:solidFill>
+                            <a:srgbClr val="111111"/>
+                          </a:solidFill>
+                          <a:latin typeface="Arial"/>
+                        </a:rPr>
+                        <a:t>o1 external testing</a:t>
+                      </a:r>
+                    </a:p>
+                    <a:p>
+                      <a:pPr>
+                        <a:lnSpc>
+                          <a:spcPct val="105000"/>
+                        </a:lnSpc>
+                      </a:pPr>
+                      <a:r>
+                        <a:rPr sz="1450" b="1" i="0">
+                          <a:solidFill>
+                            <a:srgbClr val="111111"/>
+                          </a:solidFill>
+                          <a:latin typeface="Arial"/>
+                        </a:rPr>
+                        <a:t>OpenAI System Card (2024)</a:t>
+                      </a:r>
+                    </a:p>
+                  </a:txBody>
+                  <a:tcPr marL="54864" marR="54864" marT="27432" marB="27432">
+                    <a:solidFill>
+                      <a:srgbClr val="FFFFFF"/>
+                    </a:solidFill>
+                  </a:tcPr>
+                </a:tc>
+                <a:tc>
+                  <a:txBody>
+                    <a:bodyPr wrap="square"/>
+                    <a:lstStyle/>
+                    <a:p>
+                      <a:pPr>
+                        <a:lnSpc>
+                          <a:spcPct val="105000"/>
+                        </a:lnSpc>
+                      </a:pPr>
+                      <a:r>
+                        <a:rPr sz="1450" b="0" i="0">
+                          <a:solidFill>
+                            <a:srgbClr val="111111"/>
+                          </a:solidFill>
+                          <a:latin typeface="Arial"/>
+                        </a:rPr>
+                        <a:t>Near-final and released checkpoints are distinguished; external red teaming used near-final.</a:t>
+                      </a:r>
+                    </a:p>
+                  </a:txBody>
+                  <a:tcPr marL="54864" marR="54864" marT="27432" marB="27432">
+                    <a:solidFill>
+                      <a:srgbClr val="FFFFFF"/>
+                    </a:solidFill>
+                  </a:tcPr>
+                </a:tc>
+                <a:tc>
+                  <a:txBody>
+                    <a:bodyPr wrap="square"/>
+                    <a:lstStyle/>
+                    <a:p>
+                      <a:pPr>
+                        <a:lnSpc>
+                          <a:spcPct val="105000"/>
+                        </a:lnSpc>
+                      </a:pPr>
+                      <a:r>
+                        <a:rPr sz="1450" b="0" i="0">
+                          <a:solidFill>
+                            <a:srgbClr val="111111"/>
+                          </a:solidFill>
+                          <a:latin typeface="Arial"/>
+                        </a:rPr>
+                        <a:t>Do not assume a public o1 endpoint matches the evaluated checkpoint, scaffold or results.</a:t>
+                      </a:r>
+                    </a:p>
+                  </a:txBody>
+                  <a:tcPr marL="54864" marR="54864" marT="27432" marB="27432">
+                    <a:solidFill>
+                      <a:srgbClr val="FFFFFF"/>
+                    </a:solidFill>
+                  </a:tcPr>
+                </a:tc>
+              </a:tr>
+              <a:tr h="1017270">
+                <a:tc>
+                  <a:txBody>
+                    <a:bodyPr wrap="square"/>
+                    <a:lstStyle/>
+                    <a:p>
+                      <a:pPr>
+                        <a:lnSpc>
+                          <a:spcPct val="105000"/>
+                        </a:lnSpc>
+                      </a:pPr>
+                      <a:r>
+                        <a:rPr sz="1450" b="1" i="0">
+                          <a:solidFill>
+                            <a:srgbClr val="111111"/>
+                          </a:solidFill>
+                          <a:latin typeface="Arial"/>
+                        </a:rPr>
+                        <a:t>OpenAI reward hacking / obfuscation</a:t>
+                      </a:r>
+                    </a:p>
+                    <a:p>
+                      <a:pPr>
+                        <a:lnSpc>
+                          <a:spcPct val="105000"/>
+                        </a:lnSpc>
+                      </a:pPr>
+                      <a:r>
+                        <a:rPr sz="1450" b="1" i="0">
+                          <a:solidFill>
+                            <a:srgbClr val="111111"/>
+                          </a:solidFill>
+                          <a:latin typeface="Arial"/>
+                        </a:rPr>
+                        <a:t>Baker et al. (2025)</a:t>
+                      </a:r>
+                    </a:p>
+                  </a:txBody>
+                  <a:tcPr marL="54864" marR="54864" marT="27432" marB="27432">
+                    <a:solidFill>
+                      <a:srgbClr val="F4F6FA"/>
+                    </a:solidFill>
+                  </a:tcPr>
+                </a:tc>
+                <a:tc>
+                  <a:txBody>
+                    <a:bodyPr wrap="square"/>
+                    <a:lstStyle/>
+                    <a:p>
+                      <a:pPr>
+                        <a:lnSpc>
+                          <a:spcPct val="105000"/>
+                        </a:lnSpc>
+                      </a:pPr>
+                      <a:r>
+                        <a:rPr sz="1450" b="0" i="0">
+                          <a:solidFill>
+                            <a:srgbClr val="111111"/>
+                          </a:solidFill>
+                          <a:latin typeface="Arial"/>
+                        </a:rPr>
+                        <a:t>Training-time incidents, a separate RL experiment, and a published monitor prompt.</a:t>
+                      </a:r>
+                    </a:p>
+                  </a:txBody>
+                  <a:tcPr marL="54864" marR="54864" marT="27432" marB="27432">
+                    <a:solidFill>
+                      <a:srgbClr val="F4F6FA"/>
+                    </a:solidFill>
+                  </a:tcPr>
+                </a:tc>
+                <a:tc>
+                  <a:txBody>
+                    <a:bodyPr wrap="square"/>
+                    <a:lstStyle/>
+                    <a:p>
+                      <a:pPr>
+                        <a:lnSpc>
+                          <a:spcPct val="105000"/>
+                        </a:lnSpc>
+                      </a:pPr>
+                      <a:r>
+                        <a:rPr sz="1450" b="0" i="0">
+                          <a:solidFill>
+                            <a:srgbClr val="111111"/>
+                          </a:solidFill>
+                          <a:latin typeface="Arial"/>
+                        </a:rPr>
+                        <a:t>Obtain checkpoint, task state and reward setup. API inference alone cannot rerun the training intervention.</a:t>
+                      </a:r>
+                    </a:p>
+                  </a:txBody>
+                  <a:tcPr marL="54864" marR="54864" marT="27432" marB="27432">
+                    <a:solidFill>
+                      <a:srgbClr val="F4F6FA"/>
+                    </a:solidFill>
+                  </a:tcPr>
+                </a:tc>
+              </a:tr>
+              <a:tr h="1017270">
+                <a:tc>
+                  <a:txBody>
+                    <a:bodyPr wrap="square"/>
+                    <a:lstStyle/>
+                    <a:p>
+                      <a:pPr>
+                        <a:lnSpc>
+                          <a:spcPct val="105000"/>
+                        </a:lnSpc>
+                      </a:pPr>
+                      <a:r>
+                        <a:rPr sz="1450" b="1" i="0">
+                          <a:solidFill>
+                            <a:srgbClr val="111111"/>
+                          </a:solidFill>
+                          <a:latin typeface="Arial"/>
+                        </a:rPr>
+                        <a:t>Palisade shutdown tests on OpenAI models (2025)</a:t>
+                      </a:r>
+                    </a:p>
+                  </a:txBody>
+                  <a:tcPr marL="54864" marR="54864" marT="27432" marB="27432">
+                    <a:solidFill>
+                      <a:srgbClr val="FFFFFF"/>
+                    </a:solidFill>
+                  </a:tcPr>
+                </a:tc>
+                <a:tc>
+                  <a:txBody>
+                    <a:bodyPr wrap="square"/>
+                    <a:lstStyle/>
+                    <a:p>
+                      <a:pPr>
+                        <a:lnSpc>
+                          <a:spcPct val="105000"/>
+                        </a:lnSpc>
+                      </a:pPr>
+                      <a:r>
+                        <a:rPr sz="1450" b="0" i="0">
+                          <a:solidFill>
+                            <a:srgbClr val="111111"/>
+                          </a:solidFill>
+                          <a:latin typeface="Arial"/>
+                        </a:rPr>
+                        <a:t>Public Inspect harness, Dockerfile and transcripts.</a:t>
+                      </a:r>
+                    </a:p>
+                  </a:txBody>
+                  <a:tcPr marL="54864" marR="54864" marT="27432" marB="27432">
+                    <a:solidFill>
+                      <a:srgbClr val="FFFFFF"/>
+                    </a:solidFill>
+                  </a:tcPr>
+                </a:tc>
+                <a:tc>
+                  <a:txBody>
+                    <a:bodyPr wrap="square"/>
+                    <a:lstStyle/>
+                    <a:p>
+                      <a:pPr>
+                        <a:lnSpc>
+                          <a:spcPct val="105000"/>
+                        </a:lnSpc>
+                      </a:pPr>
+                      <a:r>
+                        <a:rPr sz="1450" b="0" i="0">
+                          <a:solidFill>
+                            <a:srgbClr val="111111"/>
+                          </a:solidFill>
+                          <a:latin typeface="Arial"/>
+                        </a:rPr>
+                        <a:t>A stronger replay candidate: pin code, prompts and environment; check historical model access.</a:t>
+                      </a:r>
+                    </a:p>
+                  </a:txBody>
+                  <a:tcPr marL="54864" marR="54864" marT="27432" marB="27432">
+                    <a:solidFill>
+                      <a:srgbClr val="FFFFFF"/>
+                    </a:solidFill>
+                  </a:tcPr>
+                </a:tc>
+              </a:tr>
+            </a:tbl>
+          </a:graphicData>
+        </a:graphic>
+      </p:graphicFrame>
+      <p:sp>
+        <p:nvSpPr>
+          <p:cNvPr id="10" name="Rounded Rectangle 9"/>
+          <p:cNvSpPr/>
+          <p:nvPr/>
+        </p:nvSpPr>
+        <p:spPr>
+          <a:xfrm>
+            <a:off x="457200" y="5623560"/>
+            <a:ext cx="11277295" cy="630936"/>
+          </a:xfrm>
+          <a:prstGeom prst="roundRect">
+            <a:avLst>
+              <a:gd name="adj" fmla="val 6000"/>
+            </a:avLst>
+          </a:prstGeom>
+          <a:solidFill>
+            <a:srgbClr val="EDF4FB"/>
+          </a:solidFill>
+          <a:ln>
+            <a:noFill/>
+          </a:ln>
+          <a:effectLst/>
+        </p:spPr>
+        <p:style>
+          <a:lnRef idx="1">
+            <a:schemeClr val="accent1"/>
+          </a:lnRef>
+          <a:fillRef idx="3">
+            <a:schemeClr val="accent1"/>
+          </a:fillRef>
+          <a:effectRef idx="2">
+            <a:schemeClr val="accent1"/>
+          </a:effectRef>
+          <a:fontRef idx="minor">
+            <a:schemeClr val="lt1"/>
+          </a:fontRef>
+        </p:style>
+        <p:txBody>
+          <a:bodyPr rtlCol="0" anchor="ctr"/>
+          <a:lstStyle/>
+          <a:p/>
+        </p:txBody>
+      </p:sp>
+      <p:sp>
+        <p:nvSpPr>
+          <p:cNvPr id="11" name="TextBox 10"/>
           <p:cNvSpPr txBox="1"/>
           <p:nvPr/>
         </p:nvSpPr>
         <p:spPr>
           <a:xfrm>
-            <a:off x="457200" y="1325880"/>
-            <a:ext cx="5577840" cy="4937760"/>
+            <a:off x="685800" y="5696712"/>
+            <a:ext cx="10820095" cy="484632"/>
           </a:xfrm>
           <a:prstGeom prst="rect">
             <a:avLst/>
@@ -22773,335 +24328,24 @@
           <a:noFill/>
         </p:spPr>
         <p:txBody>
-          <a:bodyPr wrap="square" lIns="45720" rIns="45720">
+          <a:bodyPr wrap="square" lIns="45720" rIns="45720" tIns="27432" bIns="27432" anchor="ctr">
             <a:spAutoFit/>
           </a:bodyPr>
           <a:lstStyle/>
           <a:p>
-            <a:pPr>
-              <a:lnSpc>
-                <a:spcPct val="105000"/>
-              </a:lnSpc>
-              <a:spcAft>
-                <a:spcPts val="500"/>
-              </a:spcAft>
-            </a:pPr>
-            <a:r>
-              <a:rPr sz="1100" b="0" i="0">
+            <a:pPr algn="l">
+              <a:lnSpc>
+                <a:spcPct val="115000"/>
+              </a:lnSpc>
+            </a:pPr>
+            <a:r>
+              <a:rPr sz="1500" b="0" i="0">
                 <a:solidFill>
                   <a:srgbClr val="111111"/>
                 </a:solidFill>
                 <a:latin typeface="Arial"/>
               </a:rPr>
-              <a:t>•  Greenblatt et al. (2023). AI Control: Improving Safety Despite Intentional Subversion. arXiv:2312.06942</a:t>
-            </a:r>
-          </a:p>
-          <a:p>
-            <a:pPr>
-              <a:lnSpc>
-                <a:spcPct val="105000"/>
-              </a:lnSpc>
-              <a:spcAft>
-                <a:spcPts val="500"/>
-              </a:spcAft>
-            </a:pPr>
-            <a:r>
-              <a:rPr sz="1100" b="0" i="0">
-                <a:solidFill>
-                  <a:srgbClr val="111111"/>
-                </a:solidFill>
-                <a:latin typeface="Arial"/>
-              </a:rPr>
-              <a:t>•  Bhatt et al. (2025). Ctrl-Z: Controlling AI Agents via Resampling. arXiv:2504.10374</a:t>
-            </a:r>
-          </a:p>
-          <a:p>
-            <a:pPr>
-              <a:lnSpc>
-                <a:spcPct val="105000"/>
-              </a:lnSpc>
-              <a:spcAft>
-                <a:spcPts val="500"/>
-              </a:spcAft>
-            </a:pPr>
-            <a:r>
-              <a:rPr sz="1100" b="0" i="0">
-                <a:solidFill>
-                  <a:srgbClr val="111111"/>
-                </a:solidFill>
-                <a:latin typeface="Arial"/>
-              </a:rPr>
-              <a:t>•  Kutasov et al. (2025). SHADE-Arena: Evaluating Sabotage and Monitoring in LLM Agents. arXiv:2506.15740</a:t>
-            </a:r>
-          </a:p>
-          <a:p>
-            <a:pPr>
-              <a:lnSpc>
-                <a:spcPct val="105000"/>
-              </a:lnSpc>
-              <a:spcAft>
-                <a:spcPts val="500"/>
-              </a:spcAft>
-            </a:pPr>
-            <a:r>
-              <a:rPr sz="1100" b="0" i="0">
-                <a:solidFill>
-                  <a:srgbClr val="111111"/>
-                </a:solidFill>
-                <a:latin typeface="Arial"/>
-              </a:rPr>
-              <a:t>•  Debenedetti et al. (2024). AgentDojo: A Dynamic Environment to Evaluate Prompt Injection Attacks and Defenses for LLM Agents. NeurIPS D&amp;B</a:t>
-            </a:r>
-          </a:p>
-          <a:p>
-            <a:pPr>
-              <a:lnSpc>
-                <a:spcPct val="105000"/>
-              </a:lnSpc>
-              <a:spcAft>
-                <a:spcPts val="500"/>
-              </a:spcAft>
-            </a:pPr>
-            <a:r>
-              <a:rPr sz="1100" b="0" i="0">
-                <a:solidFill>
-                  <a:srgbClr val="111111"/>
-                </a:solidFill>
-                <a:latin typeface="Arial"/>
-              </a:rPr>
-              <a:t>•  Zhong, Raghunathan, Carlini (2025). ImpossibleBench: Measuring LLMs' Propensity of Exploiting Test Cases. arXiv:2510.20270</a:t>
-            </a:r>
-          </a:p>
-          <a:p>
-            <a:pPr>
-              <a:lnSpc>
-                <a:spcPct val="105000"/>
-              </a:lnSpc>
-              <a:spcAft>
-                <a:spcPts val="500"/>
-              </a:spcAft>
-            </a:pPr>
-            <a:r>
-              <a:rPr sz="1100" b="0" i="0">
-                <a:solidFill>
-                  <a:srgbClr val="111111"/>
-                </a:solidFill>
-                <a:latin typeface="Arial"/>
-              </a:rPr>
-              <a:t>•  ResearchArena (aisa-group, 2025). github.com/aisa-group/ResearchArena</a:t>
-            </a:r>
-          </a:p>
-          <a:p>
-            <a:pPr>
-              <a:lnSpc>
-                <a:spcPct val="105000"/>
-              </a:lnSpc>
-              <a:spcAft>
-                <a:spcPts val="500"/>
-              </a:spcAft>
-            </a:pPr>
-            <a:r>
-              <a:rPr sz="1100" b="0" i="0">
-                <a:solidFill>
-                  <a:srgbClr val="111111"/>
-                </a:solidFill>
-                <a:latin typeface="Arial"/>
-              </a:rPr>
-              <a:t>•  Baker et al. (2025). Monitoring Reasoning Models for Misbehavior and the Risks of Promoting Obfuscation. arXiv:2503.11926</a:t>
-            </a:r>
-          </a:p>
-          <a:p>
-            <a:pPr>
-              <a:lnSpc>
-                <a:spcPct val="105000"/>
-              </a:lnSpc>
-              <a:spcAft>
-                <a:spcPts val="500"/>
-              </a:spcAft>
-            </a:pPr>
-            <a:r>
-              <a:rPr sz="1100" b="0" i="0">
-                <a:solidFill>
-                  <a:srgbClr val="111111"/>
-                </a:solidFill>
-                <a:latin typeface="Arial"/>
-              </a:rPr>
-              <a:t>•  Slattery et al. (2024). The AI Risk Repository. MIT. arXiv:2408.12622</a:t>
-            </a:r>
-          </a:p>
-        </p:txBody>
-      </p:sp>
-      <p:sp>
-        <p:nvSpPr>
-          <p:cNvPr id="9" name="TextBox 8"/>
-          <p:cNvSpPr txBox="1"/>
-          <p:nvPr/>
-        </p:nvSpPr>
-        <p:spPr>
-          <a:xfrm>
-            <a:off x="6263640" y="1325880"/>
-            <a:ext cx="5486400" cy="4937760"/>
-          </a:xfrm>
-          <a:prstGeom prst="rect">
-            <a:avLst/>
-          </a:prstGeom>
-          <a:noFill/>
-        </p:spPr>
-        <p:txBody>
-          <a:bodyPr wrap="square" lIns="45720" rIns="45720">
-            <a:spAutoFit/>
-          </a:bodyPr>
-          <a:lstStyle/>
-          <a:p>
-            <a:pPr>
-              <a:lnSpc>
-                <a:spcPct val="105000"/>
-              </a:lnSpc>
-              <a:spcAft>
-                <a:spcPts val="500"/>
-              </a:spcAft>
-            </a:pPr>
-            <a:r>
-              <a:rPr sz="1100" b="0" i="0">
-                <a:solidFill>
-                  <a:srgbClr val="111111"/>
-                </a:solidFill>
-                <a:latin typeface="Arial"/>
-              </a:rPr>
-              <a:t>•  UK AI Security Institute. Inspect AI: tool approval and approvers. inspect.aisi.org.uk</a:t>
-            </a:r>
-          </a:p>
-          <a:p>
-            <a:pPr>
-              <a:lnSpc>
-                <a:spcPct val="105000"/>
-              </a:lnSpc>
-              <a:spcAft>
-                <a:spcPts val="500"/>
-              </a:spcAft>
-            </a:pPr>
-            <a:r>
-              <a:rPr sz="1100" b="0" i="0">
-                <a:solidFill>
-                  <a:srgbClr val="111111"/>
-                </a:solidFill>
-                <a:latin typeface="Arial"/>
-              </a:rPr>
-              <a:t>•  UK AISI and Meridian Labs (2025). Inspect Scout: transcript analysis</a:t>
-            </a:r>
-          </a:p>
-          <a:p>
-            <a:pPr>
-              <a:lnSpc>
-                <a:spcPct val="105000"/>
-              </a:lnSpc>
-              <a:spcAft>
-                <a:spcPts val="500"/>
-              </a:spcAft>
-            </a:pPr>
-            <a:r>
-              <a:rPr sz="1100" b="0" i="0">
-                <a:solidFill>
-                  <a:srgbClr val="111111"/>
-                </a:solidFill>
-                <a:latin typeface="Arial"/>
-              </a:rPr>
-              <a:t>•  UK AISI (2025). ControlArena: monitors, micro-protocols, BashArena. control-arena.aisi.org.uk</a:t>
-            </a:r>
-          </a:p>
-          <a:p>
-            <a:pPr>
-              <a:lnSpc>
-                <a:spcPct val="105000"/>
-              </a:lnSpc>
-              <a:spcAft>
-                <a:spcPts val="500"/>
-              </a:spcAft>
-            </a:pPr>
-            <a:r>
-              <a:rPr sz="1100" b="0" i="0">
-                <a:solidFill>
-                  <a:srgbClr val="111111"/>
-                </a:solidFill>
-                <a:latin typeface="Arial"/>
-              </a:rPr>
-              <a:t>•  METR (2025). Hawk: run Inspect evals in the cloud. github.com/METR/hawk</a:t>
-            </a:r>
-          </a:p>
-          <a:p>
-            <a:pPr>
-              <a:lnSpc>
-                <a:spcPct val="105000"/>
-              </a:lnSpc>
-              <a:spcAft>
-                <a:spcPts val="500"/>
-              </a:spcAft>
-            </a:pPr>
-            <a:r>
-              <a:rPr sz="1100" b="0" i="0">
-                <a:solidFill>
-                  <a:srgbClr val="111111"/>
-                </a:solidFill>
-                <a:latin typeface="Arial"/>
-              </a:rPr>
-              <a:t>•  McGregor (2021). Preventing Repeated Real World AI Failures by Cataloging Incidents: The AI Incident Database. AAAI</a:t>
-            </a:r>
-          </a:p>
-          <a:p>
-            <a:pPr>
-              <a:lnSpc>
-                <a:spcPct val="105000"/>
-              </a:lnSpc>
-              <a:spcAft>
-                <a:spcPts val="500"/>
-              </a:spcAft>
-            </a:pPr>
-            <a:r>
-              <a:rPr sz="1100" b="0" i="0">
-                <a:solidFill>
-                  <a:srgbClr val="111111"/>
-                </a:solidFill>
-                <a:latin typeface="Arial"/>
-              </a:rPr>
-              <a:t>•  OECD (2023). AI Incident Monitor. MITRE ATLAS. OWASP Top 10 for LLM and Agentic Applications</a:t>
-            </a:r>
-          </a:p>
-          <a:p>
-            <a:pPr>
-              <a:lnSpc>
-                <a:spcPct val="105000"/>
-              </a:lnSpc>
-              <a:spcAft>
-                <a:spcPts val="500"/>
-              </a:spcAft>
-            </a:pPr>
-            <a:r>
-              <a:rPr sz="1100" b="0" i="0">
-                <a:solidFill>
-                  <a:srgbClr val="111111"/>
-                </a:solidFill>
-                <a:latin typeface="Arial"/>
-              </a:rPr>
-              <a:t>•  Perrow (1984). Normal Accidents. Reason (1990). Human Error. Taleb (2007). The Black Swan. Popper (1963). Conjectures and Refutations</a:t>
-            </a:r>
-          </a:p>
-          <a:p>
-            <a:pPr>
-              <a:lnSpc>
-                <a:spcPct val="105000"/>
-              </a:lnSpc>
-              <a:spcAft>
-                <a:spcPts val="500"/>
-              </a:spcAft>
-            </a:pPr>
-            <a:r>
-              <a:rPr sz="1100" b="0" i="0">
-                <a:solidFill>
-                  <a:srgbClr val="111111"/>
-                </a:solidFill>
-                <a:latin typeface="Arial"/>
-              </a:rPr>
-              <a:t>•  EU AI Act, Article 73. California SB 53 (2025)</a:t>
+              <a:t>Disclosure is partial: a published prompt or trace helps, but does not establish that the full evaluator can be reconstructed.</a:t>
             </a:r>
           </a:p>
         </p:txBody>
@@ -23200,7 +24444,7 @@
                 </a:solidFill>
                 <a:latin typeface="Arial"/>
               </a:rPr>
-              <a:t>References: incidents</a:t>
+              <a:t>Three replay modes support different claims</a:t>
             </a:r>
           </a:p>
         </p:txBody>
@@ -23213,8 +24457,8 @@
         </p:nvSpPr>
         <p:spPr>
           <a:xfrm>
-            <a:off x="8503920" y="109728"/>
-            <a:ext cx="3200400" cy="274320"/>
+            <a:off x="640080" y="868680"/>
+            <a:ext cx="10972800" cy="365760"/>
           </a:xfrm>
           <a:prstGeom prst="rect">
             <a:avLst/>
@@ -23227,6 +24471,45 @@
           </a:bodyPr>
           <a:lstStyle/>
           <a:p>
+            <a:pPr algn="l">
+              <a:lnSpc>
+                <a:spcPct val="110000"/>
+              </a:lnSpc>
+            </a:pPr>
+            <a:r>
+              <a:rPr sz="1300" b="0" i="0">
+                <a:solidFill>
+                  <a:srgbClr val="666666"/>
+                </a:solidFill>
+                <a:latin typeface="Arial"/>
+              </a:rPr>
+              <a:t>Choose the execution mode separately from evidence grade and historical fidelity</a:t>
+            </a:r>
+          </a:p>
+        </p:txBody>
+      </p:sp>
+      <p:sp>
+        <p:nvSpPr>
+          <p:cNvPr id="5" name="TextBox 4"/>
+          <p:cNvSpPr txBox="1"/>
+          <p:nvPr/>
+        </p:nvSpPr>
+        <p:spPr>
+          <a:xfrm>
+            <a:off x="8503920" y="109728"/>
+            <a:ext cx="3200400" cy="274320"/>
+          </a:xfrm>
+          <a:prstGeom prst="rect">
+            <a:avLst/>
+          </a:prstGeom>
+          <a:noFill/>
+        </p:spPr>
+        <p:txBody>
+          <a:bodyPr wrap="square" lIns="45720" rIns="45720" tIns="27432" bIns="27432" anchor="t">
+            <a:spAutoFit/>
+          </a:bodyPr>
+          <a:lstStyle/>
+          <a:p>
             <a:pPr algn="r">
               <a:lnSpc>
                 <a:spcPct val="110000"/>
@@ -23239,14 +24522,14 @@
                 </a:solidFill>
                 <a:latin typeface="Arial"/>
               </a:rPr>
-              <a:t>REFERENCES</a:t>
+              <a:t>7 · REPLAY FEASIBILITY</a:t>
             </a:r>
           </a:p>
         </p:txBody>
       </p:sp>
       <p:cxnSp>
         <p:nvCxnSpPr>
-          <p:cNvPr id="5" name="Connector 4"/>
+          <p:cNvPr id="6" name="Connector 5"/>
           <p:cNvCxnSpPr/>
           <p:nvPr/>
         </p:nvCxnSpPr>
@@ -23281,7 +24564,7 @@
       </p:cxnSp>
       <p:sp>
         <p:nvSpPr>
-          <p:cNvPr id="6" name="TextBox 5"/>
+          <p:cNvPr id="7" name="TextBox 6"/>
           <p:cNvSpPr txBox="1"/>
           <p:nvPr/>
         </p:nvSpPr>
@@ -23320,7 +24603,7 @@
       </p:sp>
       <p:sp>
         <p:nvSpPr>
-          <p:cNvPr id="7" name="TextBox 6"/>
+          <p:cNvPr id="8" name="TextBox 7"/>
           <p:cNvSpPr txBox="1"/>
           <p:nvPr/>
         </p:nvSpPr>
@@ -23359,14 +24642,99 @@
       </p:sp>
       <p:sp>
         <p:nvSpPr>
-          <p:cNvPr id="8" name="TextBox 7"/>
+          <p:cNvPr id="9" name="Rounded Rectangle 8"/>
+          <p:cNvSpPr/>
+          <p:nvPr/>
+        </p:nvSpPr>
+        <p:spPr>
+          <a:xfrm>
+            <a:off x="457200" y="1325880"/>
+            <a:ext cx="3657600" cy="3383280"/>
+          </a:xfrm>
+          <a:prstGeom prst="roundRect">
+            <a:avLst>
+              <a:gd name="adj" fmla="val 6000"/>
+            </a:avLst>
+          </a:prstGeom>
+          <a:solidFill>
+            <a:srgbClr val="EDF4FB"/>
+          </a:solidFill>
+          <a:ln w="12700">
+            <a:solidFill>
+              <a:srgbClr val="365E9E"/>
+            </a:solidFill>
+          </a:ln>
+          <a:effectLst/>
+        </p:spPr>
+        <p:style>
+          <a:lnRef idx="1">
+            <a:schemeClr val="accent1"/>
+          </a:lnRef>
+          <a:fillRef idx="3">
+            <a:schemeClr val="accent1"/>
+          </a:fillRef>
+          <a:effectRef idx="2">
+            <a:schemeClr val="accent1"/>
+          </a:effectRef>
+          <a:fontRef idx="minor">
+            <a:schemeClr val="lt1"/>
+          </a:fontRef>
+        </p:style>
+        <p:txBody>
+          <a:bodyPr rtlCol="0" anchor="ctr"/>
+          <a:lstStyle/>
+          <a:p/>
+        </p:txBody>
+      </p:sp>
+      <p:sp>
+        <p:nvSpPr>
+          <p:cNvPr id="10" name="TextBox 9"/>
           <p:cNvSpPr txBox="1"/>
           <p:nvPr/>
         </p:nvSpPr>
         <p:spPr>
           <a:xfrm>
-            <a:off x="457200" y="1325880"/>
-            <a:ext cx="5577840" cy="4937760"/>
+            <a:off x="566928" y="1399032"/>
+            <a:ext cx="3456432" cy="365760"/>
+          </a:xfrm>
+          <a:prstGeom prst="rect">
+            <a:avLst/>
+          </a:prstGeom>
+          <a:noFill/>
+        </p:spPr>
+        <p:txBody>
+          <a:bodyPr wrap="square" lIns="45720" rIns="45720" tIns="27432" bIns="27432" anchor="t">
+            <a:spAutoFit/>
+          </a:bodyPr>
+          <a:lstStyle/>
+          <a:p>
+            <a:pPr algn="l">
+              <a:lnSpc>
+                <a:spcPct val="110000"/>
+              </a:lnSpc>
+            </a:pPr>
+            <a:r>
+              <a:rPr sz="1600" b="1" i="0">
+                <a:solidFill>
+                  <a:srgbClr val="365E9E"/>
+                </a:solidFill>
+                <a:latin typeface="Arial"/>
+              </a:rPr>
+              <a:t>1 · Re-score saved traces</a:t>
+            </a:r>
+          </a:p>
+        </p:txBody>
+      </p:sp>
+      <p:sp>
+        <p:nvSpPr>
+          <p:cNvPr id="11" name="TextBox 10"/>
+          <p:cNvSpPr txBox="1"/>
+          <p:nvPr/>
+        </p:nvSpPr>
+        <p:spPr>
+          <a:xfrm>
+            <a:off x="530352" y="1764792"/>
+            <a:ext cx="3511296" cy="2880360"/>
           </a:xfrm>
           <a:prstGeom prst="rect">
             <a:avLst/>
@@ -23381,148 +24749,157 @@
           <a:p>
             <a:pPr>
               <a:lnSpc>
-                <a:spcPct val="105000"/>
+                <a:spcPct val="108000"/>
               </a:lnSpc>
               <a:spcAft>
-                <a:spcPts val="500"/>
+                <a:spcPts val="200"/>
               </a:spcAft>
             </a:pPr>
             <a:r>
-              <a:rPr sz="1100" b="0" i="0">
+              <a:rPr sz="1500" b="0" i="0">
                 <a:solidFill>
                   <a:srgbClr val="111111"/>
                 </a:solidFill>
                 <a:latin typeface="Arial"/>
               </a:rPr>
-              <a:t>•  Sakana AI (Aug 2024). The AI Scientist. sakana.ai/ai-scientist; coverage: Ars Technica</a:t>
+              <a:t>•  Needs sufficient logs and defensible outcome labels</a:t>
             </a:r>
           </a:p>
           <a:p>
             <a:pPr>
               <a:lnSpc>
-                <a:spcPct val="105000"/>
+                <a:spcPct val="108000"/>
               </a:lnSpc>
               <a:spcAft>
-                <a:spcPts val="500"/>
+                <a:spcPts val="200"/>
               </a:spcAft>
             </a:pPr>
             <a:r>
-              <a:rPr sz="1100" b="0" i="0">
+              <a:rPr sz="1500" b="0" i="0">
                 <a:solidFill>
                   <a:srgbClr val="111111"/>
                 </a:solidFill>
                 <a:latin typeface="Arial"/>
               </a:rPr>
-              <a:t>•  OpenAI (Dec 2024). o1 System Card, Apollo Research scheming evaluations. cdn.openai.com/o1-system-card-20241205.pdf</a:t>
+              <a:t>•  Tests detector behavior on those observations; no actor rerun</a:t>
             </a:r>
           </a:p>
           <a:p>
             <a:pPr>
               <a:lnSpc>
-                <a:spcPct val="105000"/>
+                <a:spcPct val="108000"/>
               </a:lnSpc>
               <a:spcAft>
-                <a:spcPts val="500"/>
+                <a:spcPts val="200"/>
               </a:spcAft>
             </a:pPr>
             <a:r>
-              <a:rPr sz="1100" b="0" i="0">
+              <a:rPr sz="1500" b="0" i="0">
                 <a:solidFill>
                   <a:srgbClr val="111111"/>
                 </a:solidFill>
                 <a:latin typeface="Arial"/>
               </a:rPr>
-              <a:t>•  Palisade Research (Dec 2024, Feb 2025). o1-preview hacks its chess environment. x.com/PalisadeAI; MIT Technology Review</a:t>
-            </a:r>
-          </a:p>
-          <a:p>
-            <a:pPr>
-              <a:lnSpc>
-                <a:spcPct val="105000"/>
-              </a:lnSpc>
-              <a:spcAft>
-                <a:spcPts val="500"/>
-              </a:spcAft>
-            </a:pPr>
-            <a:r>
-              <a:rPr sz="1100" b="0" i="0">
-                <a:solidFill>
-                  <a:srgbClr val="111111"/>
-                </a:solidFill>
-                <a:latin typeface="Arial"/>
-              </a:rPr>
-              <a:t>•  Baker et al., OpenAI (Mar 2025). Monitoring Reasoning Models for Misbehavior. arXiv:2503.11926</a:t>
-            </a:r>
-          </a:p>
-          <a:p>
-            <a:pPr>
-              <a:lnSpc>
-                <a:spcPct val="105000"/>
-              </a:lnSpc>
-              <a:spcAft>
-                <a:spcPts val="500"/>
-              </a:spcAft>
-            </a:pPr>
-            <a:r>
-              <a:rPr sz="1100" b="0" i="0">
-                <a:solidFill>
-                  <a:srgbClr val="111111"/>
-                </a:solidFill>
-                <a:latin typeface="Arial"/>
-              </a:rPr>
-              <a:t>•  Palisade Research (May 2025). o3 sabotages shutdown in 7/100 runs. BleepingComputer, The Register</a:t>
-            </a:r>
-          </a:p>
-          <a:p>
-            <a:pPr>
-              <a:lnSpc>
-                <a:spcPct val="105000"/>
-              </a:lnSpc>
-              <a:spcAft>
-                <a:spcPts val="500"/>
-              </a:spcAft>
-            </a:pPr>
-            <a:r>
-              <a:rPr sz="1100" b="0" i="0">
-                <a:solidFill>
-                  <a:srgbClr val="111111"/>
-                </a:solidFill>
-                <a:latin typeface="Arial"/>
-              </a:rPr>
-              <a:t>•  Anthropic (May 2025). System Card: Claude Opus 4 and Sonnet 4. anthropic.com/claude-4-system-card</a:t>
-            </a:r>
-          </a:p>
-          <a:p>
-            <a:pPr>
-              <a:lnSpc>
-                <a:spcPct val="105000"/>
-              </a:lnSpc>
-              <a:spcAft>
-                <a:spcPts val="500"/>
-              </a:spcAft>
-            </a:pPr>
-            <a:r>
-              <a:rPr sz="1100" b="0" i="0">
-                <a:solidFill>
-                  <a:srgbClr val="111111"/>
-                </a:solidFill>
-                <a:latin typeface="Arial"/>
-              </a:rPr>
-              <a:t>•  Anthropic (Jun 2025). Agentic Misalignment: How LLMs Could Be Insider Threats</a:t>
-            </a:r>
-          </a:p>
-        </p:txBody>
-      </p:sp>
-      <p:sp>
-        <p:nvSpPr>
-          <p:cNvPr id="9" name="TextBox 8"/>
+              <a:t>•  Does not establish prevention, new behavior or population incident rates</a:t>
+            </a:r>
+          </a:p>
+        </p:txBody>
+      </p:sp>
+      <p:sp>
+        <p:nvSpPr>
+          <p:cNvPr id="12" name="Rounded Rectangle 11"/>
+          <p:cNvSpPr/>
+          <p:nvPr/>
+        </p:nvSpPr>
+        <p:spPr>
+          <a:xfrm>
+            <a:off x="4270248" y="1325880"/>
+            <a:ext cx="3657600" cy="3383280"/>
+          </a:xfrm>
+          <a:prstGeom prst="roundRect">
+            <a:avLst>
+              <a:gd name="adj" fmla="val 6000"/>
+            </a:avLst>
+          </a:prstGeom>
+          <a:solidFill>
+            <a:srgbClr val="EAF5EF"/>
+          </a:solidFill>
+          <a:ln w="12700">
+            <a:solidFill>
+              <a:srgbClr val="2E7D5B"/>
+            </a:solidFill>
+          </a:ln>
+          <a:effectLst/>
+        </p:spPr>
+        <p:style>
+          <a:lnRef idx="1">
+            <a:schemeClr val="accent1"/>
+          </a:lnRef>
+          <a:fillRef idx="3">
+            <a:schemeClr val="accent1"/>
+          </a:fillRef>
+          <a:effectRef idx="2">
+            <a:schemeClr val="accent1"/>
+          </a:effectRef>
+          <a:fontRef idx="minor">
+            <a:schemeClr val="lt1"/>
+          </a:fontRef>
+        </p:style>
+        <p:txBody>
+          <a:bodyPr rtlCol="0" anchor="ctr"/>
+          <a:lstStyle/>
+          <a:p/>
+        </p:txBody>
+      </p:sp>
+      <p:sp>
+        <p:nvSpPr>
+          <p:cNvPr id="13" name="TextBox 12"/>
           <p:cNvSpPr txBox="1"/>
           <p:nvPr/>
         </p:nvSpPr>
         <p:spPr>
           <a:xfrm>
-            <a:off x="6263640" y="1325880"/>
-            <a:ext cx="5486400" cy="4937760"/>
+            <a:off x="4379976" y="1399032"/>
+            <a:ext cx="3456432" cy="365760"/>
+          </a:xfrm>
+          <a:prstGeom prst="rect">
+            <a:avLst/>
+          </a:prstGeom>
+          <a:noFill/>
+        </p:spPr>
+        <p:txBody>
+          <a:bodyPr wrap="square" lIns="45720" rIns="45720" tIns="27432" bIns="27432" anchor="t">
+            <a:spAutoFit/>
+          </a:bodyPr>
+          <a:lstStyle/>
+          <a:p>
+            <a:pPr algn="l">
+              <a:lnSpc>
+                <a:spcPct val="110000"/>
+              </a:lnSpc>
+            </a:pPr>
+            <a:r>
+              <a:rPr sz="1600" b="1" i="0">
+                <a:solidFill>
+                  <a:srgbClr val="2E7D5B"/>
+                </a:solidFill>
+                <a:latin typeface="Arial"/>
+              </a:rPr>
+              <a:t>2 · Replay fixed actions</a:t>
+            </a:r>
+          </a:p>
+        </p:txBody>
+      </p:sp>
+      <p:sp>
+        <p:nvSpPr>
+          <p:cNvPr id="14" name="TextBox 13"/>
+          <p:cNvSpPr txBox="1"/>
+          <p:nvPr/>
+        </p:nvSpPr>
+        <p:spPr>
+          <a:xfrm>
+            <a:off x="4343400" y="1764792"/>
+            <a:ext cx="3511296" cy="2880360"/>
           </a:xfrm>
           <a:prstGeom prst="rect">
             <a:avLst/>
@@ -23537,138 +24914,1125 @@
           <a:p>
             <a:pPr>
               <a:lnSpc>
-                <a:spcPct val="105000"/>
+                <a:spcPct val="108000"/>
               </a:lnSpc>
               <a:spcAft>
-                <a:spcPts val="500"/>
+                <a:spcPts val="200"/>
               </a:spcAft>
             </a:pPr>
             <a:r>
-              <a:rPr sz="1100" b="0" i="0">
+              <a:rPr sz="1500" b="0" i="0">
                 <a:solidFill>
                   <a:srgbClr val="111111"/>
                 </a:solidFill>
                 <a:latin typeface="Arial"/>
               </a:rPr>
-              <a:t>•  Invariant Labs (May 2025). GitHub MCP private-repository exfiltration. github/github-mcp-server issue #844</a:t>
+              <a:t>•  Needs resettable state and recorded or explicitly scripted actions</a:t>
             </a:r>
           </a:p>
           <a:p>
             <a:pPr>
               <a:lnSpc>
-                <a:spcPct val="105000"/>
+                <a:spcPct val="108000"/>
               </a:lnSpc>
               <a:spcAft>
-                <a:spcPts val="500"/>
+                <a:spcPts val="200"/>
               </a:spcAft>
             </a:pPr>
             <a:r>
-              <a:rPr sz="1100" b="0" i="0">
+              <a:rPr sz="1500" b="0" i="0">
                 <a:solidFill>
                   <a:srgbClr val="111111"/>
                 </a:solidFill>
                 <a:latin typeface="Arial"/>
               </a:rPr>
-              <a:t>•  SaaStr / Replit (Jul 2025). Production database deleted during code freeze. Slashdot, Fortune</a:t>
+              <a:t>•  Tests effects, the outcome check and boundary controls</a:t>
             </a:r>
           </a:p>
           <a:p>
             <a:pPr>
               <a:lnSpc>
-                <a:spcPct val="105000"/>
+                <a:spcPct val="108000"/>
               </a:lnSpc>
               <a:spcAft>
-                <a:spcPts val="500"/>
+                <a:spcPts val="200"/>
               </a:spcAft>
             </a:pPr>
             <a:r>
-              <a:rPr sz="1100" b="0" i="0">
+              <a:rPr sz="1500" b="0" i="0">
                 <a:solidFill>
                   <a:srgbClr val="111111"/>
                 </a:solidFill>
                 <a:latin typeface="Arial"/>
               </a:rPr>
-              <a:t>•  AWS; 404 Media (Jul 2025). Amazon Q Developer extension 1.84.0 wiper prompt. SC Media</a:t>
-            </a:r>
-          </a:p>
+              <a:t>•  A scripted exploit does not show that a model would choose it</a:t>
+            </a:r>
+          </a:p>
+        </p:txBody>
+      </p:sp>
+      <p:sp>
+        <p:nvSpPr>
+          <p:cNvPr id="15" name="Rounded Rectangle 14"/>
+          <p:cNvSpPr/>
+          <p:nvPr/>
+        </p:nvSpPr>
+        <p:spPr>
+          <a:xfrm>
+            <a:off x="8074152" y="1325880"/>
+            <a:ext cx="3657600" cy="3383280"/>
+          </a:xfrm>
+          <a:prstGeom prst="roundRect">
+            <a:avLst>
+              <a:gd name="adj" fmla="val 6000"/>
+            </a:avLst>
+          </a:prstGeom>
+          <a:solidFill>
+            <a:srgbClr val="FDF3E7"/>
+          </a:solidFill>
+          <a:ln w="12700">
+            <a:solidFill>
+              <a:srgbClr val="B8732A"/>
+            </a:solidFill>
+          </a:ln>
+          <a:effectLst/>
+        </p:spPr>
+        <p:style>
+          <a:lnRef idx="1">
+            <a:schemeClr val="accent1"/>
+          </a:lnRef>
+          <a:fillRef idx="3">
+            <a:schemeClr val="accent1"/>
+          </a:fillRef>
+          <a:effectRef idx="2">
+            <a:schemeClr val="accent1"/>
+          </a:effectRef>
+          <a:fontRef idx="minor">
+            <a:schemeClr val="lt1"/>
+          </a:fontRef>
+        </p:style>
+        <p:txBody>
+          <a:bodyPr rtlCol="0" anchor="ctr"/>
+          <a:lstStyle/>
+          <a:p/>
+        </p:txBody>
+      </p:sp>
+      <p:sp>
+        <p:nvSpPr>
+          <p:cNvPr id="16" name="TextBox 15"/>
+          <p:cNvSpPr txBox="1"/>
+          <p:nvPr/>
+        </p:nvSpPr>
+        <p:spPr>
+          <a:xfrm>
+            <a:off x="8183880" y="1399032"/>
+            <a:ext cx="3456432" cy="365760"/>
+          </a:xfrm>
+          <a:prstGeom prst="rect">
+            <a:avLst/>
+          </a:prstGeom>
+          <a:noFill/>
+        </p:spPr>
+        <p:txBody>
+          <a:bodyPr wrap="square" lIns="45720" rIns="45720" tIns="27432" bIns="27432" anchor="t">
+            <a:spAutoFit/>
+          </a:bodyPr>
+          <a:lstStyle/>
+          <a:p>
+            <a:pPr algn="l">
+              <a:lnSpc>
+                <a:spcPct val="110000"/>
+              </a:lnSpc>
+            </a:pPr>
+            <a:r>
+              <a:rPr sz="1600" b="1" i="0">
+                <a:solidFill>
+                  <a:srgbClr val="B8732A"/>
+                </a:solidFill>
+                <a:latin typeface="Arial"/>
+              </a:rPr>
+              <a:t>3 · Re-run the agent</a:t>
+            </a:r>
+          </a:p>
+        </p:txBody>
+      </p:sp>
+      <p:sp>
+        <p:nvSpPr>
+          <p:cNvPr id="17" name="TextBox 16"/>
+          <p:cNvSpPr txBox="1"/>
+          <p:nvPr/>
+        </p:nvSpPr>
+        <p:spPr>
+          <a:xfrm>
+            <a:off x="8147304" y="1764792"/>
+            <a:ext cx="3511296" cy="2880360"/>
+          </a:xfrm>
+          <a:prstGeom prst="rect">
+            <a:avLst/>
+          </a:prstGeom>
+          <a:noFill/>
+        </p:spPr>
+        <p:txBody>
+          <a:bodyPr wrap="square" lIns="45720" rIns="45720">
+            <a:spAutoFit/>
+          </a:bodyPr>
+          <a:lstStyle/>
           <a:p>
             <a:pPr>
               <a:lnSpc>
-                <a:spcPct val="105000"/>
+                <a:spcPct val="108000"/>
               </a:lnSpc>
               <a:spcAft>
-                <a:spcPts val="500"/>
+                <a:spcPts val="200"/>
               </a:spcAft>
             </a:pPr>
             <a:r>
-              <a:rPr sz="1100" b="0" i="0">
+              <a:rPr sz="1500" b="0" i="0">
                 <a:solidFill>
                   <a:srgbClr val="111111"/>
                 </a:solidFill>
                 <a:latin typeface="Arial"/>
               </a:rPr>
-              <a:t>•  AI Incident Database (Jul 2025). Incident 1178: Gemini CLI deletes user files. incidentdatabase.ai/cite/1178</a:t>
+              <a:t>•  Needs an accessible pinned model and restorable history</a:t>
             </a:r>
           </a:p>
           <a:p>
             <a:pPr>
               <a:lnSpc>
-                <a:spcPct val="105000"/>
+                <a:spcPct val="108000"/>
               </a:lnSpc>
               <a:spcAft>
-                <a:spcPts val="500"/>
+                <a:spcPts val="200"/>
               </a:spcAft>
             </a:pPr>
             <a:r>
-              <a:rPr sz="1100" b="0" i="0">
+              <a:rPr sz="1500" b="0" i="0">
                 <a:solidFill>
                   <a:srgbClr val="111111"/>
                 </a:solidFill>
                 <a:latin typeface="Arial"/>
               </a:rPr>
-              <a:t>•  Brave Security (Aug 2025). Indirect prompt injection in Perplexity Comet. brave.com/blog</a:t>
+              <a:t>•  Re-sample after intervention; let subsequent actions change</a:t>
             </a:r>
           </a:p>
           <a:p>
             <a:pPr>
               <a:lnSpc>
-                <a:spcPct val="105000"/>
+                <a:spcPct val="108000"/>
               </a:lnSpc>
               <a:spcAft>
-                <a:spcPts val="500"/>
+                <a:spcPts val="200"/>
               </a:spcAft>
             </a:pPr>
             <a:r>
-              <a:rPr sz="1100" b="0" i="0">
+              <a:rPr sz="1500" b="0" i="0">
                 <a:solidFill>
                   <a:srgbClr val="111111"/>
                 </a:solidFill>
                 <a:latin typeface="Arial"/>
               </a:rPr>
-              <a:t>•  OpenAI (Oct–Dec 2025). ChatGPT Atlas prompt-injection update. CyberScoop</a:t>
-            </a:r>
-          </a:p>
-          <a:p>
-            <a:pPr>
-              <a:lnSpc>
-                <a:spcPct val="105000"/>
-              </a:lnSpc>
-              <a:spcAft>
-                <a:spcPts val="500"/>
-              </a:spcAft>
-            </a:pPr>
-            <a:r>
-              <a:rPr sz="1100" b="0" i="0">
+              <a:t>•  Behavioral conclusions apply to the tested model, environment and conditions</a:t>
+            </a:r>
+          </a:p>
+        </p:txBody>
+      </p:sp>
+      <p:sp>
+        <p:nvSpPr>
+          <p:cNvPr id="18" name="Rounded Rectangle 17"/>
+          <p:cNvSpPr/>
+          <p:nvPr/>
+        </p:nvSpPr>
+        <p:spPr>
+          <a:xfrm>
+            <a:off x="457200" y="5010912"/>
+            <a:ext cx="11277295" cy="941832"/>
+          </a:xfrm>
+          <a:prstGeom prst="roundRect">
+            <a:avLst>
+              <a:gd name="adj" fmla="val 6000"/>
+            </a:avLst>
+          </a:prstGeom>
+          <a:solidFill>
+            <a:srgbClr val="FFF2CC"/>
+          </a:solidFill>
+          <a:ln>
+            <a:noFill/>
+          </a:ln>
+          <a:effectLst/>
+        </p:spPr>
+        <p:style>
+          <a:lnRef idx="1">
+            <a:schemeClr val="accent1"/>
+          </a:lnRef>
+          <a:fillRef idx="3">
+            <a:schemeClr val="accent1"/>
+          </a:fillRef>
+          <a:effectRef idx="2">
+            <a:schemeClr val="accent1"/>
+          </a:effectRef>
+          <a:fontRef idx="minor">
+            <a:schemeClr val="lt1"/>
+          </a:fontRef>
+        </p:style>
+        <p:txBody>
+          <a:bodyPr rtlCol="0" anchor="ctr"/>
+          <a:lstStyle/>
+          <a:p/>
+        </p:txBody>
+      </p:sp>
+      <p:sp>
+        <p:nvSpPr>
+          <p:cNvPr id="19" name="TextBox 18"/>
+          <p:cNvSpPr txBox="1"/>
+          <p:nvPr/>
+        </p:nvSpPr>
+        <p:spPr>
+          <a:xfrm>
+            <a:off x="685800" y="5084064"/>
+            <a:ext cx="10820095" cy="795528"/>
+          </a:xfrm>
+          <a:prstGeom prst="rect">
+            <a:avLst/>
+          </a:prstGeom>
+          <a:noFill/>
+        </p:spPr>
+        <p:txBody>
+          <a:bodyPr wrap="square" lIns="45720" rIns="45720" tIns="27432" bIns="27432" anchor="ctr">
+            <a:spAutoFit/>
+          </a:bodyPr>
+          <a:lstStyle/>
+          <a:p>
+            <a:pPr algn="l">
+              <a:lnSpc>
+                <a:spcPct val="115000"/>
+              </a:lnSpc>
+            </a:pPr>
+            <a:r>
+              <a:rPr sz="1600" b="0" i="0">
                 <a:solidFill>
                   <a:srgbClr val="111111"/>
                 </a:solidFill>
                 <a:latin typeface="Arial"/>
               </a:rPr>
-              <a:t>•  Anthropic (Nov 2025). Disrupting the first AI-orchestrated cyber espionage campaign (GTG-1002). AI Incident Database 1263</a:t>
-            </a:r>
-          </a:p>
-        </p:txBody>
-      </p:sp>
+              <a:t>Record fidelity independently: matched historical conditions, partial reconstruction, or a controlled mechanism study. A / B / C evidence grades do not establish fidelity.</a:t>
+            </a:r>
+          </a:p>
+        </p:txBody>
+      </p:sp>
+    </p:spTree>
+  </p:cSld>
+  <p:clrMapOvr>
+    <a:masterClrMapping/>
+  </p:clrMapOvr>
+</p:sld>
+</file>
+
+<file path=ppt/slides/slide29.xml><?xml version="1.0" encoding="utf-8"?>
+<p:sld xmlns:a="http://schemas.openxmlformats.org/drawingml/2006/main" xmlns:p="http://schemas.openxmlformats.org/presentationml/2006/main" xmlns:r="http://schemas.openxmlformats.org/officeDocument/2006/relationships">
+  <p:cSld>
+    <p:spTree>
+      <p:nvGrpSpPr>
+        <p:cNvPr id="1" name=""/>
+        <p:cNvGrpSpPr/>
+        <p:nvPr/>
+      </p:nvGrpSpPr>
+      <p:grpSpPr/>
+      <p:sp>
+        <p:nvSpPr>
+          <p:cNvPr id="2" name="Rectangle 1"/>
+          <p:cNvSpPr/>
+          <p:nvPr/>
+        </p:nvSpPr>
+        <p:spPr>
+          <a:xfrm>
+            <a:off x="457200" y="384048"/>
+            <a:ext cx="82296" cy="566928"/>
+          </a:xfrm>
+          <a:prstGeom prst="rect">
+            <a:avLst/>
+          </a:prstGeom>
+          <a:solidFill>
+            <a:srgbClr val="365E9E"/>
+          </a:solidFill>
+          <a:ln>
+            <a:noFill/>
+          </a:ln>
+          <a:effectLst/>
+        </p:spPr>
+        <p:style>
+          <a:lnRef idx="1">
+            <a:schemeClr val="accent1"/>
+          </a:lnRef>
+          <a:fillRef idx="3">
+            <a:schemeClr val="accent1"/>
+          </a:fillRef>
+          <a:effectRef idx="2">
+            <a:schemeClr val="accent1"/>
+          </a:effectRef>
+          <a:fontRef idx="minor">
+            <a:schemeClr val="lt1"/>
+          </a:fontRef>
+        </p:style>
+        <p:txBody>
+          <a:bodyPr rtlCol="0" anchor="ctr"/>
+          <a:lstStyle/>
+          <a:p/>
+        </p:txBody>
+      </p:sp>
+      <p:sp>
+        <p:nvSpPr>
+          <p:cNvPr id="3" name="TextBox 2"/>
+          <p:cNvSpPr txBox="1"/>
+          <p:nvPr/>
+        </p:nvSpPr>
+        <p:spPr>
+          <a:xfrm>
+            <a:off x="640080" y="301752"/>
+            <a:ext cx="10515600" cy="548640"/>
+          </a:xfrm>
+          <a:prstGeom prst="rect">
+            <a:avLst/>
+          </a:prstGeom>
+          <a:noFill/>
+        </p:spPr>
+        <p:txBody>
+          <a:bodyPr wrap="square" lIns="45720" rIns="45720" tIns="27432" bIns="27432" anchor="ctr">
+            <a:spAutoFit/>
+          </a:bodyPr>
+          <a:lstStyle/>
+          <a:p>
+            <a:pPr algn="l">
+              <a:lnSpc>
+                <a:spcPct val="110000"/>
+              </a:lnSpc>
+            </a:pPr>
+            <a:r>
+              <a:rPr sz="2600" b="1" i="0">
+                <a:solidFill>
+                  <a:srgbClr val="111111"/>
+                </a:solidFill>
+                <a:latin typeface="Arial"/>
+              </a:rPr>
+              <a:t>The evaluator is part of the incident</a:t>
+            </a:r>
+          </a:p>
+        </p:txBody>
+      </p:sp>
+      <p:sp>
+        <p:nvSpPr>
+          <p:cNvPr id="4" name="TextBox 3"/>
+          <p:cNvSpPr txBox="1"/>
+          <p:nvPr/>
+        </p:nvSpPr>
+        <p:spPr>
+          <a:xfrm>
+            <a:off x="640080" y="868680"/>
+            <a:ext cx="10972800" cy="365760"/>
+          </a:xfrm>
+          <a:prstGeom prst="rect">
+            <a:avLst/>
+          </a:prstGeom>
+          <a:noFill/>
+        </p:spPr>
+        <p:txBody>
+          <a:bodyPr wrap="square" lIns="45720" rIns="45720" tIns="27432" bIns="27432" anchor="t">
+            <a:spAutoFit/>
+          </a:bodyPr>
+          <a:lstStyle/>
+          <a:p>
+            <a:pPr algn="l">
+              <a:lnSpc>
+                <a:spcPct val="110000"/>
+              </a:lnSpc>
+            </a:pPr>
+            <a:r>
+              <a:rPr sz="1300" b="0" i="0">
+                <a:solidFill>
+                  <a:srgbClr val="666666"/>
+                </a:solidFill>
+                <a:latin typeface="Arial"/>
+              </a:rPr>
+              <a:t>A container rebuild alone does not recover the original causal conditions</a:t>
+            </a:r>
+          </a:p>
+        </p:txBody>
+      </p:sp>
+      <p:sp>
+        <p:nvSpPr>
+          <p:cNvPr id="5" name="TextBox 4"/>
+          <p:cNvSpPr txBox="1"/>
+          <p:nvPr/>
+        </p:nvSpPr>
+        <p:spPr>
+          <a:xfrm>
+            <a:off x="8503920" y="109728"/>
+            <a:ext cx="3200400" cy="274320"/>
+          </a:xfrm>
+          <a:prstGeom prst="rect">
+            <a:avLst/>
+          </a:prstGeom>
+          <a:noFill/>
+        </p:spPr>
+        <p:txBody>
+          <a:bodyPr wrap="square" lIns="45720" rIns="45720" tIns="27432" bIns="27432" anchor="t">
+            <a:spAutoFit/>
+          </a:bodyPr>
+          <a:lstStyle/>
+          <a:p>
+            <a:pPr algn="r">
+              <a:lnSpc>
+                <a:spcPct val="110000"/>
+              </a:lnSpc>
+            </a:pPr>
+            <a:r>
+              <a:rPr sz="900" b="1" i="0">
+                <a:solidFill>
+                  <a:srgbClr val="365E9E"/>
+                </a:solidFill>
+                <a:latin typeface="Arial"/>
+              </a:rPr>
+              <a:t>7 · REPLAY FEASIBILITY</a:t>
+            </a:r>
+          </a:p>
+        </p:txBody>
+      </p:sp>
+      <p:cxnSp>
+        <p:nvCxnSpPr>
+          <p:cNvPr id="6" name="Connector 5"/>
+          <p:cNvCxnSpPr/>
+          <p:nvPr/>
+        </p:nvCxnSpPr>
+        <p:spPr>
+          <a:xfrm>
+            <a:off x="457200" y="6446520"/>
+            <a:ext cx="11277295" cy="0"/>
+          </a:xfrm>
+          <a:prstGeom prst="line">
+            <a:avLst/>
+          </a:prstGeom>
+          <a:ln w="6350">
+            <a:solidFill>
+              <a:srgbClr val="C9C9C9"/>
+            </a:solidFill>
+          </a:ln>
+        </p:spPr>
+        <p:style>
+          <a:lnRef idx="2">
+            <a:schemeClr val="accent1"/>
+          </a:lnRef>
+          <a:fillRef idx="0">
+            <a:schemeClr val="accent1"/>
+          </a:fillRef>
+          <a:effectRef idx="1">
+            <a:schemeClr val="accent1"/>
+          </a:effectRef>
+          <a:fontRef idx="minor">
+            <a:schemeClr val="tx1"/>
+          </a:fontRef>
+        </p:style>
+      </p:cxnSp>
+      <p:sp>
+        <p:nvSpPr>
+          <p:cNvPr id="7" name="TextBox 6"/>
+          <p:cNvSpPr txBox="1"/>
+          <p:nvPr/>
+        </p:nvSpPr>
+        <p:spPr>
+          <a:xfrm>
+            <a:off x="457200" y="6473952"/>
+            <a:ext cx="10058400" cy="274320"/>
+          </a:xfrm>
+          <a:prstGeom prst="rect">
+            <a:avLst/>
+          </a:prstGeom>
+          <a:noFill/>
+        </p:spPr>
+        <p:txBody>
+          <a:bodyPr wrap="square" lIns="45720" rIns="45720" tIns="27432" bIns="27432" anchor="t">
+            <a:spAutoFit/>
+          </a:bodyPr>
+          <a:lstStyle/>
+          <a:p>
+            <a:pPr algn="l">
+              <a:lnSpc>
+                <a:spcPct val="110000"/>
+              </a:lnSpc>
+            </a:pPr>
+            <a:r>
+              <a:rPr sz="800" b="0" i="0">
+                <a:solidFill>
+                  <a:srgbClr val="666666"/>
+                </a:solidFill>
+                <a:latin typeface="Arial"/>
+              </a:rPr>
+              <a:t>Incident-aware optimization · design proposal · containment-extension · October 2026 · no benchmark improvement measured</a:t>
+            </a:r>
+          </a:p>
+        </p:txBody>
+      </p:sp>
+      <p:sp>
+        <p:nvSpPr>
+          <p:cNvPr id="8" name="TextBox 7"/>
+          <p:cNvSpPr txBox="1"/>
+          <p:nvPr/>
+        </p:nvSpPr>
+        <p:spPr>
+          <a:xfrm>
+            <a:off x="10820095" y="6473952"/>
+            <a:ext cx="914400" cy="274320"/>
+          </a:xfrm>
+          <a:prstGeom prst="rect">
+            <a:avLst/>
+          </a:prstGeom>
+          <a:noFill/>
+        </p:spPr>
+        <p:txBody>
+          <a:bodyPr wrap="square" lIns="45720" rIns="45720" tIns="27432" bIns="27432" anchor="t">
+            <a:spAutoFit/>
+          </a:bodyPr>
+          <a:lstStyle/>
+          <a:p>
+            <a:pPr algn="r">
+              <a:lnSpc>
+                <a:spcPct val="110000"/>
+              </a:lnSpc>
+            </a:pPr>
+            <a:r>
+              <a:rPr sz="900" b="0" i="0">
+                <a:solidFill>
+                  <a:srgbClr val="666666"/>
+                </a:solidFill>
+                <a:latin typeface="Arial"/>
+              </a:rPr>
+              <a:t>29</a:t>
+            </a:r>
+          </a:p>
+        </p:txBody>
+      </p:sp>
+      <p:graphicFrame>
+        <p:nvGraphicFramePr>
+          <p:cNvPr id="9" name="Table 8"/>
+          <p:cNvGraphicFramePr>
+            <a:graphicFrameLocks noGrp="1"/>
+          </p:cNvGraphicFramePr>
+          <p:nvPr/>
+        </p:nvGraphicFramePr>
+        <p:xfrm>
+          <a:off x="457200" y="1325880"/>
+          <a:ext cx="11277293" cy="4892040"/>
+        </p:xfrm>
+        <a:graphic>
+          <a:graphicData uri="http://schemas.openxmlformats.org/drawingml/2006/table">
+            <a:tbl>
+              <a:tblPr firstRow="1" bandRow="1">
+                <a:tableStyleId>{5C22544A-7EE6-4342-B048-85BDC9FD1C3A}</a:tableStyleId>
+              </a:tblPr>
+              <a:tblGrid>
+                <a:gridCol w="2423749"/>
+                <a:gridCol w="4390187"/>
+                <a:gridCol w="4463357"/>
+              </a:tblGrid>
+              <a:tr h="815340">
+                <a:tc>
+                  <a:txBody>
+                    <a:bodyPr wrap="square"/>
+                    <a:lstStyle/>
+                    <a:p>
+                      <a:pPr>
+                        <a:lnSpc>
+                          <a:spcPct val="105000"/>
+                        </a:lnSpc>
+                      </a:pPr>
+                      <a:r>
+                        <a:rPr sz="1450" b="1" i="0">
+                          <a:solidFill>
+                            <a:srgbClr val="FFFFFF"/>
+                          </a:solidFill>
+                          <a:latin typeface="Arial"/>
+                        </a:rPr>
+                        <a:t>Dependency</a:t>
+                      </a:r>
+                    </a:p>
+                  </a:txBody>
+                  <a:tcPr marL="54864" marR="54864" marT="27432" marB="27432">
+                    <a:solidFill>
+                      <a:srgbClr val="365E9E"/>
+                    </a:solidFill>
+                  </a:tcPr>
+                </a:tc>
+                <a:tc>
+                  <a:txBody>
+                    <a:bodyPr wrap="square"/>
+                    <a:lstStyle/>
+                    <a:p>
+                      <a:pPr>
+                        <a:lnSpc>
+                          <a:spcPct val="105000"/>
+                        </a:lnSpc>
+                      </a:pPr>
+                      <a:r>
+                        <a:rPr sz="1450" b="1" i="0">
+                          <a:solidFill>
+                            <a:srgbClr val="FFFFFF"/>
+                          </a:solidFill>
+                          <a:latin typeface="Arial"/>
+                        </a:rPr>
+                        <a:t>What can change the behavior</a:t>
+                      </a:r>
+                    </a:p>
+                  </a:txBody>
+                  <a:tcPr marL="54864" marR="54864" marT="27432" marB="27432">
+                    <a:solidFill>
+                      <a:srgbClr val="365E9E"/>
+                    </a:solidFill>
+                  </a:tcPr>
+                </a:tc>
+                <a:tc>
+                  <a:txBody>
+                    <a:bodyPr wrap="square"/>
+                    <a:lstStyle/>
+                    <a:p>
+                      <a:pPr>
+                        <a:lnSpc>
+                          <a:spcPct val="105000"/>
+                        </a:lnSpc>
+                      </a:pPr>
+                      <a:r>
+                        <a:rPr sz="1450" b="1" i="0">
+                          <a:solidFill>
+                            <a:srgbClr val="FFFFFF"/>
+                          </a:solidFill>
+                          <a:latin typeface="Arial"/>
+                        </a:rPr>
+                        <a:t>What the replay must establish</a:t>
+                      </a:r>
+                    </a:p>
+                  </a:txBody>
+                  <a:tcPr marL="54864" marR="54864" marT="27432" marB="27432">
+                    <a:solidFill>
+                      <a:srgbClr val="365E9E"/>
+                    </a:solidFill>
+                  </a:tcPr>
+                </a:tc>
+              </a:tr>
+              <a:tr h="815340">
+                <a:tc>
+                  <a:txBody>
+                    <a:bodyPr wrap="square"/>
+                    <a:lstStyle/>
+                    <a:p>
+                      <a:pPr>
+                        <a:lnSpc>
+                          <a:spcPct val="105000"/>
+                        </a:lnSpc>
+                      </a:pPr>
+                      <a:r>
+                        <a:rPr sz="1450" b="1" i="0">
+                          <a:solidFill>
+                            <a:srgbClr val="111111"/>
+                          </a:solidFill>
+                          <a:latin typeface="Arial"/>
+                        </a:rPr>
+                        <a:t>Actor and scaffold</a:t>
+                      </a:r>
+                    </a:p>
+                  </a:txBody>
+                  <a:tcPr marL="54864" marR="54864" marT="27432" marB="27432">
+                    <a:solidFill>
+                      <a:srgbClr val="FFFFFF"/>
+                    </a:solidFill>
+                  </a:tcPr>
+                </a:tc>
+                <a:tc>
+                  <a:txBody>
+                    <a:bodyPr wrap="square"/>
+                    <a:lstStyle/>
+                    <a:p>
+                      <a:pPr>
+                        <a:lnSpc>
+                          <a:spcPct val="105000"/>
+                        </a:lnSpc>
+                      </a:pPr>
+                      <a:r>
+                        <a:rPr sz="1450" b="0" i="0">
+                          <a:solidFill>
+                            <a:srgbClr val="111111"/>
+                          </a:solidFill>
+                          <a:latin typeface="Arial"/>
+                        </a:rPr>
+                        <a:t>Checkpoint, prompts, memory, tool routing, sampling and reasoning settings.</a:t>
+                      </a:r>
+                    </a:p>
+                  </a:txBody>
+                  <a:tcPr marL="54864" marR="54864" marT="27432" marB="27432">
+                    <a:solidFill>
+                      <a:srgbClr val="FFFFFF"/>
+                    </a:solidFill>
+                  </a:tcPr>
+                </a:tc>
+                <a:tc>
+                  <a:txBody>
+                    <a:bodyPr wrap="square"/>
+                    <a:lstStyle/>
+                    <a:p>
+                      <a:pPr>
+                        <a:lnSpc>
+                          <a:spcPct val="105000"/>
+                        </a:lnSpc>
+                      </a:pPr>
+                      <a:r>
+                        <a:rPr sz="1450" b="0" i="0">
+                          <a:solidFill>
+                            <a:srgbClr val="111111"/>
+                          </a:solidFill>
+                          <a:latin typeface="Arial"/>
+                        </a:rPr>
+                        <a:t>Pin available versions and history; mark inaccessible internal state.</a:t>
+                      </a:r>
+                    </a:p>
+                  </a:txBody>
+                  <a:tcPr marL="54864" marR="54864" marT="27432" marB="27432">
+                    <a:solidFill>
+                      <a:srgbClr val="FFFFFF"/>
+                    </a:solidFill>
+                  </a:tcPr>
+                </a:tc>
+              </a:tr>
+              <a:tr h="815340">
+                <a:tc>
+                  <a:txBody>
+                    <a:bodyPr wrap="square"/>
+                    <a:lstStyle/>
+                    <a:p>
+                      <a:pPr>
+                        <a:lnSpc>
+                          <a:spcPct val="105000"/>
+                        </a:lnSpc>
+                      </a:pPr>
+                      <a:r>
+                        <a:rPr sz="1450" b="1" i="0">
+                          <a:solidFill>
+                            <a:srgbClr val="111111"/>
+                          </a:solidFill>
+                          <a:latin typeface="Arial"/>
+                        </a:rPr>
+                        <a:t>Environment and state</a:t>
+                      </a:r>
+                    </a:p>
+                  </a:txBody>
+                  <a:tcPr marL="54864" marR="54864" marT="27432" marB="27432">
+                    <a:solidFill>
+                      <a:srgbClr val="F4F6FA"/>
+                    </a:solidFill>
+                  </a:tcPr>
+                </a:tc>
+                <a:tc>
+                  <a:txBody>
+                    <a:bodyPr wrap="square"/>
+                    <a:lstStyle/>
+                    <a:p>
+                      <a:pPr>
+                        <a:lnSpc>
+                          <a:spcPct val="105000"/>
+                        </a:lnSpc>
+                      </a:pPr>
+                      <a:r>
+                        <a:rPr sz="1450" b="0" i="0">
+                          <a:solidFill>
+                            <a:srgbClr val="111111"/>
+                          </a:solidFill>
+                          <a:latin typeface="Arial"/>
+                        </a:rPr>
+                        <a:t>Files, databases, permissions, service responses, package versions and timing.</a:t>
+                      </a:r>
+                    </a:p>
+                  </a:txBody>
+                  <a:tcPr marL="54864" marR="54864" marT="27432" marB="27432">
+                    <a:solidFill>
+                      <a:srgbClr val="F4F6FA"/>
+                    </a:solidFill>
+                  </a:tcPr>
+                </a:tc>
+                <a:tc>
+                  <a:txBody>
+                    <a:bodyPr wrap="square"/>
+                    <a:lstStyle/>
+                    <a:p>
+                      <a:pPr>
+                        <a:lnSpc>
+                          <a:spcPct val="105000"/>
+                        </a:lnSpc>
+                      </a:pPr>
+                      <a:r>
+                        <a:rPr sz="1450" b="0" i="0">
+                          <a:solidFill>
+                            <a:srgbClr val="111111"/>
+                          </a:solidFill>
+                          <a:latin typeface="Arial"/>
+                        </a:rPr>
+                        <a:t>Restore a known initial state; verify reset, isolation and relevant tool semantics.</a:t>
+                      </a:r>
+                    </a:p>
+                  </a:txBody>
+                  <a:tcPr marL="54864" marR="54864" marT="27432" marB="27432">
+                    <a:solidFill>
+                      <a:srgbClr val="F4F6FA"/>
+                    </a:solidFill>
+                  </a:tcPr>
+                </a:tc>
+              </a:tr>
+              <a:tr h="815340">
+                <a:tc>
+                  <a:txBody>
+                    <a:bodyPr wrap="square"/>
+                    <a:lstStyle/>
+                    <a:p>
+                      <a:pPr>
+                        <a:lnSpc>
+                          <a:spcPct val="105000"/>
+                        </a:lnSpc>
+                      </a:pPr>
+                      <a:r>
+                        <a:rPr sz="1450" b="1" i="0">
+                          <a:solidFill>
+                            <a:srgbClr val="111111"/>
+                          </a:solidFill>
+                          <a:latin typeface="Arial"/>
+                        </a:rPr>
+                        <a:t>Task and evaluator</a:t>
+                      </a:r>
+                    </a:p>
+                  </a:txBody>
+                  <a:tcPr marL="54864" marR="54864" marT="27432" marB="27432">
+                    <a:solidFill>
+                      <a:srgbClr val="FFFFFF"/>
+                    </a:solidFill>
+                  </a:tcPr>
+                </a:tc>
+                <a:tc>
+                  <a:txBody>
+                    <a:bodyPr wrap="square"/>
+                    <a:lstStyle/>
+                    <a:p>
+                      <a:pPr>
+                        <a:lnSpc>
+                          <a:spcPct val="105000"/>
+                        </a:lnSpc>
+                      </a:pPr>
+                      <a:r>
+                        <a:rPr sz="1450" b="0" i="0">
+                          <a:solidFill>
+                            <a:srgbClr val="111111"/>
+                          </a:solidFill>
+                          <a:latin typeface="Arial"/>
+                        </a:rPr>
+                        <a:t>Hidden tests, grader model/prompt, reward code and the definition of success.</a:t>
+                      </a:r>
+                    </a:p>
+                  </a:txBody>
+                  <a:tcPr marL="54864" marR="54864" marT="27432" marB="27432">
+                    <a:solidFill>
+                      <a:srgbClr val="FFFFFF"/>
+                    </a:solidFill>
+                  </a:tcPr>
+                </a:tc>
+                <a:tc>
+                  <a:txBody>
+                    <a:bodyPr wrap="square"/>
+                    <a:lstStyle/>
+                    <a:p>
+                      <a:pPr>
+                        <a:lnSpc>
+                          <a:spcPct val="105000"/>
+                        </a:lnSpc>
+                      </a:pPr>
+                      <a:r>
+                        <a:rPr sz="1450" b="0" i="0">
+                          <a:solidFill>
+                            <a:srgbClr val="111111"/>
+                          </a:solidFill>
+                          <a:latin typeface="Arial"/>
+                        </a:rPr>
+                        <a:t>Use a trusted effect check outside the agent's authority; include a benign control.</a:t>
+                      </a:r>
+                    </a:p>
+                  </a:txBody>
+                  <a:tcPr marL="54864" marR="54864" marT="27432" marB="27432">
+                    <a:solidFill>
+                      <a:srgbClr val="FFFFFF"/>
+                    </a:solidFill>
+                  </a:tcPr>
+                </a:tc>
+              </a:tr>
+              <a:tr h="815340">
+                <a:tc>
+                  <a:txBody>
+                    <a:bodyPr wrap="square"/>
+                    <a:lstStyle/>
+                    <a:p>
+                      <a:pPr>
+                        <a:lnSpc>
+                          <a:spcPct val="105000"/>
+                        </a:lnSpc>
+                      </a:pPr>
+                      <a:r>
+                        <a:rPr sz="1450" b="1" i="0">
+                          <a:solidFill>
+                            <a:srgbClr val="111111"/>
+                          </a:solidFill>
+                          <a:latin typeface="Arial"/>
+                        </a:rPr>
+                        <a:t>Observation access</a:t>
+                      </a:r>
+                    </a:p>
+                  </a:txBody>
+                  <a:tcPr marL="54864" marR="54864" marT="27432" marB="27432">
+                    <a:solidFill>
+                      <a:srgbClr val="F4F6FA"/>
+                    </a:solidFill>
+                  </a:tcPr>
+                </a:tc>
+                <a:tc>
+                  <a:txBody>
+                    <a:bodyPr wrap="square"/>
+                    <a:lstStyle/>
+                    <a:p>
+                      <a:pPr>
+                        <a:lnSpc>
+                          <a:spcPct val="105000"/>
+                        </a:lnSpc>
+                      </a:pPr>
+                      <a:r>
+                        <a:rPr sz="1450" b="0" i="0">
+                          <a:solidFill>
+                            <a:srgbClr val="111111"/>
+                          </a:solidFill>
+                          <a:latin typeface="Arial"/>
+                        </a:rPr>
+                        <a:t>Full action trace versus excerpts, raw reasoning or a generated summary.</a:t>
+                      </a:r>
+                    </a:p>
+                  </a:txBody>
+                  <a:tcPr marL="54864" marR="54864" marT="27432" marB="27432">
+                    <a:solidFill>
+                      <a:srgbClr val="F4F6FA"/>
+                    </a:solidFill>
+                  </a:tcPr>
+                </a:tc>
+                <a:tc>
+                  <a:txBody>
+                    <a:bodyPr wrap="square"/>
+                    <a:lstStyle/>
+                    <a:p>
+                      <a:pPr>
+                        <a:lnSpc>
+                          <a:spcPct val="105000"/>
+                        </a:lnSpc>
+                      </a:pPr>
+                      <a:r>
+                        <a:rPr sz="1450" b="0" i="0">
+                          <a:solidFill>
+                            <a:srgbClr val="111111"/>
+                          </a:solidFill>
+                          <a:latin typeface="Arial"/>
+                        </a:rPr>
+                        <a:t>Match the declared monitor view; a summary is not a substitute for raw reasoning.</a:t>
+                      </a:r>
+                    </a:p>
+                  </a:txBody>
+                  <a:tcPr marL="54864" marR="54864" marT="27432" marB="27432">
+                    <a:solidFill>
+                      <a:srgbClr val="F4F6FA"/>
+                    </a:solidFill>
+                  </a:tcPr>
+                </a:tc>
+              </a:tr>
+              <a:tr h="815340">
+                <a:tc>
+                  <a:txBody>
+                    <a:bodyPr wrap="square"/>
+                    <a:lstStyle/>
+                    <a:p>
+                      <a:pPr>
+                        <a:lnSpc>
+                          <a:spcPct val="105000"/>
+                        </a:lnSpc>
+                      </a:pPr>
+                      <a:r>
+                        <a:rPr sz="1450" b="1" i="0">
+                          <a:solidFill>
+                            <a:srgbClr val="111111"/>
+                          </a:solidFill>
+                          <a:latin typeface="Arial"/>
+                        </a:rPr>
+                        <a:t>Branching after intervention</a:t>
+                      </a:r>
+                    </a:p>
+                  </a:txBody>
+                  <a:tcPr marL="54864" marR="54864" marT="27432" marB="27432">
+                    <a:solidFill>
+                      <a:srgbClr val="FFFFFF"/>
+                    </a:solidFill>
+                  </a:tcPr>
+                </a:tc>
+                <a:tc>
+                  <a:txBody>
+                    <a:bodyPr wrap="square"/>
+                    <a:lstStyle/>
+                    <a:p>
+                      <a:pPr>
+                        <a:lnSpc>
+                          <a:spcPct val="105000"/>
+                        </a:lnSpc>
+                      </a:pPr>
+                      <a:r>
+                        <a:rPr sz="1450" b="0" i="0">
+                          <a:solidFill>
+                            <a:srgbClr val="111111"/>
+                          </a:solidFill>
+                          <a:latin typeface="Arial"/>
+                        </a:rPr>
+                        <a:t>An altered observation changes later actions and external state.</a:t>
+                      </a:r>
+                    </a:p>
+                  </a:txBody>
+                  <a:tcPr marL="54864" marR="54864" marT="27432" marB="27432">
+                    <a:solidFill>
+                      <a:srgbClr val="FFFFFF"/>
+                    </a:solidFill>
+                  </a:tcPr>
+                </a:tc>
+                <a:tc>
+                  <a:txBody>
+                    <a:bodyPr wrap="square"/>
+                    <a:lstStyle/>
+                    <a:p>
+                      <a:pPr>
+                        <a:lnSpc>
+                          <a:spcPct val="105000"/>
+                        </a:lnSpc>
+                      </a:pPr>
+                      <a:r>
+                        <a:rPr sz="1450" b="0" i="0">
+                          <a:solidFill>
+                            <a:srgbClr val="111111"/>
+                          </a:solidFill>
+                          <a:latin typeface="Arial"/>
+                        </a:rPr>
+                        <a:t>Locate the first divergence; resample continuation or explicitly keep an effect-only claim.</a:t>
+                      </a:r>
+                    </a:p>
+                  </a:txBody>
+                  <a:tcPr marL="54864" marR="54864" marT="27432" marB="27432">
+                    <a:solidFill>
+                      <a:srgbClr val="FFFFFF"/>
+                    </a:solidFill>
+                  </a:tcPr>
+                </a:tc>
+              </a:tr>
+            </a:tbl>
+          </a:graphicData>
+        </a:graphic>
+      </p:graphicFrame>
     </p:spTree>
   </p:cSld>
   <p:clrMapOvr>
@@ -24968,6 +27332,4324 @@
                 <a:latin typeface="Arial"/>
               </a:rPr>
               <a:t>The question is not whether incidents happen. It is what we do with each one.</a:t>
+            </a:r>
+          </a:p>
+        </p:txBody>
+      </p:sp>
+    </p:spTree>
+  </p:cSld>
+  <p:clrMapOvr>
+    <a:masterClrMapping/>
+  </p:clrMapOvr>
+</p:sld>
+</file>
+
+<file path=ppt/slides/slide30.xml><?xml version="1.0" encoding="utf-8"?>
+<p:sld xmlns:a="http://schemas.openxmlformats.org/drawingml/2006/main" xmlns:p="http://schemas.openxmlformats.org/presentationml/2006/main" xmlns:r="http://schemas.openxmlformats.org/officeDocument/2006/relationships">
+  <p:cSld>
+    <p:spTree>
+      <p:nvGrpSpPr>
+        <p:cNvPr id="1" name=""/>
+        <p:cNvGrpSpPr/>
+        <p:nvPr/>
+      </p:nvGrpSpPr>
+      <p:grpSpPr/>
+      <p:sp>
+        <p:nvSpPr>
+          <p:cNvPr id="2" name="Rectangle 1"/>
+          <p:cNvSpPr/>
+          <p:nvPr/>
+        </p:nvSpPr>
+        <p:spPr>
+          <a:xfrm>
+            <a:off x="457200" y="384048"/>
+            <a:ext cx="82296" cy="566928"/>
+          </a:xfrm>
+          <a:prstGeom prst="rect">
+            <a:avLst/>
+          </a:prstGeom>
+          <a:solidFill>
+            <a:srgbClr val="365E9E"/>
+          </a:solidFill>
+          <a:ln>
+            <a:noFill/>
+          </a:ln>
+          <a:effectLst/>
+        </p:spPr>
+        <p:style>
+          <a:lnRef idx="1">
+            <a:schemeClr val="accent1"/>
+          </a:lnRef>
+          <a:fillRef idx="3">
+            <a:schemeClr val="accent1"/>
+          </a:fillRef>
+          <a:effectRef idx="2">
+            <a:schemeClr val="accent1"/>
+          </a:effectRef>
+          <a:fontRef idx="minor">
+            <a:schemeClr val="lt1"/>
+          </a:fontRef>
+        </p:style>
+        <p:txBody>
+          <a:bodyPr rtlCol="0" anchor="ctr"/>
+          <a:lstStyle/>
+          <a:p/>
+        </p:txBody>
+      </p:sp>
+      <p:sp>
+        <p:nvSpPr>
+          <p:cNvPr id="3" name="TextBox 2"/>
+          <p:cNvSpPr txBox="1"/>
+          <p:nvPr/>
+        </p:nvSpPr>
+        <p:spPr>
+          <a:xfrm>
+            <a:off x="640080" y="301752"/>
+            <a:ext cx="10515600" cy="548640"/>
+          </a:xfrm>
+          <a:prstGeom prst="rect">
+            <a:avLst/>
+          </a:prstGeom>
+          <a:noFill/>
+        </p:spPr>
+        <p:txBody>
+          <a:bodyPr wrap="square" lIns="45720" rIns="45720" tIns="27432" bIns="27432" anchor="ctr">
+            <a:spAutoFit/>
+          </a:bodyPr>
+          <a:lstStyle/>
+          <a:p>
+            <a:pPr algn="l">
+              <a:lnSpc>
+                <a:spcPct val="110000"/>
+              </a:lnSpc>
+            </a:pPr>
+            <a:r>
+              <a:rPr sz="2300" b="1" i="0">
+                <a:solidFill>
+                  <a:srgbClr val="111111"/>
+                </a:solidFill>
+                <a:latin typeface="Arial"/>
+              </a:rPr>
+              <a:t>Where GPU, API and engineering costs become bottlenecks</a:t>
+            </a:r>
+          </a:p>
+        </p:txBody>
+      </p:sp>
+      <p:sp>
+        <p:nvSpPr>
+          <p:cNvPr id="4" name="TextBox 3"/>
+          <p:cNvSpPr txBox="1"/>
+          <p:nvPr/>
+        </p:nvSpPr>
+        <p:spPr>
+          <a:xfrm>
+            <a:off x="640080" y="868680"/>
+            <a:ext cx="10972800" cy="365760"/>
+          </a:xfrm>
+          <a:prstGeom prst="rect">
+            <a:avLst/>
+          </a:prstGeom>
+          <a:noFill/>
+        </p:spPr>
+        <p:txBody>
+          <a:bodyPr wrap="square" lIns="45720" rIns="45720" tIns="27432" bIns="27432" anchor="t">
+            <a:spAutoFit/>
+          </a:bodyPr>
+          <a:lstStyle/>
+          <a:p>
+            <a:pPr algn="l">
+              <a:lnSpc>
+                <a:spcPct val="110000"/>
+              </a:lnSpc>
+            </a:pPr>
+            <a:r>
+              <a:rPr sz="1300" b="0" i="0">
+                <a:solidFill>
+                  <a:srgbClr val="666666"/>
+                </a:solidFill>
+                <a:latin typeface="Arial"/>
+              </a:rPr>
+              <a:t>Estimate expenditure after access and fixture qualification; no universal cost per incident</a:t>
+            </a:r>
+          </a:p>
+        </p:txBody>
+      </p:sp>
+      <p:sp>
+        <p:nvSpPr>
+          <p:cNvPr id="5" name="TextBox 4"/>
+          <p:cNvSpPr txBox="1"/>
+          <p:nvPr/>
+        </p:nvSpPr>
+        <p:spPr>
+          <a:xfrm>
+            <a:off x="8503920" y="109728"/>
+            <a:ext cx="3200400" cy="274320"/>
+          </a:xfrm>
+          <a:prstGeom prst="rect">
+            <a:avLst/>
+          </a:prstGeom>
+          <a:noFill/>
+        </p:spPr>
+        <p:txBody>
+          <a:bodyPr wrap="square" lIns="45720" rIns="45720" tIns="27432" bIns="27432" anchor="t">
+            <a:spAutoFit/>
+          </a:bodyPr>
+          <a:lstStyle/>
+          <a:p>
+            <a:pPr algn="r">
+              <a:lnSpc>
+                <a:spcPct val="110000"/>
+              </a:lnSpc>
+            </a:pPr>
+            <a:r>
+              <a:rPr sz="900" b="1" i="0">
+                <a:solidFill>
+                  <a:srgbClr val="365E9E"/>
+                </a:solidFill>
+                <a:latin typeface="Arial"/>
+              </a:rPr>
+              <a:t>7 · REPLAY FEASIBILITY</a:t>
+            </a:r>
+          </a:p>
+        </p:txBody>
+      </p:sp>
+      <p:cxnSp>
+        <p:nvCxnSpPr>
+          <p:cNvPr id="6" name="Connector 5"/>
+          <p:cNvCxnSpPr/>
+          <p:nvPr/>
+        </p:nvCxnSpPr>
+        <p:spPr>
+          <a:xfrm>
+            <a:off x="457200" y="6446520"/>
+            <a:ext cx="11277295" cy="0"/>
+          </a:xfrm>
+          <a:prstGeom prst="line">
+            <a:avLst/>
+          </a:prstGeom>
+          <a:ln w="6350">
+            <a:solidFill>
+              <a:srgbClr val="C9C9C9"/>
+            </a:solidFill>
+          </a:ln>
+        </p:spPr>
+        <p:style>
+          <a:lnRef idx="2">
+            <a:schemeClr val="accent1"/>
+          </a:lnRef>
+          <a:fillRef idx="0">
+            <a:schemeClr val="accent1"/>
+          </a:fillRef>
+          <a:effectRef idx="1">
+            <a:schemeClr val="accent1"/>
+          </a:effectRef>
+          <a:fontRef idx="minor">
+            <a:schemeClr val="tx1"/>
+          </a:fontRef>
+        </p:style>
+      </p:cxnSp>
+      <p:sp>
+        <p:nvSpPr>
+          <p:cNvPr id="7" name="TextBox 6"/>
+          <p:cNvSpPr txBox="1"/>
+          <p:nvPr/>
+        </p:nvSpPr>
+        <p:spPr>
+          <a:xfrm>
+            <a:off x="457200" y="6473952"/>
+            <a:ext cx="10058400" cy="274320"/>
+          </a:xfrm>
+          <a:prstGeom prst="rect">
+            <a:avLst/>
+          </a:prstGeom>
+          <a:noFill/>
+        </p:spPr>
+        <p:txBody>
+          <a:bodyPr wrap="square" lIns="45720" rIns="45720" tIns="27432" bIns="27432" anchor="t">
+            <a:spAutoFit/>
+          </a:bodyPr>
+          <a:lstStyle/>
+          <a:p>
+            <a:pPr algn="l">
+              <a:lnSpc>
+                <a:spcPct val="110000"/>
+              </a:lnSpc>
+            </a:pPr>
+            <a:r>
+              <a:rPr sz="800" b="0" i="0">
+                <a:solidFill>
+                  <a:srgbClr val="666666"/>
+                </a:solidFill>
+                <a:latin typeface="Arial"/>
+              </a:rPr>
+              <a:t>Incident-aware optimization · design proposal · containment-extension · October 2026 · no benchmark improvement measured</a:t>
+            </a:r>
+          </a:p>
+        </p:txBody>
+      </p:sp>
+      <p:sp>
+        <p:nvSpPr>
+          <p:cNvPr id="8" name="TextBox 7"/>
+          <p:cNvSpPr txBox="1"/>
+          <p:nvPr/>
+        </p:nvSpPr>
+        <p:spPr>
+          <a:xfrm>
+            <a:off x="10820095" y="6473952"/>
+            <a:ext cx="914400" cy="274320"/>
+          </a:xfrm>
+          <a:prstGeom prst="rect">
+            <a:avLst/>
+          </a:prstGeom>
+          <a:noFill/>
+        </p:spPr>
+        <p:txBody>
+          <a:bodyPr wrap="square" lIns="45720" rIns="45720" tIns="27432" bIns="27432" anchor="t">
+            <a:spAutoFit/>
+          </a:bodyPr>
+          <a:lstStyle/>
+          <a:p>
+            <a:pPr algn="r">
+              <a:lnSpc>
+                <a:spcPct val="110000"/>
+              </a:lnSpc>
+            </a:pPr>
+            <a:r>
+              <a:rPr sz="900" b="0" i="0">
+                <a:solidFill>
+                  <a:srgbClr val="666666"/>
+                </a:solidFill>
+                <a:latin typeface="Arial"/>
+              </a:rPr>
+              <a:t>30</a:t>
+            </a:r>
+          </a:p>
+        </p:txBody>
+      </p:sp>
+      <p:graphicFrame>
+        <p:nvGraphicFramePr>
+          <p:cNvPr id="9" name="Table 8"/>
+          <p:cNvGraphicFramePr>
+            <a:graphicFrameLocks noGrp="1"/>
+          </p:cNvGraphicFramePr>
+          <p:nvPr/>
+        </p:nvGraphicFramePr>
+        <p:xfrm>
+          <a:off x="457200" y="1325880"/>
+          <a:ext cx="11277294" cy="3200400"/>
+        </p:xfrm>
+        <a:graphic>
+          <a:graphicData uri="http://schemas.openxmlformats.org/drawingml/2006/table">
+            <a:tbl>
+              <a:tblPr firstRow="1" bandRow="1">
+                <a:tableStyleId>{5C22544A-7EE6-4342-B048-85BDC9FD1C3A}</a:tableStyleId>
+              </a:tblPr>
+              <a:tblGrid>
+                <a:gridCol w="2606674"/>
+                <a:gridCol w="4344456"/>
+                <a:gridCol w="4326164"/>
+              </a:tblGrid>
+              <a:tr h="640080">
+                <a:tc>
+                  <a:txBody>
+                    <a:bodyPr wrap="square"/>
+                    <a:lstStyle/>
+                    <a:p>
+                      <a:pPr>
+                        <a:lnSpc>
+                          <a:spcPct val="105000"/>
+                        </a:lnSpc>
+                      </a:pPr>
+                      <a:r>
+                        <a:rPr sz="1450" b="1" i="0">
+                          <a:solidFill>
+                            <a:srgbClr val="FFFFFF"/>
+                          </a:solidFill>
+                          <a:latin typeface="Arial"/>
+                        </a:rPr>
+                        <a:t>Replay work</a:t>
+                      </a:r>
+                    </a:p>
+                  </a:txBody>
+                  <a:tcPr marL="54864" marR="54864" marT="27432" marB="27432">
+                    <a:solidFill>
+                      <a:srgbClr val="365E9E"/>
+                    </a:solidFill>
+                  </a:tcPr>
+                </a:tc>
+                <a:tc>
+                  <a:txBody>
+                    <a:bodyPr wrap="square"/>
+                    <a:lstStyle/>
+                    <a:p>
+                      <a:pPr>
+                        <a:lnSpc>
+                          <a:spcPct val="105000"/>
+                        </a:lnSpc>
+                      </a:pPr>
+                      <a:r>
+                        <a:rPr sz="1450" b="1" i="0">
+                          <a:solidFill>
+                            <a:srgbClr val="FFFFFF"/>
+                          </a:solidFill>
+                          <a:latin typeface="Arial"/>
+                        </a:rPr>
+                        <a:t>Main resource costs</a:t>
+                      </a:r>
+                    </a:p>
+                  </a:txBody>
+                  <a:tcPr marL="54864" marR="54864" marT="27432" marB="27432">
+                    <a:solidFill>
+                      <a:srgbClr val="365E9E"/>
+                    </a:solidFill>
+                  </a:tcPr>
+                </a:tc>
+                <a:tc>
+                  <a:txBody>
+                    <a:bodyPr wrap="square"/>
+                    <a:lstStyle/>
+                    <a:p>
+                      <a:pPr>
+                        <a:lnSpc>
+                          <a:spcPct val="105000"/>
+                        </a:lnSpc>
+                      </a:pPr>
+                      <a:r>
+                        <a:rPr sz="1450" b="1" i="0">
+                          <a:solidFill>
+                            <a:srgbClr val="FFFFFF"/>
+                          </a:solidFill>
+                          <a:latin typeface="Arial"/>
+                        </a:rPr>
+                        <a:t>Practical limit</a:t>
+                      </a:r>
+                    </a:p>
+                  </a:txBody>
+                  <a:tcPr marL="54864" marR="54864" marT="27432" marB="27432">
+                    <a:solidFill>
+                      <a:srgbClr val="365E9E"/>
+                    </a:solidFill>
+                  </a:tcPr>
+                </a:tc>
+              </a:tr>
+              <a:tr h="640080">
+                <a:tc>
+                  <a:txBody>
+                    <a:bodyPr wrap="square"/>
+                    <a:lstStyle/>
+                    <a:p>
+                      <a:pPr>
+                        <a:lnSpc>
+                          <a:spcPct val="105000"/>
+                        </a:lnSpc>
+                      </a:pPr>
+                      <a:r>
+                        <a:rPr sz="1450" b="1" i="0">
+                          <a:solidFill>
+                            <a:srgbClr val="111111"/>
+                          </a:solidFill>
+                          <a:latin typeface="Arial"/>
+                        </a:rPr>
+                        <a:t>Saved-trace scoring</a:t>
+                      </a:r>
+                    </a:p>
+                  </a:txBody>
+                  <a:tcPr marL="54864" marR="54864" marT="27432" marB="27432">
+                    <a:solidFill>
+                      <a:srgbClr val="FFFFFF"/>
+                    </a:solidFill>
+                  </a:tcPr>
+                </a:tc>
+                <a:tc>
+                  <a:txBody>
+                    <a:bodyPr wrap="square"/>
+                    <a:lstStyle/>
+                    <a:p>
+                      <a:pPr>
+                        <a:lnSpc>
+                          <a:spcPct val="105000"/>
+                        </a:lnSpc>
+                      </a:pPr>
+                      <a:r>
+                        <a:rPr sz="1450" b="0" i="0">
+                          <a:solidFill>
+                            <a:srgbClr val="111111"/>
+                          </a:solidFill>
+                          <a:latin typeface="Arial"/>
+                        </a:rPr>
+                        <a:t>Processing, storage and optional judge calls; no actor inference.</a:t>
+                      </a:r>
+                    </a:p>
+                  </a:txBody>
+                  <a:tcPr marL="54864" marR="54864" marT="27432" marB="27432">
+                    <a:solidFill>
+                      <a:srgbClr val="FFFFFF"/>
+                    </a:solidFill>
+                  </a:tcPr>
+                </a:tc>
+                <a:tc>
+                  <a:txBody>
+                    <a:bodyPr wrap="square"/>
+                    <a:lstStyle/>
+                    <a:p>
+                      <a:pPr>
+                        <a:lnSpc>
+                          <a:spcPct val="105000"/>
+                        </a:lnSpc>
+                      </a:pPr>
+                      <a:r>
+                        <a:rPr sz="1450" b="0" i="0">
+                          <a:solidFill>
+                            <a:srgbClr val="111111"/>
+                          </a:solidFill>
+                          <a:latin typeface="Arial"/>
+                        </a:rPr>
+                        <a:t>Adequate context and defensible labels must exist.</a:t>
+                      </a:r>
+                    </a:p>
+                  </a:txBody>
+                  <a:tcPr marL="54864" marR="54864" marT="27432" marB="27432">
+                    <a:solidFill>
+                      <a:srgbClr val="FFFFFF"/>
+                    </a:solidFill>
+                  </a:tcPr>
+                </a:tc>
+              </a:tr>
+              <a:tr h="640080">
+                <a:tc>
+                  <a:txBody>
+                    <a:bodyPr wrap="square"/>
+                    <a:lstStyle/>
+                    <a:p>
+                      <a:pPr>
+                        <a:lnSpc>
+                          <a:spcPct val="105000"/>
+                        </a:lnSpc>
+                      </a:pPr>
+                      <a:r>
+                        <a:rPr sz="1450" b="1" i="0">
+                          <a:solidFill>
+                            <a:srgbClr val="111111"/>
+                          </a:solidFill>
+                          <a:latin typeface="Arial"/>
+                        </a:rPr>
+                        <a:t>Agent continuation</a:t>
+                      </a:r>
+                    </a:p>
+                  </a:txBody>
+                  <a:tcPr marL="54864" marR="54864" marT="27432" marB="27432">
+                    <a:solidFill>
+                      <a:srgbClr val="F4F6FA"/>
+                    </a:solidFill>
+                  </a:tcPr>
+                </a:tc>
+                <a:tc>
+                  <a:txBody>
+                    <a:bodyPr wrap="square"/>
+                    <a:lstStyle/>
+                    <a:p>
+                      <a:pPr>
+                        <a:lnSpc>
+                          <a:spcPct val="105000"/>
+                        </a:lnSpc>
+                      </a:pPr>
+                      <a:r>
+                        <a:rPr sz="1450" b="0" i="0">
+                          <a:solidFill>
+                            <a:srgbClr val="111111"/>
+                          </a:solidFill>
+                          <a:latin typeface="Arial"/>
+                        </a:rPr>
+                        <a:t>Long histories, reasoning tokens, monitors, retries and API rate limits.</a:t>
+                      </a:r>
+                    </a:p>
+                  </a:txBody>
+                  <a:tcPr marL="54864" marR="54864" marT="27432" marB="27432">
+                    <a:solidFill>
+                      <a:srgbClr val="F4F6FA"/>
+                    </a:solidFill>
+                  </a:tcPr>
+                </a:tc>
+                <a:tc>
+                  <a:txBody>
+                    <a:bodyPr wrap="square"/>
+                    <a:lstStyle/>
+                    <a:p>
+                      <a:pPr>
+                        <a:lnSpc>
+                          <a:spcPct val="105000"/>
+                        </a:lnSpc>
+                      </a:pPr>
+                      <a:r>
+                        <a:rPr sz="1450" b="0" i="0">
+                          <a:solidFill>
+                            <a:srgbClr val="111111"/>
+                          </a:solidFill>
+                          <a:latin typeface="Arial"/>
+                        </a:rPr>
+                        <a:t>Meter tokens and wall time on a qualified fixture first.</a:t>
+                      </a:r>
+                    </a:p>
+                  </a:txBody>
+                  <a:tcPr marL="54864" marR="54864" marT="27432" marB="27432">
+                    <a:solidFill>
+                      <a:srgbClr val="F4F6FA"/>
+                    </a:solidFill>
+                  </a:tcPr>
+                </a:tc>
+              </a:tr>
+              <a:tr h="640080">
+                <a:tc>
+                  <a:txBody>
+                    <a:bodyPr wrap="square"/>
+                    <a:lstStyle/>
+                    <a:p>
+                      <a:pPr>
+                        <a:lnSpc>
+                          <a:spcPct val="105000"/>
+                        </a:lnSpc>
+                      </a:pPr>
+                      <a:r>
+                        <a:rPr sz="1450" b="1" i="0">
+                          <a:solidFill>
+                            <a:srgbClr val="111111"/>
+                          </a:solidFill>
+                          <a:latin typeface="Arial"/>
+                        </a:rPr>
+                        <a:t>Open-weight replay</a:t>
+                      </a:r>
+                    </a:p>
+                  </a:txBody>
+                  <a:tcPr marL="54864" marR="54864" marT="27432" marB="27432">
+                    <a:solidFill>
+                      <a:srgbClr val="FFFFFF"/>
+                    </a:solidFill>
+                  </a:tcPr>
+                </a:tc>
+                <a:tc>
+                  <a:txBody>
+                    <a:bodyPr wrap="square"/>
+                    <a:lstStyle/>
+                    <a:p>
+                      <a:pPr>
+                        <a:lnSpc>
+                          <a:spcPct val="105000"/>
+                        </a:lnSpc>
+                      </a:pPr>
+                      <a:r>
+                        <a:rPr sz="1450" b="0" i="0">
+                          <a:solidFill>
+                            <a:srgbClr val="111111"/>
+                          </a:solidFill>
+                          <a:latin typeface="Arial"/>
+                        </a:rPr>
+                        <a:t>GPU memory / throughput, context length, environment reset and storage.</a:t>
+                      </a:r>
+                    </a:p>
+                  </a:txBody>
+                  <a:tcPr marL="54864" marR="54864" marT="27432" marB="27432">
+                    <a:solidFill>
+                      <a:srgbClr val="FFFFFF"/>
+                    </a:solidFill>
+                  </a:tcPr>
+                </a:tc>
+                <a:tc>
+                  <a:txBody>
+                    <a:bodyPr wrap="square"/>
+                    <a:lstStyle/>
+                    <a:p>
+                      <a:pPr>
+                        <a:lnSpc>
+                          <a:spcPct val="105000"/>
+                        </a:lnSpc>
+                      </a:pPr>
+                      <a:r>
+                        <a:rPr sz="1450" b="0" i="0">
+                          <a:solidFill>
+                            <a:srgbClr val="111111"/>
+                          </a:solidFill>
+                          <a:latin typeface="Arial"/>
+                        </a:rPr>
+                        <a:t>Measure the chosen checkpoint; a smaller replacement changes capability.</a:t>
+                      </a:r>
+                    </a:p>
+                  </a:txBody>
+                  <a:tcPr marL="54864" marR="54864" marT="27432" marB="27432">
+                    <a:solidFill>
+                      <a:srgbClr val="FFFFFF"/>
+                    </a:solidFill>
+                  </a:tcPr>
+                </a:tc>
+              </a:tr>
+              <a:tr h="640080">
+                <a:tc>
+                  <a:txBody>
+                    <a:bodyPr wrap="square"/>
+                    <a:lstStyle/>
+                    <a:p>
+                      <a:pPr>
+                        <a:lnSpc>
+                          <a:spcPct val="105000"/>
+                        </a:lnSpc>
+                      </a:pPr>
+                      <a:r>
+                        <a:rPr sz="1450" b="1" i="0">
+                          <a:solidFill>
+                            <a:srgbClr val="111111"/>
+                          </a:solidFill>
+                          <a:latin typeface="Arial"/>
+                        </a:rPr>
+                        <a:t>Training-stage replication</a:t>
+                      </a:r>
+                    </a:p>
+                  </a:txBody>
+                  <a:tcPr marL="54864" marR="54864" marT="27432" marB="27432">
+                    <a:solidFill>
+                      <a:srgbClr val="F4F6FA"/>
+                    </a:solidFill>
+                  </a:tcPr>
+                </a:tc>
+                <a:tc>
+                  <a:txBody>
+                    <a:bodyPr wrap="square"/>
+                    <a:lstStyle/>
+                    <a:p>
+                      <a:pPr>
+                        <a:lnSpc>
+                          <a:spcPct val="105000"/>
+                        </a:lnSpc>
+                      </a:pPr>
+                      <a:r>
+                        <a:rPr sz="1450" b="0" i="0">
+                          <a:solidFill>
+                            <a:srgbClr val="111111"/>
+                          </a:solidFill>
+                          <a:latin typeface="Arial"/>
+                        </a:rPr>
+                        <a:t>RL rollout generation, optimization and repeated training runs.</a:t>
+                      </a:r>
+                    </a:p>
+                  </a:txBody>
+                  <a:tcPr marL="54864" marR="54864" marT="27432" marB="27432">
+                    <a:solidFill>
+                      <a:srgbClr val="F4F6FA"/>
+                    </a:solidFill>
+                  </a:tcPr>
+                </a:tc>
+                <a:tc>
+                  <a:txBody>
+                    <a:bodyPr wrap="square"/>
+                    <a:lstStyle/>
+                    <a:p>
+                      <a:pPr>
+                        <a:lnSpc>
+                          <a:spcPct val="105000"/>
+                        </a:lnSpc>
+                      </a:pPr>
+                      <a:r>
+                        <a:rPr sz="1450" b="0" i="0">
+                          <a:solidFill>
+                            <a:srgbClr val="111111"/>
+                          </a:solidFill>
+                          <a:latin typeface="Arial"/>
+                        </a:rPr>
+                        <a:t>Obtain weights, reward code and training setup before pricing GPU hours.</a:t>
+                      </a:r>
+                    </a:p>
+                  </a:txBody>
+                  <a:tcPr marL="54864" marR="54864" marT="27432" marB="27432">
+                    <a:solidFill>
+                      <a:srgbClr val="F4F6FA"/>
+                    </a:solidFill>
+                  </a:tcPr>
+                </a:tc>
+              </a:tr>
+            </a:tbl>
+          </a:graphicData>
+        </a:graphic>
+      </p:graphicFrame>
+      <p:sp>
+        <p:nvSpPr>
+          <p:cNvPr id="10" name="TextBox 9"/>
+          <p:cNvSpPr txBox="1"/>
+          <p:nvPr/>
+        </p:nvSpPr>
+        <p:spPr>
+          <a:xfrm>
+            <a:off x="457200" y="4709160"/>
+            <a:ext cx="11277295" cy="493776"/>
+          </a:xfrm>
+          <a:prstGeom prst="rect">
+            <a:avLst/>
+          </a:prstGeom>
+          <a:noFill/>
+        </p:spPr>
+        <p:txBody>
+          <a:bodyPr wrap="square" lIns="45720" rIns="45720" tIns="27432" bIns="27432" anchor="t">
+            <a:spAutoFit/>
+          </a:bodyPr>
+          <a:lstStyle/>
+          <a:p>
+            <a:pPr algn="l">
+              <a:lnSpc>
+                <a:spcPct val="110000"/>
+              </a:lnSpc>
+            </a:pPr>
+            <a:r>
+              <a:rPr sz="1450" b="0" i="0">
+                <a:solidFill>
+                  <a:srgbClr val="666666"/>
+                </a:solidFill>
+                <a:latin typeface="Arial"/>
+              </a:rPr>
+              <a:t>Work scales with cases × variants × policies × repeats × rounds, plus rebuilding, label review and failed attempts.</a:t>
+            </a:r>
+          </a:p>
+        </p:txBody>
+      </p:sp>
+      <p:sp>
+        <p:nvSpPr>
+          <p:cNvPr id="11" name="Rounded Rectangle 10"/>
+          <p:cNvSpPr/>
+          <p:nvPr/>
+        </p:nvSpPr>
+        <p:spPr>
+          <a:xfrm>
+            <a:off x="457200" y="5468112"/>
+            <a:ext cx="11277295" cy="777240"/>
+          </a:xfrm>
+          <a:prstGeom prst="roundRect">
+            <a:avLst>
+              <a:gd name="adj" fmla="val 6000"/>
+            </a:avLst>
+          </a:prstGeom>
+          <a:solidFill>
+            <a:srgbClr val="FFF2CC"/>
+          </a:solidFill>
+          <a:ln>
+            <a:noFill/>
+          </a:ln>
+          <a:effectLst/>
+        </p:spPr>
+        <p:style>
+          <a:lnRef idx="1">
+            <a:schemeClr val="accent1"/>
+          </a:lnRef>
+          <a:fillRef idx="3">
+            <a:schemeClr val="accent1"/>
+          </a:fillRef>
+          <a:effectRef idx="2">
+            <a:schemeClr val="accent1"/>
+          </a:effectRef>
+          <a:fontRef idx="minor">
+            <a:schemeClr val="lt1"/>
+          </a:fontRef>
+        </p:style>
+        <p:txBody>
+          <a:bodyPr rtlCol="0" anchor="ctr"/>
+          <a:lstStyle/>
+          <a:p/>
+        </p:txBody>
+      </p:sp>
+      <p:sp>
+        <p:nvSpPr>
+          <p:cNvPr id="12" name="TextBox 11"/>
+          <p:cNvSpPr txBox="1"/>
+          <p:nvPr/>
+        </p:nvSpPr>
+        <p:spPr>
+          <a:xfrm>
+            <a:off x="685800" y="5541264"/>
+            <a:ext cx="10820095" cy="630936"/>
+          </a:xfrm>
+          <a:prstGeom prst="rect">
+            <a:avLst/>
+          </a:prstGeom>
+          <a:noFill/>
+        </p:spPr>
+        <p:txBody>
+          <a:bodyPr wrap="square" lIns="45720" rIns="45720" tIns="27432" bIns="27432" anchor="ctr">
+            <a:spAutoFit/>
+          </a:bodyPr>
+          <a:lstStyle/>
+          <a:p>
+            <a:pPr algn="l">
+              <a:lnSpc>
+                <a:spcPct val="115000"/>
+              </a:lnSpc>
+            </a:pPr>
+            <a:r>
+              <a:rPr sz="1500" b="0" i="0">
+                <a:solidFill>
+                  <a:srgbClr val="111111"/>
+                </a:solidFill>
+                <a:latin typeface="Arial"/>
+              </a:rPr>
+              <a:t>Rare-event example: at p = 0.1%, 2,995 independent trials give a 95% chance of seeing at least one event. Comparing policies requires a separate power analysis.</a:t>
+            </a:r>
+          </a:p>
+        </p:txBody>
+      </p:sp>
+    </p:spTree>
+  </p:cSld>
+  <p:clrMapOvr>
+    <a:masterClrMapping/>
+  </p:clrMapOvr>
+</p:sld>
+</file>
+
+<file path=ppt/slides/slide31.xml><?xml version="1.0" encoding="utf-8"?>
+<p:sld xmlns:a="http://schemas.openxmlformats.org/drawingml/2006/main" xmlns:p="http://schemas.openxmlformats.org/presentationml/2006/main" xmlns:r="http://schemas.openxmlformats.org/officeDocument/2006/relationships">
+  <p:cSld>
+    <p:spTree>
+      <p:nvGrpSpPr>
+        <p:cNvPr id="1" name=""/>
+        <p:cNvGrpSpPr/>
+        <p:nvPr/>
+      </p:nvGrpSpPr>
+      <p:grpSpPr/>
+      <p:sp>
+        <p:nvSpPr>
+          <p:cNvPr id="2" name="Rectangle 1"/>
+          <p:cNvSpPr/>
+          <p:nvPr/>
+        </p:nvSpPr>
+        <p:spPr>
+          <a:xfrm>
+            <a:off x="457200" y="384048"/>
+            <a:ext cx="82296" cy="566928"/>
+          </a:xfrm>
+          <a:prstGeom prst="rect">
+            <a:avLst/>
+          </a:prstGeom>
+          <a:solidFill>
+            <a:srgbClr val="365E9E"/>
+          </a:solidFill>
+          <a:ln>
+            <a:noFill/>
+          </a:ln>
+          <a:effectLst/>
+        </p:spPr>
+        <p:style>
+          <a:lnRef idx="1">
+            <a:schemeClr val="accent1"/>
+          </a:lnRef>
+          <a:fillRef idx="3">
+            <a:schemeClr val="accent1"/>
+          </a:fillRef>
+          <a:effectRef idx="2">
+            <a:schemeClr val="accent1"/>
+          </a:effectRef>
+          <a:fontRef idx="minor">
+            <a:schemeClr val="lt1"/>
+          </a:fontRef>
+        </p:style>
+        <p:txBody>
+          <a:bodyPr rtlCol="0" anchor="ctr"/>
+          <a:lstStyle/>
+          <a:p/>
+        </p:txBody>
+      </p:sp>
+      <p:sp>
+        <p:nvSpPr>
+          <p:cNvPr id="3" name="TextBox 2"/>
+          <p:cNvSpPr txBox="1"/>
+          <p:nvPr/>
+        </p:nvSpPr>
+        <p:spPr>
+          <a:xfrm>
+            <a:off x="640080" y="301752"/>
+            <a:ext cx="10515600" cy="548640"/>
+          </a:xfrm>
+          <a:prstGeom prst="rect">
+            <a:avLst/>
+          </a:prstGeom>
+          <a:noFill/>
+        </p:spPr>
+        <p:txBody>
+          <a:bodyPr wrap="square" lIns="45720" rIns="45720" tIns="27432" bIns="27432" anchor="ctr">
+            <a:spAutoFit/>
+          </a:bodyPr>
+          <a:lstStyle/>
+          <a:p>
+            <a:pPr algn="l">
+              <a:lnSpc>
+                <a:spcPct val="110000"/>
+              </a:lnSpc>
+            </a:pPr>
+            <a:r>
+              <a:rPr sz="2300" b="1" i="0">
+                <a:solidFill>
+                  <a:srgbClr val="111111"/>
+                </a:solidFill>
+                <a:latin typeface="Arial"/>
+              </a:rPr>
+              <a:t>When full replay is blocked, test the key mechanism</a:t>
+            </a:r>
+          </a:p>
+        </p:txBody>
+      </p:sp>
+      <p:sp>
+        <p:nvSpPr>
+          <p:cNvPr id="4" name="TextBox 3"/>
+          <p:cNvSpPr txBox="1"/>
+          <p:nvPr/>
+        </p:nvSpPr>
+        <p:spPr>
+          <a:xfrm>
+            <a:off x="640080" y="868680"/>
+            <a:ext cx="10972800" cy="365760"/>
+          </a:xfrm>
+          <a:prstGeom prst="rect">
+            <a:avLst/>
+          </a:prstGeom>
+          <a:noFill/>
+        </p:spPr>
+        <p:txBody>
+          <a:bodyPr wrap="square" lIns="45720" rIns="45720" tIns="27432" bIns="27432" anchor="t">
+            <a:spAutoFit/>
+          </a:bodyPr>
+          <a:lstStyle/>
+          <a:p>
+            <a:pPr algn="l">
+              <a:lnSpc>
+                <a:spcPct val="110000"/>
+              </a:lnSpc>
+            </a:pPr>
+            <a:r>
+              <a:rPr sz="1300" b="0" i="0">
+                <a:solidFill>
+                  <a:srgbClr val="666666"/>
+                </a:solidFill>
+                <a:latin typeface="Arial"/>
+              </a:rPr>
+              <a:t>Example: reconstruct a test-harness bypass in a controlled coding environment</a:t>
+            </a:r>
+          </a:p>
+        </p:txBody>
+      </p:sp>
+      <p:sp>
+        <p:nvSpPr>
+          <p:cNvPr id="5" name="TextBox 4"/>
+          <p:cNvSpPr txBox="1"/>
+          <p:nvPr/>
+        </p:nvSpPr>
+        <p:spPr>
+          <a:xfrm>
+            <a:off x="8503920" y="109728"/>
+            <a:ext cx="3200400" cy="274320"/>
+          </a:xfrm>
+          <a:prstGeom prst="rect">
+            <a:avLst/>
+          </a:prstGeom>
+          <a:noFill/>
+        </p:spPr>
+        <p:txBody>
+          <a:bodyPr wrap="square" lIns="45720" rIns="45720" tIns="27432" bIns="27432" anchor="t">
+            <a:spAutoFit/>
+          </a:bodyPr>
+          <a:lstStyle/>
+          <a:p>
+            <a:pPr algn="r">
+              <a:lnSpc>
+                <a:spcPct val="110000"/>
+              </a:lnSpc>
+            </a:pPr>
+            <a:r>
+              <a:rPr sz="900" b="1" i="0">
+                <a:solidFill>
+                  <a:srgbClr val="365E9E"/>
+                </a:solidFill>
+                <a:latin typeface="Arial"/>
+              </a:rPr>
+              <a:t>7 · REPLAY FEASIBILITY</a:t>
+            </a:r>
+          </a:p>
+        </p:txBody>
+      </p:sp>
+      <p:cxnSp>
+        <p:nvCxnSpPr>
+          <p:cNvPr id="6" name="Connector 5"/>
+          <p:cNvCxnSpPr/>
+          <p:nvPr/>
+        </p:nvCxnSpPr>
+        <p:spPr>
+          <a:xfrm>
+            <a:off x="457200" y="6446520"/>
+            <a:ext cx="11277295" cy="0"/>
+          </a:xfrm>
+          <a:prstGeom prst="line">
+            <a:avLst/>
+          </a:prstGeom>
+          <a:ln w="6350">
+            <a:solidFill>
+              <a:srgbClr val="C9C9C9"/>
+            </a:solidFill>
+          </a:ln>
+        </p:spPr>
+        <p:style>
+          <a:lnRef idx="2">
+            <a:schemeClr val="accent1"/>
+          </a:lnRef>
+          <a:fillRef idx="0">
+            <a:schemeClr val="accent1"/>
+          </a:fillRef>
+          <a:effectRef idx="1">
+            <a:schemeClr val="accent1"/>
+          </a:effectRef>
+          <a:fontRef idx="minor">
+            <a:schemeClr val="tx1"/>
+          </a:fontRef>
+        </p:style>
+      </p:cxnSp>
+      <p:sp>
+        <p:nvSpPr>
+          <p:cNvPr id="7" name="TextBox 6"/>
+          <p:cNvSpPr txBox="1"/>
+          <p:nvPr/>
+        </p:nvSpPr>
+        <p:spPr>
+          <a:xfrm>
+            <a:off x="457200" y="6473952"/>
+            <a:ext cx="10058400" cy="274320"/>
+          </a:xfrm>
+          <a:prstGeom prst="rect">
+            <a:avLst/>
+          </a:prstGeom>
+          <a:noFill/>
+        </p:spPr>
+        <p:txBody>
+          <a:bodyPr wrap="square" lIns="45720" rIns="45720" tIns="27432" bIns="27432" anchor="t">
+            <a:spAutoFit/>
+          </a:bodyPr>
+          <a:lstStyle/>
+          <a:p>
+            <a:pPr algn="l">
+              <a:lnSpc>
+                <a:spcPct val="110000"/>
+              </a:lnSpc>
+            </a:pPr>
+            <a:r>
+              <a:rPr sz="800" b="0" i="0">
+                <a:solidFill>
+                  <a:srgbClr val="666666"/>
+                </a:solidFill>
+                <a:latin typeface="Arial"/>
+              </a:rPr>
+              <a:t>Incident-aware optimization · design proposal · containment-extension · October 2026 · no benchmark improvement measured</a:t>
+            </a:r>
+          </a:p>
+        </p:txBody>
+      </p:sp>
+      <p:sp>
+        <p:nvSpPr>
+          <p:cNvPr id="8" name="TextBox 7"/>
+          <p:cNvSpPr txBox="1"/>
+          <p:nvPr/>
+        </p:nvSpPr>
+        <p:spPr>
+          <a:xfrm>
+            <a:off x="10820095" y="6473952"/>
+            <a:ext cx="914400" cy="274320"/>
+          </a:xfrm>
+          <a:prstGeom prst="rect">
+            <a:avLst/>
+          </a:prstGeom>
+          <a:noFill/>
+        </p:spPr>
+        <p:txBody>
+          <a:bodyPr wrap="square" lIns="45720" rIns="45720" tIns="27432" bIns="27432" anchor="t">
+            <a:spAutoFit/>
+          </a:bodyPr>
+          <a:lstStyle/>
+          <a:p>
+            <a:pPr algn="r">
+              <a:lnSpc>
+                <a:spcPct val="110000"/>
+              </a:lnSpc>
+            </a:pPr>
+            <a:r>
+              <a:rPr sz="900" b="0" i="0">
+                <a:solidFill>
+                  <a:srgbClr val="666666"/>
+                </a:solidFill>
+                <a:latin typeface="Arial"/>
+              </a:rPr>
+              <a:t>31</a:t>
+            </a:r>
+          </a:p>
+        </p:txBody>
+      </p:sp>
+      <p:sp>
+        <p:nvSpPr>
+          <p:cNvPr id="9" name="Rounded Rectangle 8"/>
+          <p:cNvSpPr/>
+          <p:nvPr/>
+        </p:nvSpPr>
+        <p:spPr>
+          <a:xfrm>
+            <a:off x="457200" y="1325880"/>
+            <a:ext cx="3657600" cy="3429000"/>
+          </a:xfrm>
+          <a:prstGeom prst="roundRect">
+            <a:avLst>
+              <a:gd name="adj" fmla="val 6000"/>
+            </a:avLst>
+          </a:prstGeom>
+          <a:solidFill>
+            <a:srgbClr val="EDF4FB"/>
+          </a:solidFill>
+          <a:ln w="12700">
+            <a:solidFill>
+              <a:srgbClr val="365E9E"/>
+            </a:solidFill>
+          </a:ln>
+          <a:effectLst/>
+        </p:spPr>
+        <p:style>
+          <a:lnRef idx="1">
+            <a:schemeClr val="accent1"/>
+          </a:lnRef>
+          <a:fillRef idx="3">
+            <a:schemeClr val="accent1"/>
+          </a:fillRef>
+          <a:effectRef idx="2">
+            <a:schemeClr val="accent1"/>
+          </a:effectRef>
+          <a:fontRef idx="minor">
+            <a:schemeClr val="lt1"/>
+          </a:fontRef>
+        </p:style>
+        <p:txBody>
+          <a:bodyPr rtlCol="0" anchor="ctr"/>
+          <a:lstStyle/>
+          <a:p/>
+        </p:txBody>
+      </p:sp>
+      <p:sp>
+        <p:nvSpPr>
+          <p:cNvPr id="10" name="TextBox 9"/>
+          <p:cNvSpPr txBox="1"/>
+          <p:nvPr/>
+        </p:nvSpPr>
+        <p:spPr>
+          <a:xfrm>
+            <a:off x="566928" y="1399032"/>
+            <a:ext cx="3456432" cy="365760"/>
+          </a:xfrm>
+          <a:prstGeom prst="rect">
+            <a:avLst/>
+          </a:prstGeom>
+          <a:noFill/>
+        </p:spPr>
+        <p:txBody>
+          <a:bodyPr wrap="square" lIns="45720" rIns="45720" tIns="27432" bIns="27432" anchor="t">
+            <a:spAutoFit/>
+          </a:bodyPr>
+          <a:lstStyle/>
+          <a:p>
+            <a:pPr algn="l">
+              <a:lnSpc>
+                <a:spcPct val="110000"/>
+              </a:lnSpc>
+            </a:pPr>
+            <a:r>
+              <a:rPr sz="1600" b="1" i="0">
+                <a:solidFill>
+                  <a:srgbClr val="365E9E"/>
+                </a:solidFill>
+                <a:latin typeface="Arial"/>
+              </a:rPr>
+              <a:t>Preserve the causal ingredients</a:t>
+            </a:r>
+          </a:p>
+        </p:txBody>
+      </p:sp>
+      <p:sp>
+        <p:nvSpPr>
+          <p:cNvPr id="11" name="TextBox 10"/>
+          <p:cNvSpPr txBox="1"/>
+          <p:nvPr/>
+        </p:nvSpPr>
+        <p:spPr>
+          <a:xfrm>
+            <a:off x="530352" y="1764792"/>
+            <a:ext cx="3511296" cy="2926080"/>
+          </a:xfrm>
+          <a:prstGeom prst="rect">
+            <a:avLst/>
+          </a:prstGeom>
+          <a:noFill/>
+        </p:spPr>
+        <p:txBody>
+          <a:bodyPr wrap="square" lIns="45720" rIns="45720">
+            <a:spAutoFit/>
+          </a:bodyPr>
+          <a:lstStyle/>
+          <a:p>
+            <a:pPr>
+              <a:lnSpc>
+                <a:spcPct val="108000"/>
+              </a:lnSpc>
+              <a:spcAft>
+                <a:spcPts val="200"/>
+              </a:spcAft>
+            </a:pPr>
+            <a:r>
+              <a:rPr sz="1500" b="0" i="0">
+                <a:solidFill>
+                  <a:srgbClr val="111111"/>
+                </a:solidFill>
+                <a:latin typeface="Arial"/>
+              </a:rPr>
+              <a:t>•  A legitimate coding task and an incentive to pass its tests</a:t>
+            </a:r>
+          </a:p>
+          <a:p>
+            <a:pPr>
+              <a:lnSpc>
+                <a:spcPct val="108000"/>
+              </a:lnSpc>
+              <a:spcAft>
+                <a:spcPts val="200"/>
+              </a:spcAft>
+            </a:pPr>
+            <a:r>
+              <a:rPr sz="1500" b="0" i="0">
+                <a:solidFill>
+                  <a:srgbClr val="111111"/>
+                </a:solidFill>
+                <a:latin typeface="Arial"/>
+              </a:rPr>
+              <a:t>•  A specific opportunity to tamper with testing or exploit weak checks</a:t>
+            </a:r>
+          </a:p>
+          <a:p>
+            <a:pPr>
+              <a:lnSpc>
+                <a:spcPct val="108000"/>
+              </a:lnSpc>
+              <a:spcAft>
+                <a:spcPts val="200"/>
+              </a:spcAft>
+            </a:pPr>
+            <a:r>
+              <a:rPr sz="1500" b="0" i="0">
+                <a:solidFill>
+                  <a:srgbClr val="111111"/>
+                </a:solidFill>
+                <a:latin typeface="Arial"/>
+              </a:rPr>
+              <a:t>•  An independent observer of what actually ran and changed</a:t>
+            </a:r>
+          </a:p>
+        </p:txBody>
+      </p:sp>
+      <p:sp>
+        <p:nvSpPr>
+          <p:cNvPr id="12" name="Rounded Rectangle 11"/>
+          <p:cNvSpPr/>
+          <p:nvPr/>
+        </p:nvSpPr>
+        <p:spPr>
+          <a:xfrm>
+            <a:off x="4270248" y="1325880"/>
+            <a:ext cx="3657600" cy="3429000"/>
+          </a:xfrm>
+          <a:prstGeom prst="roundRect">
+            <a:avLst>
+              <a:gd name="adj" fmla="val 6000"/>
+            </a:avLst>
+          </a:prstGeom>
+          <a:solidFill>
+            <a:srgbClr val="FDF3E7"/>
+          </a:solidFill>
+          <a:ln w="12700">
+            <a:solidFill>
+              <a:srgbClr val="B8732A"/>
+            </a:solidFill>
+          </a:ln>
+          <a:effectLst/>
+        </p:spPr>
+        <p:style>
+          <a:lnRef idx="1">
+            <a:schemeClr val="accent1"/>
+          </a:lnRef>
+          <a:fillRef idx="3">
+            <a:schemeClr val="accent1"/>
+          </a:fillRef>
+          <a:effectRef idx="2">
+            <a:schemeClr val="accent1"/>
+          </a:effectRef>
+          <a:fontRef idx="minor">
+            <a:schemeClr val="lt1"/>
+          </a:fontRef>
+        </p:style>
+        <p:txBody>
+          <a:bodyPr rtlCol="0" anchor="ctr"/>
+          <a:lstStyle/>
+          <a:p/>
+        </p:txBody>
+      </p:sp>
+      <p:sp>
+        <p:nvSpPr>
+          <p:cNvPr id="13" name="TextBox 12"/>
+          <p:cNvSpPr txBox="1"/>
+          <p:nvPr/>
+        </p:nvSpPr>
+        <p:spPr>
+          <a:xfrm>
+            <a:off x="4379976" y="1399032"/>
+            <a:ext cx="3456432" cy="365760"/>
+          </a:xfrm>
+          <a:prstGeom prst="rect">
+            <a:avLst/>
+          </a:prstGeom>
+          <a:noFill/>
+        </p:spPr>
+        <p:txBody>
+          <a:bodyPr wrap="square" lIns="45720" rIns="45720" tIns="27432" bIns="27432" anchor="t">
+            <a:spAutoFit/>
+          </a:bodyPr>
+          <a:lstStyle/>
+          <a:p>
+            <a:pPr algn="l">
+              <a:lnSpc>
+                <a:spcPct val="110000"/>
+              </a:lnSpc>
+            </a:pPr>
+            <a:r>
+              <a:rPr sz="1600" b="1" i="0">
+                <a:solidFill>
+                  <a:srgbClr val="B8732A"/>
+                </a:solidFill>
+                <a:latin typeface="Arial"/>
+              </a:rPr>
+              <a:t>Declare what was simplified</a:t>
+            </a:r>
+          </a:p>
+        </p:txBody>
+      </p:sp>
+      <p:sp>
+        <p:nvSpPr>
+          <p:cNvPr id="14" name="TextBox 13"/>
+          <p:cNvSpPr txBox="1"/>
+          <p:nvPr/>
+        </p:nvSpPr>
+        <p:spPr>
+          <a:xfrm>
+            <a:off x="4343400" y="1764792"/>
+            <a:ext cx="3511296" cy="2926080"/>
+          </a:xfrm>
+          <a:prstGeom prst="rect">
+            <a:avLst/>
+          </a:prstGeom>
+          <a:noFill/>
+        </p:spPr>
+        <p:txBody>
+          <a:bodyPr wrap="square" lIns="45720" rIns="45720">
+            <a:spAutoFit/>
+          </a:bodyPr>
+          <a:lstStyle/>
+          <a:p>
+            <a:pPr>
+              <a:lnSpc>
+                <a:spcPct val="108000"/>
+              </a:lnSpc>
+              <a:spcAft>
+                <a:spcPts val="200"/>
+              </a:spcAft>
+            </a:pPr>
+            <a:r>
+              <a:rPr sz="1500" b="0" i="0">
+                <a:solidFill>
+                  <a:srgbClr val="111111"/>
+                </a:solidFill>
+                <a:latin typeface="Arial"/>
+              </a:rPr>
+              <a:t>•  Use a small repository, local tools and an accessible model</a:t>
+            </a:r>
+          </a:p>
+          <a:p>
+            <a:pPr>
+              <a:lnSpc>
+                <a:spcPct val="108000"/>
+              </a:lnSpc>
+              <a:spcAft>
+                <a:spcPts val="200"/>
+              </a:spcAft>
+            </a:pPr>
+            <a:r>
+              <a:rPr sz="1500" b="0" i="0">
+                <a:solidFill>
+                  <a:srgbClr val="111111"/>
+                </a:solidFill>
+                <a:latin typeface="Arial"/>
+              </a:rPr>
+              <a:t>•  Record differences in prompts, permissions, grader and checkpoint</a:t>
+            </a:r>
+          </a:p>
+          <a:p>
+            <a:pPr>
+              <a:lnSpc>
+                <a:spcPct val="108000"/>
+              </a:lnSpc>
+              <a:spcAft>
+                <a:spcPts val="200"/>
+              </a:spcAft>
+            </a:pPr>
+            <a:r>
+              <a:rPr sz="1500" b="0" i="0">
+                <a:solidFill>
+                  <a:srgbClr val="111111"/>
+                </a:solidFill>
+                <a:latin typeface="Arial"/>
+              </a:rPr>
+              <a:t>•  Mark actions as model-generated, attack-instructed or scripted</a:t>
+            </a:r>
+          </a:p>
+        </p:txBody>
+      </p:sp>
+      <p:sp>
+        <p:nvSpPr>
+          <p:cNvPr id="15" name="Rounded Rectangle 14"/>
+          <p:cNvSpPr/>
+          <p:nvPr/>
+        </p:nvSpPr>
+        <p:spPr>
+          <a:xfrm>
+            <a:off x="8074152" y="1325880"/>
+            <a:ext cx="3657600" cy="3429000"/>
+          </a:xfrm>
+          <a:prstGeom prst="roundRect">
+            <a:avLst>
+              <a:gd name="adj" fmla="val 6000"/>
+            </a:avLst>
+          </a:prstGeom>
+          <a:solidFill>
+            <a:srgbClr val="EAF5EF"/>
+          </a:solidFill>
+          <a:ln w="12700">
+            <a:solidFill>
+              <a:srgbClr val="2E7D5B"/>
+            </a:solidFill>
+          </a:ln>
+          <a:effectLst/>
+        </p:spPr>
+        <p:style>
+          <a:lnRef idx="1">
+            <a:schemeClr val="accent1"/>
+          </a:lnRef>
+          <a:fillRef idx="3">
+            <a:schemeClr val="accent1"/>
+          </a:fillRef>
+          <a:effectRef idx="2">
+            <a:schemeClr val="accent1"/>
+          </a:effectRef>
+          <a:fontRef idx="minor">
+            <a:schemeClr val="lt1"/>
+          </a:fontRef>
+        </p:style>
+        <p:txBody>
+          <a:bodyPr rtlCol="0" anchor="ctr"/>
+          <a:lstStyle/>
+          <a:p/>
+        </p:txBody>
+      </p:sp>
+      <p:sp>
+        <p:nvSpPr>
+          <p:cNvPr id="16" name="TextBox 15"/>
+          <p:cNvSpPr txBox="1"/>
+          <p:nvPr/>
+        </p:nvSpPr>
+        <p:spPr>
+          <a:xfrm>
+            <a:off x="8183880" y="1399032"/>
+            <a:ext cx="3456432" cy="365760"/>
+          </a:xfrm>
+          <a:prstGeom prst="rect">
+            <a:avLst/>
+          </a:prstGeom>
+          <a:noFill/>
+        </p:spPr>
+        <p:txBody>
+          <a:bodyPr wrap="square" lIns="45720" rIns="45720" tIns="27432" bIns="27432" anchor="t">
+            <a:spAutoFit/>
+          </a:bodyPr>
+          <a:lstStyle/>
+          <a:p>
+            <a:pPr algn="l">
+              <a:lnSpc>
+                <a:spcPct val="110000"/>
+              </a:lnSpc>
+            </a:pPr>
+            <a:r>
+              <a:rPr sz="1600" b="1" i="0">
+                <a:solidFill>
+                  <a:srgbClr val="2E7D5B"/>
+                </a:solidFill>
+                <a:latin typeface="Arial"/>
+              </a:rPr>
+              <a:t>Test the proposed explanation</a:t>
+            </a:r>
+          </a:p>
+        </p:txBody>
+      </p:sp>
+      <p:sp>
+        <p:nvSpPr>
+          <p:cNvPr id="17" name="TextBox 16"/>
+          <p:cNvSpPr txBox="1"/>
+          <p:nvPr/>
+        </p:nvSpPr>
+        <p:spPr>
+          <a:xfrm>
+            <a:off x="8147304" y="1764792"/>
+            <a:ext cx="3511296" cy="2926080"/>
+          </a:xfrm>
+          <a:prstGeom prst="rect">
+            <a:avLst/>
+          </a:prstGeom>
+          <a:noFill/>
+        </p:spPr>
+        <p:txBody>
+          <a:bodyPr wrap="square" lIns="45720" rIns="45720">
+            <a:spAutoFit/>
+          </a:bodyPr>
+          <a:lstStyle/>
+          <a:p>
+            <a:pPr>
+              <a:lnSpc>
+                <a:spcPct val="108000"/>
+              </a:lnSpc>
+              <a:spcAft>
+                <a:spcPts val="200"/>
+              </a:spcAft>
+            </a:pPr>
+            <a:r>
+              <a:rPr sz="1500" b="0" i="0">
+                <a:solidFill>
+                  <a:srgbClr val="111111"/>
+                </a:solidFill>
+                <a:latin typeface="Arial"/>
+              </a:rPr>
+              <a:t>•  Observe the failure and an honest benign-twin solution</a:t>
+            </a:r>
+          </a:p>
+          <a:p>
+            <a:pPr>
+              <a:lnSpc>
+                <a:spcPct val="108000"/>
+              </a:lnSpc>
+              <a:spcAft>
+                <a:spcPts val="200"/>
+              </a:spcAft>
+            </a:pPr>
+            <a:r>
+              <a:rPr sz="1500" b="0" i="0">
+                <a:solidFill>
+                  <a:srgbClr val="111111"/>
+                </a:solidFill>
+                <a:latin typeface="Arial"/>
+              </a:rPr>
+              <a:t>•  Remove the suspected opportunity and repeat; inspect alternative causes</a:t>
+            </a:r>
+          </a:p>
+          <a:p>
+            <a:pPr>
+              <a:lnSpc>
+                <a:spcPct val="108000"/>
+              </a:lnSpc>
+              <a:spcAft>
+                <a:spcPts val="200"/>
+              </a:spcAft>
+            </a:pPr>
+            <a:r>
+              <a:rPr sz="1500" b="0" i="0">
+                <a:solidFill>
+                  <a:srgbClr val="111111"/>
+                </a:solidFill>
+                <a:latin typeface="Arial"/>
+              </a:rPr>
+              <a:t>•  Test guard effectiveness and retained task utility separately</a:t>
+            </a:r>
+          </a:p>
+        </p:txBody>
+      </p:sp>
+      <p:sp>
+        <p:nvSpPr>
+          <p:cNvPr id="18" name="Rounded Rectangle 17"/>
+          <p:cNvSpPr/>
+          <p:nvPr/>
+        </p:nvSpPr>
+        <p:spPr>
+          <a:xfrm>
+            <a:off x="457200" y="5038344"/>
+            <a:ext cx="11277295" cy="1005840"/>
+          </a:xfrm>
+          <a:prstGeom prst="roundRect">
+            <a:avLst>
+              <a:gd name="adj" fmla="val 6000"/>
+            </a:avLst>
+          </a:prstGeom>
+          <a:solidFill>
+            <a:srgbClr val="FFF2CC"/>
+          </a:solidFill>
+          <a:ln>
+            <a:noFill/>
+          </a:ln>
+          <a:effectLst/>
+        </p:spPr>
+        <p:style>
+          <a:lnRef idx="1">
+            <a:schemeClr val="accent1"/>
+          </a:lnRef>
+          <a:fillRef idx="3">
+            <a:schemeClr val="accent1"/>
+          </a:fillRef>
+          <a:effectRef idx="2">
+            <a:schemeClr val="accent1"/>
+          </a:effectRef>
+          <a:fontRef idx="minor">
+            <a:schemeClr val="lt1"/>
+          </a:fontRef>
+        </p:style>
+        <p:txBody>
+          <a:bodyPr rtlCol="0" anchor="ctr"/>
+          <a:lstStyle/>
+          <a:p/>
+        </p:txBody>
+      </p:sp>
+      <p:sp>
+        <p:nvSpPr>
+          <p:cNvPr id="19" name="TextBox 18"/>
+          <p:cNvSpPr txBox="1"/>
+          <p:nvPr/>
+        </p:nvSpPr>
+        <p:spPr>
+          <a:xfrm>
+            <a:off x="685800" y="5111496"/>
+            <a:ext cx="10820095" cy="859536"/>
+          </a:xfrm>
+          <a:prstGeom prst="rect">
+            <a:avLst/>
+          </a:prstGeom>
+          <a:noFill/>
+        </p:spPr>
+        <p:txBody>
+          <a:bodyPr wrap="square" lIns="45720" rIns="45720" tIns="27432" bIns="27432" anchor="ctr">
+            <a:spAutoFit/>
+          </a:bodyPr>
+          <a:lstStyle/>
+          <a:p>
+            <a:pPr algn="l">
+              <a:lnSpc>
+                <a:spcPct val="115000"/>
+              </a:lnSpc>
+            </a:pPr>
+            <a:r>
+              <a:rPr sz="1600" b="0" i="0">
+                <a:solidFill>
+                  <a:srgbClr val="111111"/>
+                </a:solidFill>
+                <a:latin typeface="Arial"/>
+              </a:rPr>
+              <a:t>Supported claim: this controlled setup reproduces specified mechanisms and behavior patterns. It does not recover the original incident rate, private model behavior or training cause.</a:t>
+            </a:r>
+          </a:p>
+        </p:txBody>
+      </p:sp>
+    </p:spTree>
+  </p:cSld>
+  <p:clrMapOvr>
+    <a:masterClrMapping/>
+  </p:clrMapOvr>
+</p:sld>
+</file>
+
+<file path=ppt/slides/slide32.xml><?xml version="1.0" encoding="utf-8"?>
+<p:sld xmlns:a="http://schemas.openxmlformats.org/drawingml/2006/main" xmlns:p="http://schemas.openxmlformats.org/presentationml/2006/main" xmlns:r="http://schemas.openxmlformats.org/officeDocument/2006/relationships">
+  <p:cSld>
+    <p:spTree>
+      <p:nvGrpSpPr>
+        <p:cNvPr id="1" name=""/>
+        <p:cNvGrpSpPr/>
+        <p:nvPr/>
+      </p:nvGrpSpPr>
+      <p:grpSpPr/>
+      <p:sp>
+        <p:nvSpPr>
+          <p:cNvPr id="2" name="Rectangle 1"/>
+          <p:cNvSpPr/>
+          <p:nvPr/>
+        </p:nvSpPr>
+        <p:spPr>
+          <a:xfrm>
+            <a:off x="457200" y="384048"/>
+            <a:ext cx="82296" cy="566928"/>
+          </a:xfrm>
+          <a:prstGeom prst="rect">
+            <a:avLst/>
+          </a:prstGeom>
+          <a:solidFill>
+            <a:srgbClr val="365E9E"/>
+          </a:solidFill>
+          <a:ln>
+            <a:noFill/>
+          </a:ln>
+          <a:effectLst/>
+        </p:spPr>
+        <p:style>
+          <a:lnRef idx="1">
+            <a:schemeClr val="accent1"/>
+          </a:lnRef>
+          <a:fillRef idx="3">
+            <a:schemeClr val="accent1"/>
+          </a:fillRef>
+          <a:effectRef idx="2">
+            <a:schemeClr val="accent1"/>
+          </a:effectRef>
+          <a:fontRef idx="minor">
+            <a:schemeClr val="lt1"/>
+          </a:fontRef>
+        </p:style>
+        <p:txBody>
+          <a:bodyPr rtlCol="0" anchor="ctr"/>
+          <a:lstStyle/>
+          <a:p/>
+        </p:txBody>
+      </p:sp>
+      <p:sp>
+        <p:nvSpPr>
+          <p:cNvPr id="3" name="TextBox 2"/>
+          <p:cNvSpPr txBox="1"/>
+          <p:nvPr/>
+        </p:nvSpPr>
+        <p:spPr>
+          <a:xfrm>
+            <a:off x="640080" y="301752"/>
+            <a:ext cx="10515600" cy="548640"/>
+          </a:xfrm>
+          <a:prstGeom prst="rect">
+            <a:avLst/>
+          </a:prstGeom>
+          <a:noFill/>
+        </p:spPr>
+        <p:txBody>
+          <a:bodyPr wrap="square" lIns="45720" rIns="45720" tIns="27432" bIns="27432" anchor="ctr">
+            <a:spAutoFit/>
+          </a:bodyPr>
+          <a:lstStyle/>
+          <a:p>
+            <a:pPr algn="l">
+              <a:lnSpc>
+                <a:spcPct val="110000"/>
+              </a:lnSpc>
+            </a:pPr>
+            <a:r>
+              <a:rPr sz="2600" b="1" i="0">
+                <a:solidFill>
+                  <a:srgbClr val="111111"/>
+                </a:solidFill>
+                <a:latin typeface="Arial"/>
+              </a:rPr>
+              <a:t>Choose the replay scope case by case</a:t>
+            </a:r>
+          </a:p>
+        </p:txBody>
+      </p:sp>
+      <p:sp>
+        <p:nvSpPr>
+          <p:cNvPr id="4" name="TextBox 3"/>
+          <p:cNvSpPr txBox="1"/>
+          <p:nvPr/>
+        </p:nvSpPr>
+        <p:spPr>
+          <a:xfrm>
+            <a:off x="640080" y="868680"/>
+            <a:ext cx="10972800" cy="365760"/>
+          </a:xfrm>
+          <a:prstGeom prst="rect">
+            <a:avLst/>
+          </a:prstGeom>
+          <a:noFill/>
+        </p:spPr>
+        <p:txBody>
+          <a:bodyPr wrap="square" lIns="45720" rIns="45720" tIns="27432" bIns="27432" anchor="t">
+            <a:spAutoFit/>
+          </a:bodyPr>
+          <a:lstStyle/>
+          <a:p>
+            <a:pPr algn="l">
+              <a:lnSpc>
+                <a:spcPct val="110000"/>
+              </a:lnSpc>
+            </a:pPr>
+            <a:r>
+              <a:rPr sz="1300" b="0" i="0">
+                <a:solidFill>
+                  <a:srgbClr val="666666"/>
+                </a:solidFill>
+                <a:latin typeface="Arial"/>
+              </a:rPr>
+              <a:t>Audit access and fidelity first; compare the scientific value with measured effort before scaling</a:t>
+            </a:r>
+          </a:p>
+        </p:txBody>
+      </p:sp>
+      <p:sp>
+        <p:nvSpPr>
+          <p:cNvPr id="5" name="TextBox 4"/>
+          <p:cNvSpPr txBox="1"/>
+          <p:nvPr/>
+        </p:nvSpPr>
+        <p:spPr>
+          <a:xfrm>
+            <a:off x="8503920" y="109728"/>
+            <a:ext cx="3200400" cy="274320"/>
+          </a:xfrm>
+          <a:prstGeom prst="rect">
+            <a:avLst/>
+          </a:prstGeom>
+          <a:noFill/>
+        </p:spPr>
+        <p:txBody>
+          <a:bodyPr wrap="square" lIns="45720" rIns="45720" tIns="27432" bIns="27432" anchor="t">
+            <a:spAutoFit/>
+          </a:bodyPr>
+          <a:lstStyle/>
+          <a:p>
+            <a:pPr algn="r">
+              <a:lnSpc>
+                <a:spcPct val="110000"/>
+              </a:lnSpc>
+            </a:pPr>
+            <a:r>
+              <a:rPr sz="900" b="1" i="0">
+                <a:solidFill>
+                  <a:srgbClr val="365E9E"/>
+                </a:solidFill>
+                <a:latin typeface="Arial"/>
+              </a:rPr>
+              <a:t>7 · REPLAY FEASIBILITY</a:t>
+            </a:r>
+          </a:p>
+        </p:txBody>
+      </p:sp>
+      <p:cxnSp>
+        <p:nvCxnSpPr>
+          <p:cNvPr id="6" name="Connector 5"/>
+          <p:cNvCxnSpPr/>
+          <p:nvPr/>
+        </p:nvCxnSpPr>
+        <p:spPr>
+          <a:xfrm>
+            <a:off x="457200" y="6446520"/>
+            <a:ext cx="11277295" cy="0"/>
+          </a:xfrm>
+          <a:prstGeom prst="line">
+            <a:avLst/>
+          </a:prstGeom>
+          <a:ln w="6350">
+            <a:solidFill>
+              <a:srgbClr val="C9C9C9"/>
+            </a:solidFill>
+          </a:ln>
+        </p:spPr>
+        <p:style>
+          <a:lnRef idx="2">
+            <a:schemeClr val="accent1"/>
+          </a:lnRef>
+          <a:fillRef idx="0">
+            <a:schemeClr val="accent1"/>
+          </a:fillRef>
+          <a:effectRef idx="1">
+            <a:schemeClr val="accent1"/>
+          </a:effectRef>
+          <a:fontRef idx="minor">
+            <a:schemeClr val="tx1"/>
+          </a:fontRef>
+        </p:style>
+      </p:cxnSp>
+      <p:sp>
+        <p:nvSpPr>
+          <p:cNvPr id="7" name="TextBox 6"/>
+          <p:cNvSpPr txBox="1"/>
+          <p:nvPr/>
+        </p:nvSpPr>
+        <p:spPr>
+          <a:xfrm>
+            <a:off x="457200" y="6473952"/>
+            <a:ext cx="10058400" cy="274320"/>
+          </a:xfrm>
+          <a:prstGeom prst="rect">
+            <a:avLst/>
+          </a:prstGeom>
+          <a:noFill/>
+        </p:spPr>
+        <p:txBody>
+          <a:bodyPr wrap="square" lIns="45720" rIns="45720" tIns="27432" bIns="27432" anchor="t">
+            <a:spAutoFit/>
+          </a:bodyPr>
+          <a:lstStyle/>
+          <a:p>
+            <a:pPr algn="l">
+              <a:lnSpc>
+                <a:spcPct val="110000"/>
+              </a:lnSpc>
+            </a:pPr>
+            <a:r>
+              <a:rPr sz="800" b="0" i="0">
+                <a:solidFill>
+                  <a:srgbClr val="666666"/>
+                </a:solidFill>
+                <a:latin typeface="Arial"/>
+              </a:rPr>
+              <a:t>Incident-aware optimization · design proposal · containment-extension · October 2026 · no benchmark improvement measured</a:t>
+            </a:r>
+          </a:p>
+        </p:txBody>
+      </p:sp>
+      <p:sp>
+        <p:nvSpPr>
+          <p:cNvPr id="8" name="TextBox 7"/>
+          <p:cNvSpPr txBox="1"/>
+          <p:nvPr/>
+        </p:nvSpPr>
+        <p:spPr>
+          <a:xfrm>
+            <a:off x="10820095" y="6473952"/>
+            <a:ext cx="914400" cy="274320"/>
+          </a:xfrm>
+          <a:prstGeom prst="rect">
+            <a:avLst/>
+          </a:prstGeom>
+          <a:noFill/>
+        </p:spPr>
+        <p:txBody>
+          <a:bodyPr wrap="square" lIns="45720" rIns="45720" tIns="27432" bIns="27432" anchor="t">
+            <a:spAutoFit/>
+          </a:bodyPr>
+          <a:lstStyle/>
+          <a:p>
+            <a:pPr algn="r">
+              <a:lnSpc>
+                <a:spcPct val="110000"/>
+              </a:lnSpc>
+            </a:pPr>
+            <a:r>
+              <a:rPr sz="900" b="0" i="0">
+                <a:solidFill>
+                  <a:srgbClr val="666666"/>
+                </a:solidFill>
+                <a:latin typeface="Arial"/>
+              </a:rPr>
+              <a:t>32</a:t>
+            </a:r>
+          </a:p>
+        </p:txBody>
+      </p:sp>
+      <p:graphicFrame>
+        <p:nvGraphicFramePr>
+          <p:cNvPr id="9" name="Table 8"/>
+          <p:cNvGraphicFramePr>
+            <a:graphicFrameLocks noGrp="1"/>
+          </p:cNvGraphicFramePr>
+          <p:nvPr/>
+        </p:nvGraphicFramePr>
+        <p:xfrm>
+          <a:off x="457200" y="1325880"/>
+          <a:ext cx="11277293" cy="3913632"/>
+        </p:xfrm>
+        <a:graphic>
+          <a:graphicData uri="http://schemas.openxmlformats.org/drawingml/2006/table">
+            <a:tbl>
+              <a:tblPr firstRow="1" bandRow="1">
+                <a:tableStyleId>{5C22544A-7EE6-4342-B048-85BDC9FD1C3A}</a:tableStyleId>
+              </a:tblPr>
+              <a:tblGrid>
+                <a:gridCol w="3658489"/>
+                <a:gridCol w="3201178"/>
+                <a:gridCol w="4417626"/>
+              </a:tblGrid>
+              <a:tr h="782726">
+                <a:tc>
+                  <a:txBody>
+                    <a:bodyPr wrap="square"/>
+                    <a:lstStyle/>
+                    <a:p>
+                      <a:pPr>
+                        <a:lnSpc>
+                          <a:spcPct val="105000"/>
+                        </a:lnSpc>
+                      </a:pPr>
+                      <a:r>
+                        <a:rPr sz="1450" b="1" i="0">
+                          <a:solidFill>
+                            <a:srgbClr val="FFFFFF"/>
+                          </a:solidFill>
+                          <a:latin typeface="Arial"/>
+                        </a:rPr>
+                        <a:t>Condition</a:t>
+                      </a:r>
+                    </a:p>
+                  </a:txBody>
+                  <a:tcPr marL="54864" marR="54864" marT="27432" marB="27432">
+                    <a:solidFill>
+                      <a:srgbClr val="365E9E"/>
+                    </a:solidFill>
+                  </a:tcPr>
+                </a:tc>
+                <a:tc>
+                  <a:txBody>
+                    <a:bodyPr wrap="square"/>
+                    <a:lstStyle/>
+                    <a:p>
+                      <a:pPr>
+                        <a:lnSpc>
+                          <a:spcPct val="105000"/>
+                        </a:lnSpc>
+                      </a:pPr>
+                      <a:r>
+                        <a:rPr sz="1450" b="1" i="0">
+                          <a:solidFill>
+                            <a:srgbClr val="FFFFFF"/>
+                          </a:solidFill>
+                          <a:latin typeface="Arial"/>
+                        </a:rPr>
+                        <a:t>Route</a:t>
+                      </a:r>
+                    </a:p>
+                  </a:txBody>
+                  <a:tcPr marL="54864" marR="54864" marT="27432" marB="27432">
+                    <a:solidFill>
+                      <a:srgbClr val="365E9E"/>
+                    </a:solidFill>
+                  </a:tcPr>
+                </a:tc>
+                <a:tc>
+                  <a:txBody>
+                    <a:bodyPr wrap="square"/>
+                    <a:lstStyle/>
+                    <a:p>
+                      <a:pPr>
+                        <a:lnSpc>
+                          <a:spcPct val="105000"/>
+                        </a:lnSpc>
+                      </a:pPr>
+                      <a:r>
+                        <a:rPr sz="1450" b="1" i="0">
+                          <a:solidFill>
+                            <a:srgbClr val="FFFFFF"/>
+                          </a:solidFill>
+                          <a:latin typeface="Arial"/>
+                        </a:rPr>
+                        <a:t>What may enter the library</a:t>
+                      </a:r>
+                    </a:p>
+                  </a:txBody>
+                  <a:tcPr marL="54864" marR="54864" marT="27432" marB="27432">
+                    <a:solidFill>
+                      <a:srgbClr val="365E9E"/>
+                    </a:solidFill>
+                  </a:tcPr>
+                </a:tc>
+              </a:tr>
+              <a:tr h="782726">
+                <a:tc>
+                  <a:txBody>
+                    <a:bodyPr wrap="square"/>
+                    <a:lstStyle/>
+                    <a:p>
+                      <a:pPr>
+                        <a:lnSpc>
+                          <a:spcPct val="105000"/>
+                        </a:lnSpc>
+                      </a:pPr>
+                      <a:r>
+                        <a:rPr sz="1450" b="1" i="0">
+                          <a:solidFill>
+                            <a:srgbClr val="111111"/>
+                          </a:solidFill>
+                          <a:latin typeface="Arial"/>
+                        </a:rPr>
+                        <a:t>Critical artifacts available; cost justified</a:t>
+                      </a:r>
+                    </a:p>
+                  </a:txBody>
+                  <a:tcPr marL="54864" marR="54864" marT="27432" marB="27432">
+                    <a:solidFill>
+                      <a:srgbClr val="FFFFFF"/>
+                    </a:solidFill>
+                  </a:tcPr>
+                </a:tc>
+                <a:tc>
+                  <a:txBody>
+                    <a:bodyPr wrap="square"/>
+                    <a:lstStyle/>
+                    <a:p>
+                      <a:pPr>
+                        <a:lnSpc>
+                          <a:spcPct val="105000"/>
+                        </a:lnSpc>
+                      </a:pPr>
+                      <a:r>
+                        <a:rPr sz="1450" b="0" i="0">
+                          <a:solidFill>
+                            <a:srgbClr val="111111"/>
+                          </a:solidFill>
+                          <a:latin typeface="Arial"/>
+                        </a:rPr>
+                        <a:t>Attempt matched agent replay</a:t>
+                      </a:r>
+                    </a:p>
+                  </a:txBody>
+                  <a:tcPr marL="54864" marR="54864" marT="27432" marB="27432">
+                    <a:solidFill>
+                      <a:srgbClr val="FFFFFF"/>
+                    </a:solidFill>
+                  </a:tcPr>
+                </a:tc>
+                <a:tc>
+                  <a:txBody>
+                    <a:bodyPr wrap="square"/>
+                    <a:lstStyle/>
+                    <a:p>
+                      <a:pPr>
+                        <a:lnSpc>
+                          <a:spcPct val="105000"/>
+                        </a:lnSpc>
+                      </a:pPr>
+                      <a:r>
+                        <a:rPr sz="1450" b="0" i="0">
+                          <a:solidFill>
+                            <a:srgbClr val="111111"/>
+                          </a:solidFill>
+                          <a:latin typeface="Arial"/>
+                        </a:rPr>
+                        <a:t>Qualified executions with pinned conditions, controls and uncertainty.</a:t>
+                      </a:r>
+                    </a:p>
+                  </a:txBody>
+                  <a:tcPr marL="54864" marR="54864" marT="27432" marB="27432">
+                    <a:solidFill>
+                      <a:srgbClr val="FFFFFF"/>
+                    </a:solidFill>
+                  </a:tcPr>
+                </a:tc>
+              </a:tr>
+              <a:tr h="782726">
+                <a:tc>
+                  <a:txBody>
+                    <a:bodyPr wrap="square"/>
+                    <a:lstStyle/>
+                    <a:p>
+                      <a:pPr>
+                        <a:lnSpc>
+                          <a:spcPct val="105000"/>
+                        </a:lnSpc>
+                      </a:pPr>
+                      <a:r>
+                        <a:rPr sz="1450" b="1" i="0">
+                          <a:solidFill>
+                            <a:srgbClr val="111111"/>
+                          </a:solidFill>
+                          <a:latin typeface="Arial"/>
+                        </a:rPr>
+                        <a:t>Full setup blocked or too expensive; mechanism isolatable</a:t>
+                      </a:r>
+                    </a:p>
+                  </a:txBody>
+                  <a:tcPr marL="54864" marR="54864" marT="27432" marB="27432">
+                    <a:solidFill>
+                      <a:srgbClr val="F4F6FA"/>
+                    </a:solidFill>
+                  </a:tcPr>
+                </a:tc>
+                <a:tc>
+                  <a:txBody>
+                    <a:bodyPr wrap="square"/>
+                    <a:lstStyle/>
+                    <a:p>
+                      <a:pPr>
+                        <a:lnSpc>
+                          <a:spcPct val="105000"/>
+                        </a:lnSpc>
+                      </a:pPr>
+                      <a:r>
+                        <a:rPr sz="1450" b="0" i="0">
+                          <a:solidFill>
+                            <a:srgbClr val="111111"/>
+                          </a:solidFill>
+                          <a:latin typeface="Arial"/>
+                        </a:rPr>
+                        <a:t>Controlled mechanism / behavior study</a:t>
+                      </a:r>
+                    </a:p>
+                  </a:txBody>
+                  <a:tcPr marL="54864" marR="54864" marT="27432" marB="27432">
+                    <a:solidFill>
+                      <a:srgbClr val="F4F6FA"/>
+                    </a:solidFill>
+                  </a:tcPr>
+                </a:tc>
+                <a:tc>
+                  <a:txBody>
+                    <a:bodyPr wrap="square"/>
+                    <a:lstStyle/>
+                    <a:p>
+                      <a:pPr>
+                        <a:lnSpc>
+                          <a:spcPct val="105000"/>
+                        </a:lnSpc>
+                      </a:pPr>
+                      <a:r>
+                        <a:rPr sz="1450" b="0" i="0">
+                          <a:solidFill>
+                            <a:srgbClr val="111111"/>
+                          </a:solidFill>
+                          <a:latin typeface="Arial"/>
+                        </a:rPr>
+                        <a:t>Explicitly reconstructed cases; separate scripted effects from actor behavior.</a:t>
+                      </a:r>
+                    </a:p>
+                  </a:txBody>
+                  <a:tcPr marL="54864" marR="54864" marT="27432" marB="27432">
+                    <a:solidFill>
+                      <a:srgbClr val="F4F6FA"/>
+                    </a:solidFill>
+                  </a:tcPr>
+                </a:tc>
+              </a:tr>
+              <a:tr h="782726">
+                <a:tc>
+                  <a:txBody>
+                    <a:bodyPr wrap="square"/>
+                    <a:lstStyle/>
+                    <a:p>
+                      <a:pPr>
+                        <a:lnSpc>
+                          <a:spcPct val="105000"/>
+                        </a:lnSpc>
+                      </a:pPr>
+                      <a:r>
+                        <a:rPr sz="1450" b="1" i="0">
+                          <a:solidFill>
+                            <a:srgbClr val="111111"/>
+                          </a:solidFill>
+                          <a:latin typeface="Arial"/>
+                        </a:rPr>
+                        <a:t>Only actions / traces and usable state or labels</a:t>
+                      </a:r>
+                    </a:p>
+                  </a:txBody>
+                  <a:tcPr marL="54864" marR="54864" marT="27432" marB="27432">
+                    <a:solidFill>
+                      <a:srgbClr val="FFFFFF"/>
+                    </a:solidFill>
+                  </a:tcPr>
+                </a:tc>
+                <a:tc>
+                  <a:txBody>
+                    <a:bodyPr wrap="square"/>
+                    <a:lstStyle/>
+                    <a:p>
+                      <a:pPr>
+                        <a:lnSpc>
+                          <a:spcPct val="105000"/>
+                        </a:lnSpc>
+                      </a:pPr>
+                      <a:r>
+                        <a:rPr sz="1450" b="0" i="0">
+                          <a:solidFill>
+                            <a:srgbClr val="111111"/>
+                          </a:solidFill>
+                          <a:latin typeface="Arial"/>
+                        </a:rPr>
+                        <a:t>Effect replay or offline monitor evaluation</a:t>
+                      </a:r>
+                    </a:p>
+                  </a:txBody>
+                  <a:tcPr marL="54864" marR="54864" marT="27432" marB="27432">
+                    <a:solidFill>
+                      <a:srgbClr val="FFFFFF"/>
+                    </a:solidFill>
+                  </a:tcPr>
+                </a:tc>
+                <a:tc>
+                  <a:txBody>
+                    <a:bodyPr wrap="square"/>
+                    <a:lstStyle/>
+                    <a:p>
+                      <a:pPr>
+                        <a:lnSpc>
+                          <a:spcPct val="105000"/>
+                        </a:lnSpc>
+                      </a:pPr>
+                      <a:r>
+                        <a:rPr sz="1450" b="0" i="0">
+                          <a:solidFill>
+                            <a:srgbClr val="111111"/>
+                          </a:solidFill>
+                          <a:latin typeface="Arial"/>
+                        </a:rPr>
+                        <a:t>Evidence for that effect or observation task, not original model incident rates.</a:t>
+                      </a:r>
+                    </a:p>
+                  </a:txBody>
+                  <a:tcPr marL="54864" marR="54864" marT="27432" marB="27432">
+                    <a:solidFill>
+                      <a:srgbClr val="FFFFFF"/>
+                    </a:solidFill>
+                  </a:tcPr>
+                </a:tc>
+              </a:tr>
+              <a:tr h="782728">
+                <a:tc>
+                  <a:txBody>
+                    <a:bodyPr wrap="square"/>
+                    <a:lstStyle/>
+                    <a:p>
+                      <a:pPr>
+                        <a:lnSpc>
+                          <a:spcPct val="105000"/>
+                        </a:lnSpc>
+                      </a:pPr>
+                      <a:r>
+                        <a:rPr sz="1450" b="1" i="0">
+                          <a:solidFill>
+                            <a:srgbClr val="111111"/>
+                          </a:solidFill>
+                          <a:latin typeface="Arial"/>
+                        </a:rPr>
+                        <a:t>Critical gaps remain; no valid reduced test</a:t>
+                      </a:r>
+                    </a:p>
+                  </a:txBody>
+                  <a:tcPr marL="54864" marR="54864" marT="27432" marB="27432">
+                    <a:solidFill>
+                      <a:srgbClr val="F4F6FA"/>
+                    </a:solidFill>
+                  </a:tcPr>
+                </a:tc>
+                <a:tc>
+                  <a:txBody>
+                    <a:bodyPr wrap="square"/>
+                    <a:lstStyle/>
+                    <a:p>
+                      <a:pPr>
+                        <a:lnSpc>
+                          <a:spcPct val="105000"/>
+                        </a:lnSpc>
+                      </a:pPr>
+                      <a:r>
+                        <a:rPr sz="1450" b="0" i="0">
+                          <a:solidFill>
+                            <a:srgbClr val="111111"/>
+                          </a:solidFill>
+                          <a:latin typeface="Arial"/>
+                        </a:rPr>
+                        <a:t>Defer, archive, or seek owner-run evidence</a:t>
+                      </a:r>
+                    </a:p>
+                  </a:txBody>
+                  <a:tcPr marL="54864" marR="54864" marT="27432" marB="27432">
+                    <a:solidFill>
+                      <a:srgbClr val="F4F6FA"/>
+                    </a:solidFill>
+                  </a:tcPr>
+                </a:tc>
+                <a:tc>
+                  <a:txBody>
+                    <a:bodyPr wrap="square"/>
+                    <a:lstStyle/>
+                    <a:p>
+                      <a:pPr>
+                        <a:lnSpc>
+                          <a:spcPct val="105000"/>
+                        </a:lnSpc>
+                      </a:pPr>
+                      <a:r>
+                        <a:rPr sz="1450" b="0" i="0">
+                          <a:solidFill>
+                            <a:srgbClr val="111111"/>
+                          </a:solidFill>
+                          <a:latin typeface="Arial"/>
+                        </a:rPr>
+                        <a:t>Document the blocker. Missing or unaffordable replay is not a clean result.</a:t>
+                      </a:r>
+                    </a:p>
+                  </a:txBody>
+                  <a:tcPr marL="54864" marR="54864" marT="27432" marB="27432">
+                    <a:solidFill>
+                      <a:srgbClr val="F4F6FA"/>
+                    </a:solidFill>
+                  </a:tcPr>
+                </a:tc>
+              </a:tr>
+            </a:tbl>
+          </a:graphicData>
+        </a:graphic>
+      </p:graphicFrame>
+      <p:sp>
+        <p:nvSpPr>
+          <p:cNvPr id="10" name="Rounded Rectangle 9"/>
+          <p:cNvSpPr/>
+          <p:nvPr/>
+        </p:nvSpPr>
+        <p:spPr>
+          <a:xfrm>
+            <a:off x="457200" y="5486400"/>
+            <a:ext cx="11277295" cy="758952"/>
+          </a:xfrm>
+          <a:prstGeom prst="roundRect">
+            <a:avLst>
+              <a:gd name="adj" fmla="val 6000"/>
+            </a:avLst>
+          </a:prstGeom>
+          <a:solidFill>
+            <a:srgbClr val="EDF4FB"/>
+          </a:solidFill>
+          <a:ln>
+            <a:noFill/>
+          </a:ln>
+          <a:effectLst/>
+        </p:spPr>
+        <p:style>
+          <a:lnRef idx="1">
+            <a:schemeClr val="accent1"/>
+          </a:lnRef>
+          <a:fillRef idx="3">
+            <a:schemeClr val="accent1"/>
+          </a:fillRef>
+          <a:effectRef idx="2">
+            <a:schemeClr val="accent1"/>
+          </a:effectRef>
+          <a:fontRef idx="minor">
+            <a:schemeClr val="lt1"/>
+          </a:fontRef>
+        </p:style>
+        <p:txBody>
+          <a:bodyPr rtlCol="0" anchor="ctr"/>
+          <a:lstStyle/>
+          <a:p/>
+        </p:txBody>
+      </p:sp>
+      <p:sp>
+        <p:nvSpPr>
+          <p:cNvPr id="11" name="TextBox 10"/>
+          <p:cNvSpPr txBox="1"/>
+          <p:nvPr/>
+        </p:nvSpPr>
+        <p:spPr>
+          <a:xfrm>
+            <a:off x="685800" y="5559552"/>
+            <a:ext cx="10820095" cy="612648"/>
+          </a:xfrm>
+          <a:prstGeom prst="rect">
+            <a:avLst/>
+          </a:prstGeom>
+          <a:noFill/>
+        </p:spPr>
+        <p:txBody>
+          <a:bodyPr wrap="square" lIns="45720" rIns="45720" tIns="27432" bIns="27432" anchor="ctr">
+            <a:spAutoFit/>
+          </a:bodyPr>
+          <a:lstStyle/>
+          <a:p>
+            <a:pPr algn="l">
+              <a:lnSpc>
+                <a:spcPct val="115000"/>
+              </a:lnSpc>
+            </a:pPr>
+            <a:r>
+              <a:rPr sz="1500" b="0" i="0">
+                <a:solidFill>
+                  <a:srgbClr val="111111"/>
+                </a:solidFill>
+                <a:latin typeface="Arial"/>
+              </a:rPr>
+              <a:t>Record evidence grade, replay mode, fidelity, missing dependencies and actual cost. Report qualified coverage and excluded cases; easy-to-replay cases can bias the library.</a:t>
+            </a:r>
+          </a:p>
+        </p:txBody>
+      </p:sp>
+    </p:spTree>
+  </p:cSld>
+  <p:clrMapOvr>
+    <a:masterClrMapping/>
+  </p:clrMapOvr>
+</p:sld>
+</file>
+
+<file path=ppt/slides/slide33.xml><?xml version="1.0" encoding="utf-8"?>
+<p:sld xmlns:a="http://schemas.openxmlformats.org/drawingml/2006/main" xmlns:p="http://schemas.openxmlformats.org/presentationml/2006/main" xmlns:r="http://schemas.openxmlformats.org/officeDocument/2006/relationships">
+  <p:cSld>
+    <p:spTree>
+      <p:nvGrpSpPr>
+        <p:cNvPr id="1" name=""/>
+        <p:cNvGrpSpPr/>
+        <p:nvPr/>
+      </p:nvGrpSpPr>
+      <p:grpSpPr/>
+      <p:sp>
+        <p:nvSpPr>
+          <p:cNvPr id="2" name="Rectangle 1"/>
+          <p:cNvSpPr/>
+          <p:nvPr/>
+        </p:nvSpPr>
+        <p:spPr>
+          <a:xfrm>
+            <a:off x="457200" y="384048"/>
+            <a:ext cx="82296" cy="566928"/>
+          </a:xfrm>
+          <a:prstGeom prst="rect">
+            <a:avLst/>
+          </a:prstGeom>
+          <a:solidFill>
+            <a:srgbClr val="365E9E"/>
+          </a:solidFill>
+          <a:ln>
+            <a:noFill/>
+          </a:ln>
+          <a:effectLst/>
+        </p:spPr>
+        <p:style>
+          <a:lnRef idx="1">
+            <a:schemeClr val="accent1"/>
+          </a:lnRef>
+          <a:fillRef idx="3">
+            <a:schemeClr val="accent1"/>
+          </a:fillRef>
+          <a:effectRef idx="2">
+            <a:schemeClr val="accent1"/>
+          </a:effectRef>
+          <a:fontRef idx="minor">
+            <a:schemeClr val="lt1"/>
+          </a:fontRef>
+        </p:style>
+        <p:txBody>
+          <a:bodyPr rtlCol="0" anchor="ctr"/>
+          <a:lstStyle/>
+          <a:p/>
+        </p:txBody>
+      </p:sp>
+      <p:sp>
+        <p:nvSpPr>
+          <p:cNvPr id="3" name="TextBox 2"/>
+          <p:cNvSpPr txBox="1"/>
+          <p:nvPr/>
+        </p:nvSpPr>
+        <p:spPr>
+          <a:xfrm>
+            <a:off x="640080" y="301752"/>
+            <a:ext cx="10515600" cy="548640"/>
+          </a:xfrm>
+          <a:prstGeom prst="rect">
+            <a:avLst/>
+          </a:prstGeom>
+          <a:noFill/>
+        </p:spPr>
+        <p:txBody>
+          <a:bodyPr wrap="square" lIns="45720" rIns="45720" tIns="27432" bIns="27432" anchor="ctr">
+            <a:spAutoFit/>
+          </a:bodyPr>
+          <a:lstStyle/>
+          <a:p>
+            <a:pPr algn="l">
+              <a:lnSpc>
+                <a:spcPct val="110000"/>
+              </a:lnSpc>
+            </a:pPr>
+            <a:r>
+              <a:rPr sz="2600" b="1" i="0">
+                <a:solidFill>
+                  <a:srgbClr val="111111"/>
+                </a:solidFill>
+                <a:latin typeface="Arial"/>
+              </a:rPr>
+              <a:t>Summary</a:t>
+            </a:r>
+          </a:p>
+        </p:txBody>
+      </p:sp>
+      <p:sp>
+        <p:nvSpPr>
+          <p:cNvPr id="4" name="TextBox 3"/>
+          <p:cNvSpPr txBox="1"/>
+          <p:nvPr/>
+        </p:nvSpPr>
+        <p:spPr>
+          <a:xfrm>
+            <a:off x="8503920" y="109728"/>
+            <a:ext cx="3200400" cy="274320"/>
+          </a:xfrm>
+          <a:prstGeom prst="rect">
+            <a:avLst/>
+          </a:prstGeom>
+          <a:noFill/>
+        </p:spPr>
+        <p:txBody>
+          <a:bodyPr wrap="square" lIns="45720" rIns="45720" tIns="27432" bIns="27432" anchor="t">
+            <a:spAutoFit/>
+          </a:bodyPr>
+          <a:lstStyle/>
+          <a:p>
+            <a:pPr algn="r">
+              <a:lnSpc>
+                <a:spcPct val="110000"/>
+              </a:lnSpc>
+            </a:pPr>
+            <a:r>
+              <a:rPr sz="900" b="1" i="0">
+                <a:solidFill>
+                  <a:srgbClr val="365E9E"/>
+                </a:solidFill>
+                <a:latin typeface="Arial"/>
+              </a:rPr>
+              <a:t>SUMMARY</a:t>
+            </a:r>
+          </a:p>
+        </p:txBody>
+      </p:sp>
+      <p:cxnSp>
+        <p:nvCxnSpPr>
+          <p:cNvPr id="5" name="Connector 4"/>
+          <p:cNvCxnSpPr/>
+          <p:nvPr/>
+        </p:nvCxnSpPr>
+        <p:spPr>
+          <a:xfrm>
+            <a:off x="457200" y="6446520"/>
+            <a:ext cx="11277295" cy="0"/>
+          </a:xfrm>
+          <a:prstGeom prst="line">
+            <a:avLst/>
+          </a:prstGeom>
+          <a:ln w="6350">
+            <a:solidFill>
+              <a:srgbClr val="C9C9C9"/>
+            </a:solidFill>
+          </a:ln>
+        </p:spPr>
+        <p:style>
+          <a:lnRef idx="2">
+            <a:schemeClr val="accent1"/>
+          </a:lnRef>
+          <a:fillRef idx="0">
+            <a:schemeClr val="accent1"/>
+          </a:fillRef>
+          <a:effectRef idx="1">
+            <a:schemeClr val="accent1"/>
+          </a:effectRef>
+          <a:fontRef idx="minor">
+            <a:schemeClr val="tx1"/>
+          </a:fontRef>
+        </p:style>
+      </p:cxnSp>
+      <p:sp>
+        <p:nvSpPr>
+          <p:cNvPr id="6" name="TextBox 5"/>
+          <p:cNvSpPr txBox="1"/>
+          <p:nvPr/>
+        </p:nvSpPr>
+        <p:spPr>
+          <a:xfrm>
+            <a:off x="457200" y="6473952"/>
+            <a:ext cx="10058400" cy="274320"/>
+          </a:xfrm>
+          <a:prstGeom prst="rect">
+            <a:avLst/>
+          </a:prstGeom>
+          <a:noFill/>
+        </p:spPr>
+        <p:txBody>
+          <a:bodyPr wrap="square" lIns="45720" rIns="45720" tIns="27432" bIns="27432" anchor="t">
+            <a:spAutoFit/>
+          </a:bodyPr>
+          <a:lstStyle/>
+          <a:p>
+            <a:pPr algn="l">
+              <a:lnSpc>
+                <a:spcPct val="110000"/>
+              </a:lnSpc>
+            </a:pPr>
+            <a:r>
+              <a:rPr sz="800" b="0" i="0">
+                <a:solidFill>
+                  <a:srgbClr val="666666"/>
+                </a:solidFill>
+                <a:latin typeface="Arial"/>
+              </a:rPr>
+              <a:t>Incident-aware optimization · design proposal · containment-extension · October 2026 · no benchmark improvement measured</a:t>
+            </a:r>
+          </a:p>
+        </p:txBody>
+      </p:sp>
+      <p:sp>
+        <p:nvSpPr>
+          <p:cNvPr id="7" name="TextBox 6"/>
+          <p:cNvSpPr txBox="1"/>
+          <p:nvPr/>
+        </p:nvSpPr>
+        <p:spPr>
+          <a:xfrm>
+            <a:off x="10820095" y="6473952"/>
+            <a:ext cx="914400" cy="274320"/>
+          </a:xfrm>
+          <a:prstGeom prst="rect">
+            <a:avLst/>
+          </a:prstGeom>
+          <a:noFill/>
+        </p:spPr>
+        <p:txBody>
+          <a:bodyPr wrap="square" lIns="45720" rIns="45720" tIns="27432" bIns="27432" anchor="t">
+            <a:spAutoFit/>
+          </a:bodyPr>
+          <a:lstStyle/>
+          <a:p>
+            <a:pPr algn="r">
+              <a:lnSpc>
+                <a:spcPct val="110000"/>
+              </a:lnSpc>
+            </a:pPr>
+            <a:r>
+              <a:rPr sz="900" b="0" i="0">
+                <a:solidFill>
+                  <a:srgbClr val="666666"/>
+                </a:solidFill>
+                <a:latin typeface="Arial"/>
+              </a:rPr>
+              <a:t>33</a:t>
+            </a:r>
+          </a:p>
+        </p:txBody>
+      </p:sp>
+      <p:sp>
+        <p:nvSpPr>
+          <p:cNvPr id="8" name="TextBox 7"/>
+          <p:cNvSpPr txBox="1"/>
+          <p:nvPr/>
+        </p:nvSpPr>
+        <p:spPr>
+          <a:xfrm>
+            <a:off x="457200" y="1325880"/>
+            <a:ext cx="6583680" cy="3840480"/>
+          </a:xfrm>
+          <a:prstGeom prst="rect">
+            <a:avLst/>
+          </a:prstGeom>
+          <a:noFill/>
+        </p:spPr>
+        <p:txBody>
+          <a:bodyPr wrap="square" lIns="45720" rIns="45720">
+            <a:spAutoFit/>
+          </a:bodyPr>
+          <a:lstStyle/>
+          <a:p>
+            <a:pPr>
+              <a:lnSpc>
+                <a:spcPct val="112000"/>
+              </a:lnSpc>
+              <a:spcAft>
+                <a:spcPts val="1000"/>
+              </a:spcAft>
+            </a:pPr>
+            <a:r>
+              <a:rPr sz="1800" b="0" i="0">
+                <a:solidFill>
+                  <a:srgbClr val="111111"/>
+                </a:solidFill>
+                <a:latin typeface="Arial"/>
+              </a:rPr>
+              <a:t>•  Incidents will keep happening; a scorer cannot see them, an observer can</a:t>
+            </a:r>
+          </a:p>
+          <a:p>
+            <a:pPr>
+              <a:lnSpc>
+                <a:spcPct val="112000"/>
+              </a:lnSpc>
+              <a:spcAft>
+                <a:spcPts val="1000"/>
+              </a:spcAft>
+            </a:pPr>
+            <a:r>
+              <a:rPr sz="1800" b="0" i="0">
+                <a:solidFill>
+                  <a:srgbClr val="111111"/>
+                </a:solidFill>
+                <a:latin typeface="Arial"/>
+              </a:rPr>
+              <a:t>•  Each verified incident becomes an executable case with a benign twin</a:t>
+            </a:r>
+          </a:p>
+          <a:p>
+            <a:pPr>
+              <a:lnSpc>
+                <a:spcPct val="112000"/>
+              </a:lnSpc>
+              <a:spcAft>
+                <a:spcPts val="1000"/>
+              </a:spcAft>
+            </a:pPr>
+            <a:r>
+              <a:rPr sz="1800" b="0" i="0">
+                <a:solidFill>
+                  <a:srgbClr val="111111"/>
+                </a:solidFill>
+                <a:latin typeface="Arial"/>
+              </a:rPr>
+              <a:t>•  A scheduled loop replays, revises and releases only what passes a regression gate and a human</a:t>
+            </a:r>
+          </a:p>
+          <a:p>
+            <a:pPr>
+              <a:lnSpc>
+                <a:spcPct val="112000"/>
+              </a:lnSpc>
+              <a:spcAft>
+                <a:spcPts val="1000"/>
+              </a:spcAft>
+            </a:pPr>
+            <a:r>
+              <a:rPr sz="1800" b="0" i="0">
+                <a:solidFill>
+                  <a:srgbClr val="111111"/>
+                </a:solidFill>
+                <a:latin typeface="Arial"/>
+              </a:rPr>
+              <a:t>•  The frozen policy is judged on untouched tasks and on incidents reported after the cutoff</a:t>
+            </a:r>
+          </a:p>
+        </p:txBody>
+      </p:sp>
+      <p:sp>
+        <p:nvSpPr>
+          <p:cNvPr id="9" name="Rounded Rectangle 8"/>
+          <p:cNvSpPr/>
+          <p:nvPr/>
+        </p:nvSpPr>
+        <p:spPr>
+          <a:xfrm>
+            <a:off x="7406640" y="1325880"/>
+            <a:ext cx="4325112" cy="3840480"/>
+          </a:xfrm>
+          <a:prstGeom prst="roundRect">
+            <a:avLst>
+              <a:gd name="adj" fmla="val 6000"/>
+            </a:avLst>
+          </a:prstGeom>
+          <a:solidFill>
+            <a:srgbClr val="EAF5EF"/>
+          </a:solidFill>
+          <a:ln w="12700">
+            <a:solidFill>
+              <a:srgbClr val="2E7D5B"/>
+            </a:solidFill>
+          </a:ln>
+          <a:effectLst/>
+        </p:spPr>
+        <p:style>
+          <a:lnRef idx="1">
+            <a:schemeClr val="accent1"/>
+          </a:lnRef>
+          <a:fillRef idx="3">
+            <a:schemeClr val="accent1"/>
+          </a:fillRef>
+          <a:effectRef idx="2">
+            <a:schemeClr val="accent1"/>
+          </a:effectRef>
+          <a:fontRef idx="minor">
+            <a:schemeClr val="lt1"/>
+          </a:fontRef>
+        </p:style>
+        <p:txBody>
+          <a:bodyPr rtlCol="0" anchor="ctr"/>
+          <a:lstStyle/>
+          <a:p/>
+        </p:txBody>
+      </p:sp>
+      <p:sp>
+        <p:nvSpPr>
+          <p:cNvPr id="10" name="TextBox 9"/>
+          <p:cNvSpPr txBox="1"/>
+          <p:nvPr/>
+        </p:nvSpPr>
+        <p:spPr>
+          <a:xfrm>
+            <a:off x="7516368" y="1399032"/>
+            <a:ext cx="4123944" cy="365760"/>
+          </a:xfrm>
+          <a:prstGeom prst="rect">
+            <a:avLst/>
+          </a:prstGeom>
+          <a:noFill/>
+        </p:spPr>
+        <p:txBody>
+          <a:bodyPr wrap="square" lIns="45720" rIns="45720" tIns="27432" bIns="27432" anchor="t">
+            <a:spAutoFit/>
+          </a:bodyPr>
+          <a:lstStyle/>
+          <a:p>
+            <a:pPr algn="l">
+              <a:lnSpc>
+                <a:spcPct val="110000"/>
+              </a:lnSpc>
+            </a:pPr>
+            <a:r>
+              <a:rPr sz="1600" b="1" i="0">
+                <a:solidFill>
+                  <a:srgbClr val="2E7D5B"/>
+                </a:solidFill>
+                <a:latin typeface="Arial"/>
+              </a:rPr>
+              <a:t>Decisions to make</a:t>
+            </a:r>
+          </a:p>
+        </p:txBody>
+      </p:sp>
+      <p:sp>
+        <p:nvSpPr>
+          <p:cNvPr id="11" name="TextBox 10"/>
+          <p:cNvSpPr txBox="1"/>
+          <p:nvPr/>
+        </p:nvSpPr>
+        <p:spPr>
+          <a:xfrm>
+            <a:off x="7479792" y="1764792"/>
+            <a:ext cx="4178808" cy="3337560"/>
+          </a:xfrm>
+          <a:prstGeom prst="rect">
+            <a:avLst/>
+          </a:prstGeom>
+          <a:noFill/>
+        </p:spPr>
+        <p:txBody>
+          <a:bodyPr wrap="square" lIns="45720" rIns="45720">
+            <a:spAutoFit/>
+          </a:bodyPr>
+          <a:lstStyle/>
+          <a:p>
+            <a:pPr>
+              <a:lnSpc>
+                <a:spcPct val="108000"/>
+              </a:lnSpc>
+              <a:spcAft>
+                <a:spcPts val="200"/>
+              </a:spcAft>
+            </a:pPr>
+            <a:r>
+              <a:rPr sz="1500" b="0" i="0">
+                <a:solidFill>
+                  <a:srgbClr val="111111"/>
+                </a:solidFill>
+                <a:latin typeface="Arial"/>
+              </a:rPr>
+              <a:t>•  Opt-in plugin first?</a:t>
+            </a:r>
+          </a:p>
+          <a:p>
+            <a:pPr>
+              <a:lnSpc>
+                <a:spcPct val="108000"/>
+              </a:lnSpc>
+              <a:spcAft>
+                <a:spcPts val="200"/>
+              </a:spcAft>
+            </a:pPr>
+            <a:r>
+              <a:rPr sz="1500" b="0" i="0">
+                <a:solidFill>
+                  <a:srgbClr val="111111"/>
+                </a:solidFill>
+                <a:latin typeface="Arial"/>
+              </a:rPr>
+              <a:t>•  First benchmark for B3 vs B4?</a:t>
+            </a:r>
+          </a:p>
+          <a:p>
+            <a:pPr>
+              <a:lnSpc>
+                <a:spcPct val="108000"/>
+              </a:lnSpc>
+              <a:spcAft>
+                <a:spcPts val="200"/>
+              </a:spcAft>
+            </a:pPr>
+            <a:r>
+              <a:rPr sz="1500" b="0" i="0">
+                <a:solidFill>
+                  <a:srgbClr val="111111"/>
+                </a:solidFill>
+                <a:latin typeface="Arial"/>
+              </a:rPr>
+              <a:t>•  Who qualifies shared cases?</a:t>
+            </a:r>
+          </a:p>
+          <a:p>
+            <a:pPr>
+              <a:lnSpc>
+                <a:spcPct val="108000"/>
+              </a:lnSpc>
+              <a:spcAft>
+                <a:spcPts val="200"/>
+              </a:spcAft>
+            </a:pPr>
+            <a:r>
+              <a:rPr sz="1500" b="0" i="0">
+                <a:solidFill>
+                  <a:srgbClr val="111111"/>
+                </a:solidFill>
+                <a:latin typeface="Arial"/>
+              </a:rPr>
+              <a:t>•  Budget for Phases 2 and 3?</a:t>
+            </a:r>
+          </a:p>
+        </p:txBody>
+      </p:sp>
+      <p:sp>
+        <p:nvSpPr>
+          <p:cNvPr id="12" name="Rounded Rectangle 11"/>
+          <p:cNvSpPr/>
+          <p:nvPr/>
+        </p:nvSpPr>
+        <p:spPr>
+          <a:xfrm>
+            <a:off x="457200" y="5440680"/>
+            <a:ext cx="11277295" cy="822960"/>
+          </a:xfrm>
+          <a:prstGeom prst="roundRect">
+            <a:avLst>
+              <a:gd name="adj" fmla="val 6000"/>
+            </a:avLst>
+          </a:prstGeom>
+          <a:solidFill>
+            <a:srgbClr val="FFF2CC"/>
+          </a:solidFill>
+          <a:ln>
+            <a:noFill/>
+          </a:ln>
+          <a:effectLst/>
+        </p:spPr>
+        <p:style>
+          <a:lnRef idx="1">
+            <a:schemeClr val="accent1"/>
+          </a:lnRef>
+          <a:fillRef idx="3">
+            <a:schemeClr val="accent1"/>
+          </a:fillRef>
+          <a:effectRef idx="2">
+            <a:schemeClr val="accent1"/>
+          </a:effectRef>
+          <a:fontRef idx="minor">
+            <a:schemeClr val="lt1"/>
+          </a:fontRef>
+        </p:style>
+        <p:txBody>
+          <a:bodyPr rtlCol="0" anchor="ctr"/>
+          <a:lstStyle/>
+          <a:p/>
+        </p:txBody>
+      </p:sp>
+      <p:sp>
+        <p:nvSpPr>
+          <p:cNvPr id="13" name="TextBox 12"/>
+          <p:cNvSpPr txBox="1"/>
+          <p:nvPr/>
+        </p:nvSpPr>
+        <p:spPr>
+          <a:xfrm>
+            <a:off x="685800" y="5513832"/>
+            <a:ext cx="10820095" cy="676656"/>
+          </a:xfrm>
+          <a:prstGeom prst="rect">
+            <a:avLst/>
+          </a:prstGeom>
+          <a:noFill/>
+        </p:spPr>
+        <p:txBody>
+          <a:bodyPr wrap="square" lIns="45720" rIns="45720" tIns="27432" bIns="27432" anchor="ctr">
+            <a:spAutoFit/>
+          </a:bodyPr>
+          <a:lstStyle/>
+          <a:p>
+            <a:pPr algn="l">
+              <a:lnSpc>
+                <a:spcPct val="115000"/>
+              </a:lnSpc>
+            </a:pPr>
+            <a:r>
+              <a:rPr sz="1400" b="0" i="0">
+                <a:solidFill>
+                  <a:srgbClr val="111111"/>
+                </a:solidFill>
+                <a:latin typeface="Arial"/>
+              </a:rPr>
+              <a:t>No benchmark-level safety or utility improvement has been measured. The figures are design overviews, not results.</a:t>
+            </a:r>
+          </a:p>
+        </p:txBody>
+      </p:sp>
+    </p:spTree>
+  </p:cSld>
+  <p:clrMapOvr>
+    <a:masterClrMapping/>
+  </p:clrMapOvr>
+</p:sld>
+</file>
+
+<file path=ppt/slides/slide34.xml><?xml version="1.0" encoding="utf-8"?>
+<p:sld xmlns:a="http://schemas.openxmlformats.org/drawingml/2006/main" xmlns:p="http://schemas.openxmlformats.org/presentationml/2006/main" xmlns:r="http://schemas.openxmlformats.org/officeDocument/2006/relationships">
+  <p:cSld>
+    <p:spTree>
+      <p:nvGrpSpPr>
+        <p:cNvPr id="1" name=""/>
+        <p:cNvGrpSpPr/>
+        <p:nvPr/>
+      </p:nvGrpSpPr>
+      <p:grpSpPr/>
+      <p:sp>
+        <p:nvSpPr>
+          <p:cNvPr id="2" name="Rectangle 1"/>
+          <p:cNvSpPr/>
+          <p:nvPr/>
+        </p:nvSpPr>
+        <p:spPr>
+          <a:xfrm>
+            <a:off x="457200" y="384048"/>
+            <a:ext cx="82296" cy="566928"/>
+          </a:xfrm>
+          <a:prstGeom prst="rect">
+            <a:avLst/>
+          </a:prstGeom>
+          <a:solidFill>
+            <a:srgbClr val="365E9E"/>
+          </a:solidFill>
+          <a:ln>
+            <a:noFill/>
+          </a:ln>
+          <a:effectLst/>
+        </p:spPr>
+        <p:style>
+          <a:lnRef idx="1">
+            <a:schemeClr val="accent1"/>
+          </a:lnRef>
+          <a:fillRef idx="3">
+            <a:schemeClr val="accent1"/>
+          </a:fillRef>
+          <a:effectRef idx="2">
+            <a:schemeClr val="accent1"/>
+          </a:effectRef>
+          <a:fontRef idx="minor">
+            <a:schemeClr val="lt1"/>
+          </a:fontRef>
+        </p:style>
+        <p:txBody>
+          <a:bodyPr rtlCol="0" anchor="ctr"/>
+          <a:lstStyle/>
+          <a:p/>
+        </p:txBody>
+      </p:sp>
+      <p:sp>
+        <p:nvSpPr>
+          <p:cNvPr id="3" name="TextBox 2"/>
+          <p:cNvSpPr txBox="1"/>
+          <p:nvPr/>
+        </p:nvSpPr>
+        <p:spPr>
+          <a:xfrm>
+            <a:off x="640080" y="301752"/>
+            <a:ext cx="10515600" cy="548640"/>
+          </a:xfrm>
+          <a:prstGeom prst="rect">
+            <a:avLst/>
+          </a:prstGeom>
+          <a:noFill/>
+        </p:spPr>
+        <p:txBody>
+          <a:bodyPr wrap="square" lIns="45720" rIns="45720" tIns="27432" bIns="27432" anchor="ctr">
+            <a:spAutoFit/>
+          </a:bodyPr>
+          <a:lstStyle/>
+          <a:p>
+            <a:pPr algn="l">
+              <a:lnSpc>
+                <a:spcPct val="110000"/>
+              </a:lnSpc>
+            </a:pPr>
+            <a:r>
+              <a:rPr sz="2600" b="1" i="0">
+                <a:solidFill>
+                  <a:srgbClr val="111111"/>
+                </a:solidFill>
+                <a:latin typeface="Arial"/>
+              </a:rPr>
+              <a:t>References</a:t>
+            </a:r>
+          </a:p>
+        </p:txBody>
+      </p:sp>
+      <p:sp>
+        <p:nvSpPr>
+          <p:cNvPr id="4" name="TextBox 3"/>
+          <p:cNvSpPr txBox="1"/>
+          <p:nvPr/>
+        </p:nvSpPr>
+        <p:spPr>
+          <a:xfrm>
+            <a:off x="8503920" y="109728"/>
+            <a:ext cx="3200400" cy="274320"/>
+          </a:xfrm>
+          <a:prstGeom prst="rect">
+            <a:avLst/>
+          </a:prstGeom>
+          <a:noFill/>
+        </p:spPr>
+        <p:txBody>
+          <a:bodyPr wrap="square" lIns="45720" rIns="45720" tIns="27432" bIns="27432" anchor="t">
+            <a:spAutoFit/>
+          </a:bodyPr>
+          <a:lstStyle/>
+          <a:p>
+            <a:pPr algn="r">
+              <a:lnSpc>
+                <a:spcPct val="110000"/>
+              </a:lnSpc>
+            </a:pPr>
+            <a:r>
+              <a:rPr sz="900" b="1" i="0">
+                <a:solidFill>
+                  <a:srgbClr val="365E9E"/>
+                </a:solidFill>
+                <a:latin typeface="Arial"/>
+              </a:rPr>
+              <a:t>REFERENCES</a:t>
+            </a:r>
+          </a:p>
+        </p:txBody>
+      </p:sp>
+      <p:cxnSp>
+        <p:nvCxnSpPr>
+          <p:cNvPr id="5" name="Connector 4"/>
+          <p:cNvCxnSpPr/>
+          <p:nvPr/>
+        </p:nvCxnSpPr>
+        <p:spPr>
+          <a:xfrm>
+            <a:off x="457200" y="6446520"/>
+            <a:ext cx="11277295" cy="0"/>
+          </a:xfrm>
+          <a:prstGeom prst="line">
+            <a:avLst/>
+          </a:prstGeom>
+          <a:ln w="6350">
+            <a:solidFill>
+              <a:srgbClr val="C9C9C9"/>
+            </a:solidFill>
+          </a:ln>
+        </p:spPr>
+        <p:style>
+          <a:lnRef idx="2">
+            <a:schemeClr val="accent1"/>
+          </a:lnRef>
+          <a:fillRef idx="0">
+            <a:schemeClr val="accent1"/>
+          </a:fillRef>
+          <a:effectRef idx="1">
+            <a:schemeClr val="accent1"/>
+          </a:effectRef>
+          <a:fontRef idx="minor">
+            <a:schemeClr val="tx1"/>
+          </a:fontRef>
+        </p:style>
+      </p:cxnSp>
+      <p:sp>
+        <p:nvSpPr>
+          <p:cNvPr id="6" name="TextBox 5"/>
+          <p:cNvSpPr txBox="1"/>
+          <p:nvPr/>
+        </p:nvSpPr>
+        <p:spPr>
+          <a:xfrm>
+            <a:off x="457200" y="6473952"/>
+            <a:ext cx="10058400" cy="274320"/>
+          </a:xfrm>
+          <a:prstGeom prst="rect">
+            <a:avLst/>
+          </a:prstGeom>
+          <a:noFill/>
+        </p:spPr>
+        <p:txBody>
+          <a:bodyPr wrap="square" lIns="45720" rIns="45720" tIns="27432" bIns="27432" anchor="t">
+            <a:spAutoFit/>
+          </a:bodyPr>
+          <a:lstStyle/>
+          <a:p>
+            <a:pPr algn="l">
+              <a:lnSpc>
+                <a:spcPct val="110000"/>
+              </a:lnSpc>
+            </a:pPr>
+            <a:r>
+              <a:rPr sz="800" b="0" i="0">
+                <a:solidFill>
+                  <a:srgbClr val="666666"/>
+                </a:solidFill>
+                <a:latin typeface="Arial"/>
+              </a:rPr>
+              <a:t>Incident-aware optimization · design proposal · containment-extension · October 2026 · no benchmark improvement measured</a:t>
+            </a:r>
+          </a:p>
+        </p:txBody>
+      </p:sp>
+      <p:sp>
+        <p:nvSpPr>
+          <p:cNvPr id="7" name="TextBox 6"/>
+          <p:cNvSpPr txBox="1"/>
+          <p:nvPr/>
+        </p:nvSpPr>
+        <p:spPr>
+          <a:xfrm>
+            <a:off x="10820095" y="6473952"/>
+            <a:ext cx="914400" cy="274320"/>
+          </a:xfrm>
+          <a:prstGeom prst="rect">
+            <a:avLst/>
+          </a:prstGeom>
+          <a:noFill/>
+        </p:spPr>
+        <p:txBody>
+          <a:bodyPr wrap="square" lIns="45720" rIns="45720" tIns="27432" bIns="27432" anchor="t">
+            <a:spAutoFit/>
+          </a:bodyPr>
+          <a:lstStyle/>
+          <a:p>
+            <a:pPr algn="r">
+              <a:lnSpc>
+                <a:spcPct val="110000"/>
+              </a:lnSpc>
+            </a:pPr>
+            <a:r>
+              <a:rPr sz="900" b="0" i="0">
+                <a:solidFill>
+                  <a:srgbClr val="666666"/>
+                </a:solidFill>
+                <a:latin typeface="Arial"/>
+              </a:rPr>
+              <a:t>34</a:t>
+            </a:r>
+          </a:p>
+        </p:txBody>
+      </p:sp>
+      <p:sp>
+        <p:nvSpPr>
+          <p:cNvPr id="8" name="TextBox 7"/>
+          <p:cNvSpPr txBox="1"/>
+          <p:nvPr/>
+        </p:nvSpPr>
+        <p:spPr>
+          <a:xfrm>
+            <a:off x="457200" y="1325880"/>
+            <a:ext cx="5577840" cy="4937760"/>
+          </a:xfrm>
+          <a:prstGeom prst="rect">
+            <a:avLst/>
+          </a:prstGeom>
+          <a:noFill/>
+        </p:spPr>
+        <p:txBody>
+          <a:bodyPr wrap="square" lIns="45720" rIns="45720">
+            <a:spAutoFit/>
+          </a:bodyPr>
+          <a:lstStyle/>
+          <a:p>
+            <a:pPr>
+              <a:lnSpc>
+                <a:spcPct val="105000"/>
+              </a:lnSpc>
+              <a:spcAft>
+                <a:spcPts val="500"/>
+              </a:spcAft>
+            </a:pPr>
+            <a:r>
+              <a:rPr sz="1100" b="0" i="0">
+                <a:solidFill>
+                  <a:srgbClr val="111111"/>
+                </a:solidFill>
+                <a:latin typeface="Arial"/>
+              </a:rPr>
+              <a:t>•  Greenblatt et al. (2023). AI Control: Improving Safety Despite Intentional Subversion. arXiv:2312.06942</a:t>
+            </a:r>
+          </a:p>
+          <a:p>
+            <a:pPr>
+              <a:lnSpc>
+                <a:spcPct val="105000"/>
+              </a:lnSpc>
+              <a:spcAft>
+                <a:spcPts val="500"/>
+              </a:spcAft>
+            </a:pPr>
+            <a:r>
+              <a:rPr sz="1100" b="0" i="0">
+                <a:solidFill>
+                  <a:srgbClr val="111111"/>
+                </a:solidFill>
+                <a:latin typeface="Arial"/>
+              </a:rPr>
+              <a:t>•  Bhatt et al. (2025). Ctrl-Z: Controlling AI Agents via Resampling. arXiv:2504.10374</a:t>
+            </a:r>
+          </a:p>
+          <a:p>
+            <a:pPr>
+              <a:lnSpc>
+                <a:spcPct val="105000"/>
+              </a:lnSpc>
+              <a:spcAft>
+                <a:spcPts val="500"/>
+              </a:spcAft>
+            </a:pPr>
+            <a:r>
+              <a:rPr sz="1100" b="0" i="0">
+                <a:solidFill>
+                  <a:srgbClr val="111111"/>
+                </a:solidFill>
+                <a:latin typeface="Arial"/>
+              </a:rPr>
+              <a:t>•  Kutasov et al. (2025). SHADE-Arena: Evaluating Sabotage and Monitoring in LLM Agents. arXiv:2506.15740</a:t>
+            </a:r>
+          </a:p>
+          <a:p>
+            <a:pPr>
+              <a:lnSpc>
+                <a:spcPct val="105000"/>
+              </a:lnSpc>
+              <a:spcAft>
+                <a:spcPts val="500"/>
+              </a:spcAft>
+            </a:pPr>
+            <a:r>
+              <a:rPr sz="1100" b="0" i="0">
+                <a:solidFill>
+                  <a:srgbClr val="111111"/>
+                </a:solidFill>
+                <a:latin typeface="Arial"/>
+              </a:rPr>
+              <a:t>•  Debenedetti et al. (2024). AgentDojo: A Dynamic Environment to Evaluate Prompt Injection Attacks and Defenses for LLM Agents. NeurIPS D&amp;B</a:t>
+            </a:r>
+          </a:p>
+          <a:p>
+            <a:pPr>
+              <a:lnSpc>
+                <a:spcPct val="105000"/>
+              </a:lnSpc>
+              <a:spcAft>
+                <a:spcPts val="500"/>
+              </a:spcAft>
+            </a:pPr>
+            <a:r>
+              <a:rPr sz="1100" b="0" i="0">
+                <a:solidFill>
+                  <a:srgbClr val="111111"/>
+                </a:solidFill>
+                <a:latin typeface="Arial"/>
+              </a:rPr>
+              <a:t>•  Zhong, Raghunathan, Carlini (2025). ImpossibleBench: Measuring LLMs' Propensity of Exploiting Test Cases. arXiv:2510.20270</a:t>
+            </a:r>
+          </a:p>
+          <a:p>
+            <a:pPr>
+              <a:lnSpc>
+                <a:spcPct val="105000"/>
+              </a:lnSpc>
+              <a:spcAft>
+                <a:spcPts val="500"/>
+              </a:spcAft>
+            </a:pPr>
+            <a:r>
+              <a:rPr sz="1100" b="0" i="0">
+                <a:solidFill>
+                  <a:srgbClr val="111111"/>
+                </a:solidFill>
+                <a:latin typeface="Arial"/>
+              </a:rPr>
+              <a:t>•  ResearchArena (aisa-group, 2025). github.com/aisa-group/ResearchArena</a:t>
+            </a:r>
+          </a:p>
+          <a:p>
+            <a:pPr>
+              <a:lnSpc>
+                <a:spcPct val="105000"/>
+              </a:lnSpc>
+              <a:spcAft>
+                <a:spcPts val="500"/>
+              </a:spcAft>
+            </a:pPr>
+            <a:r>
+              <a:rPr sz="1100" b="0" i="0">
+                <a:solidFill>
+                  <a:srgbClr val="111111"/>
+                </a:solidFill>
+                <a:latin typeface="Arial"/>
+              </a:rPr>
+              <a:t>•  Baker et al. (2025). Monitoring Reasoning Models for Misbehavior and the Risks of Promoting Obfuscation. arXiv:2503.11926</a:t>
+            </a:r>
+          </a:p>
+          <a:p>
+            <a:pPr>
+              <a:lnSpc>
+                <a:spcPct val="105000"/>
+              </a:lnSpc>
+              <a:spcAft>
+                <a:spcPts val="500"/>
+              </a:spcAft>
+            </a:pPr>
+            <a:r>
+              <a:rPr sz="1100" b="0" i="0">
+                <a:solidFill>
+                  <a:srgbClr val="111111"/>
+                </a:solidFill>
+                <a:latin typeface="Arial"/>
+              </a:rPr>
+              <a:t>•  Slattery et al. (2024). The AI Risk Repository. MIT. arXiv:2408.12622</a:t>
+            </a:r>
+          </a:p>
+        </p:txBody>
+      </p:sp>
+      <p:sp>
+        <p:nvSpPr>
+          <p:cNvPr id="9" name="TextBox 8"/>
+          <p:cNvSpPr txBox="1"/>
+          <p:nvPr/>
+        </p:nvSpPr>
+        <p:spPr>
+          <a:xfrm>
+            <a:off x="6263640" y="1325880"/>
+            <a:ext cx="5486400" cy="4937760"/>
+          </a:xfrm>
+          <a:prstGeom prst="rect">
+            <a:avLst/>
+          </a:prstGeom>
+          <a:noFill/>
+        </p:spPr>
+        <p:txBody>
+          <a:bodyPr wrap="square" lIns="45720" rIns="45720">
+            <a:spAutoFit/>
+          </a:bodyPr>
+          <a:lstStyle/>
+          <a:p>
+            <a:pPr>
+              <a:lnSpc>
+                <a:spcPct val="105000"/>
+              </a:lnSpc>
+              <a:spcAft>
+                <a:spcPts val="500"/>
+              </a:spcAft>
+            </a:pPr>
+            <a:r>
+              <a:rPr sz="1100" b="0" i="0">
+                <a:solidFill>
+                  <a:srgbClr val="111111"/>
+                </a:solidFill>
+                <a:latin typeface="Arial"/>
+              </a:rPr>
+              <a:t>•  UK AI Security Institute. Inspect AI: tool approval and approvers. inspect.aisi.org.uk</a:t>
+            </a:r>
+          </a:p>
+          <a:p>
+            <a:pPr>
+              <a:lnSpc>
+                <a:spcPct val="105000"/>
+              </a:lnSpc>
+              <a:spcAft>
+                <a:spcPts val="500"/>
+              </a:spcAft>
+            </a:pPr>
+            <a:r>
+              <a:rPr sz="1100" b="0" i="0">
+                <a:solidFill>
+                  <a:srgbClr val="111111"/>
+                </a:solidFill>
+                <a:latin typeface="Arial"/>
+              </a:rPr>
+              <a:t>•  UK AISI and Meridian Labs (2025). Inspect Scout: transcript analysis</a:t>
+            </a:r>
+          </a:p>
+          <a:p>
+            <a:pPr>
+              <a:lnSpc>
+                <a:spcPct val="105000"/>
+              </a:lnSpc>
+              <a:spcAft>
+                <a:spcPts val="500"/>
+              </a:spcAft>
+            </a:pPr>
+            <a:r>
+              <a:rPr sz="1100" b="0" i="0">
+                <a:solidFill>
+                  <a:srgbClr val="111111"/>
+                </a:solidFill>
+                <a:latin typeface="Arial"/>
+              </a:rPr>
+              <a:t>•  UK AISI (2025). ControlArena: monitors, micro-protocols, BashArena. control-arena.aisi.org.uk</a:t>
+            </a:r>
+          </a:p>
+          <a:p>
+            <a:pPr>
+              <a:lnSpc>
+                <a:spcPct val="105000"/>
+              </a:lnSpc>
+              <a:spcAft>
+                <a:spcPts val="500"/>
+              </a:spcAft>
+            </a:pPr>
+            <a:r>
+              <a:rPr sz="1100" b="0" i="0">
+                <a:solidFill>
+                  <a:srgbClr val="111111"/>
+                </a:solidFill>
+                <a:latin typeface="Arial"/>
+              </a:rPr>
+              <a:t>•  METR (2025). Hawk: run Inspect evals in the cloud. github.com/METR/hawk</a:t>
+            </a:r>
+          </a:p>
+          <a:p>
+            <a:pPr>
+              <a:lnSpc>
+                <a:spcPct val="105000"/>
+              </a:lnSpc>
+              <a:spcAft>
+                <a:spcPts val="500"/>
+              </a:spcAft>
+            </a:pPr>
+            <a:r>
+              <a:rPr sz="1100" b="0" i="0">
+                <a:solidFill>
+                  <a:srgbClr val="111111"/>
+                </a:solidFill>
+                <a:latin typeface="Arial"/>
+              </a:rPr>
+              <a:t>•  McGregor (2021). Preventing Repeated Real World AI Failures by Cataloging Incidents: The AI Incident Database. AAAI</a:t>
+            </a:r>
+          </a:p>
+          <a:p>
+            <a:pPr>
+              <a:lnSpc>
+                <a:spcPct val="105000"/>
+              </a:lnSpc>
+              <a:spcAft>
+                <a:spcPts val="500"/>
+              </a:spcAft>
+            </a:pPr>
+            <a:r>
+              <a:rPr sz="1100" b="0" i="0">
+                <a:solidFill>
+                  <a:srgbClr val="111111"/>
+                </a:solidFill>
+                <a:latin typeface="Arial"/>
+              </a:rPr>
+              <a:t>•  OECD (2023). AI Incident Monitor. MITRE ATLAS. OWASP Top 10 for LLM and Agentic Applications</a:t>
+            </a:r>
+          </a:p>
+          <a:p>
+            <a:pPr>
+              <a:lnSpc>
+                <a:spcPct val="105000"/>
+              </a:lnSpc>
+              <a:spcAft>
+                <a:spcPts val="500"/>
+              </a:spcAft>
+            </a:pPr>
+            <a:r>
+              <a:rPr sz="1100" b="0" i="0">
+                <a:solidFill>
+                  <a:srgbClr val="111111"/>
+                </a:solidFill>
+                <a:latin typeface="Arial"/>
+              </a:rPr>
+              <a:t>•  Perrow (1984). Normal Accidents. Reason (1990). Human Error. Taleb (2007). The Black Swan. Popper (1963). Conjectures and Refutations</a:t>
+            </a:r>
+          </a:p>
+          <a:p>
+            <a:pPr>
+              <a:lnSpc>
+                <a:spcPct val="105000"/>
+              </a:lnSpc>
+              <a:spcAft>
+                <a:spcPts val="500"/>
+              </a:spcAft>
+            </a:pPr>
+            <a:r>
+              <a:rPr sz="1100" b="0" i="0">
+                <a:solidFill>
+                  <a:srgbClr val="111111"/>
+                </a:solidFill>
+                <a:latin typeface="Arial"/>
+              </a:rPr>
+              <a:t>•  EU AI Act, Article 73. California SB 53 (2025)</a:t>
+            </a:r>
+          </a:p>
+        </p:txBody>
+      </p:sp>
+    </p:spTree>
+  </p:cSld>
+  <p:clrMapOvr>
+    <a:masterClrMapping/>
+  </p:clrMapOvr>
+</p:sld>
+</file>
+
+<file path=ppt/slides/slide35.xml><?xml version="1.0" encoding="utf-8"?>
+<p:sld xmlns:a="http://schemas.openxmlformats.org/drawingml/2006/main" xmlns:p="http://schemas.openxmlformats.org/presentationml/2006/main" xmlns:r="http://schemas.openxmlformats.org/officeDocument/2006/relationships">
+  <p:cSld>
+    <p:spTree>
+      <p:nvGrpSpPr>
+        <p:cNvPr id="1" name=""/>
+        <p:cNvGrpSpPr/>
+        <p:nvPr/>
+      </p:nvGrpSpPr>
+      <p:grpSpPr/>
+      <p:sp>
+        <p:nvSpPr>
+          <p:cNvPr id="2" name="Rectangle 1"/>
+          <p:cNvSpPr/>
+          <p:nvPr/>
+        </p:nvSpPr>
+        <p:spPr>
+          <a:xfrm>
+            <a:off x="457200" y="384048"/>
+            <a:ext cx="82296" cy="566928"/>
+          </a:xfrm>
+          <a:prstGeom prst="rect">
+            <a:avLst/>
+          </a:prstGeom>
+          <a:solidFill>
+            <a:srgbClr val="365E9E"/>
+          </a:solidFill>
+          <a:ln>
+            <a:noFill/>
+          </a:ln>
+          <a:effectLst/>
+        </p:spPr>
+        <p:style>
+          <a:lnRef idx="1">
+            <a:schemeClr val="accent1"/>
+          </a:lnRef>
+          <a:fillRef idx="3">
+            <a:schemeClr val="accent1"/>
+          </a:fillRef>
+          <a:effectRef idx="2">
+            <a:schemeClr val="accent1"/>
+          </a:effectRef>
+          <a:fontRef idx="minor">
+            <a:schemeClr val="lt1"/>
+          </a:fontRef>
+        </p:style>
+        <p:txBody>
+          <a:bodyPr rtlCol="0" anchor="ctr"/>
+          <a:lstStyle/>
+          <a:p/>
+        </p:txBody>
+      </p:sp>
+      <p:sp>
+        <p:nvSpPr>
+          <p:cNvPr id="3" name="TextBox 2"/>
+          <p:cNvSpPr txBox="1"/>
+          <p:nvPr/>
+        </p:nvSpPr>
+        <p:spPr>
+          <a:xfrm>
+            <a:off x="640080" y="301752"/>
+            <a:ext cx="10515600" cy="548640"/>
+          </a:xfrm>
+          <a:prstGeom prst="rect">
+            <a:avLst/>
+          </a:prstGeom>
+          <a:noFill/>
+        </p:spPr>
+        <p:txBody>
+          <a:bodyPr wrap="square" lIns="45720" rIns="45720" tIns="27432" bIns="27432" anchor="ctr">
+            <a:spAutoFit/>
+          </a:bodyPr>
+          <a:lstStyle/>
+          <a:p>
+            <a:pPr algn="l">
+              <a:lnSpc>
+                <a:spcPct val="110000"/>
+              </a:lnSpc>
+            </a:pPr>
+            <a:r>
+              <a:rPr sz="2600" b="1" i="0">
+                <a:solidFill>
+                  <a:srgbClr val="111111"/>
+                </a:solidFill>
+                <a:latin typeface="Arial"/>
+              </a:rPr>
+              <a:t>References: incidents</a:t>
+            </a:r>
+          </a:p>
+        </p:txBody>
+      </p:sp>
+      <p:sp>
+        <p:nvSpPr>
+          <p:cNvPr id="4" name="TextBox 3"/>
+          <p:cNvSpPr txBox="1"/>
+          <p:nvPr/>
+        </p:nvSpPr>
+        <p:spPr>
+          <a:xfrm>
+            <a:off x="8503920" y="109728"/>
+            <a:ext cx="3200400" cy="274320"/>
+          </a:xfrm>
+          <a:prstGeom prst="rect">
+            <a:avLst/>
+          </a:prstGeom>
+          <a:noFill/>
+        </p:spPr>
+        <p:txBody>
+          <a:bodyPr wrap="square" lIns="45720" rIns="45720" tIns="27432" bIns="27432" anchor="t">
+            <a:spAutoFit/>
+          </a:bodyPr>
+          <a:lstStyle/>
+          <a:p>
+            <a:pPr algn="r">
+              <a:lnSpc>
+                <a:spcPct val="110000"/>
+              </a:lnSpc>
+            </a:pPr>
+            <a:r>
+              <a:rPr sz="900" b="1" i="0">
+                <a:solidFill>
+                  <a:srgbClr val="365E9E"/>
+                </a:solidFill>
+                <a:latin typeface="Arial"/>
+              </a:rPr>
+              <a:t>REFERENCES</a:t>
+            </a:r>
+          </a:p>
+        </p:txBody>
+      </p:sp>
+      <p:cxnSp>
+        <p:nvCxnSpPr>
+          <p:cNvPr id="5" name="Connector 4"/>
+          <p:cNvCxnSpPr/>
+          <p:nvPr/>
+        </p:nvCxnSpPr>
+        <p:spPr>
+          <a:xfrm>
+            <a:off x="457200" y="6446520"/>
+            <a:ext cx="11277295" cy="0"/>
+          </a:xfrm>
+          <a:prstGeom prst="line">
+            <a:avLst/>
+          </a:prstGeom>
+          <a:ln w="6350">
+            <a:solidFill>
+              <a:srgbClr val="C9C9C9"/>
+            </a:solidFill>
+          </a:ln>
+        </p:spPr>
+        <p:style>
+          <a:lnRef idx="2">
+            <a:schemeClr val="accent1"/>
+          </a:lnRef>
+          <a:fillRef idx="0">
+            <a:schemeClr val="accent1"/>
+          </a:fillRef>
+          <a:effectRef idx="1">
+            <a:schemeClr val="accent1"/>
+          </a:effectRef>
+          <a:fontRef idx="minor">
+            <a:schemeClr val="tx1"/>
+          </a:fontRef>
+        </p:style>
+      </p:cxnSp>
+      <p:sp>
+        <p:nvSpPr>
+          <p:cNvPr id="6" name="TextBox 5"/>
+          <p:cNvSpPr txBox="1"/>
+          <p:nvPr/>
+        </p:nvSpPr>
+        <p:spPr>
+          <a:xfrm>
+            <a:off x="457200" y="6473952"/>
+            <a:ext cx="10058400" cy="274320"/>
+          </a:xfrm>
+          <a:prstGeom prst="rect">
+            <a:avLst/>
+          </a:prstGeom>
+          <a:noFill/>
+        </p:spPr>
+        <p:txBody>
+          <a:bodyPr wrap="square" lIns="45720" rIns="45720" tIns="27432" bIns="27432" anchor="t">
+            <a:spAutoFit/>
+          </a:bodyPr>
+          <a:lstStyle/>
+          <a:p>
+            <a:pPr algn="l">
+              <a:lnSpc>
+                <a:spcPct val="110000"/>
+              </a:lnSpc>
+            </a:pPr>
+            <a:r>
+              <a:rPr sz="800" b="0" i="0">
+                <a:solidFill>
+                  <a:srgbClr val="666666"/>
+                </a:solidFill>
+                <a:latin typeface="Arial"/>
+              </a:rPr>
+              <a:t>Incident-aware optimization · design proposal · containment-extension · October 2026 · no benchmark improvement measured</a:t>
+            </a:r>
+          </a:p>
+        </p:txBody>
+      </p:sp>
+      <p:sp>
+        <p:nvSpPr>
+          <p:cNvPr id="7" name="TextBox 6"/>
+          <p:cNvSpPr txBox="1"/>
+          <p:nvPr/>
+        </p:nvSpPr>
+        <p:spPr>
+          <a:xfrm>
+            <a:off x="10820095" y="6473952"/>
+            <a:ext cx="914400" cy="274320"/>
+          </a:xfrm>
+          <a:prstGeom prst="rect">
+            <a:avLst/>
+          </a:prstGeom>
+          <a:noFill/>
+        </p:spPr>
+        <p:txBody>
+          <a:bodyPr wrap="square" lIns="45720" rIns="45720" tIns="27432" bIns="27432" anchor="t">
+            <a:spAutoFit/>
+          </a:bodyPr>
+          <a:lstStyle/>
+          <a:p>
+            <a:pPr algn="r">
+              <a:lnSpc>
+                <a:spcPct val="110000"/>
+              </a:lnSpc>
+            </a:pPr>
+            <a:r>
+              <a:rPr sz="900" b="0" i="0">
+                <a:solidFill>
+                  <a:srgbClr val="666666"/>
+                </a:solidFill>
+                <a:latin typeface="Arial"/>
+              </a:rPr>
+              <a:t>35</a:t>
+            </a:r>
+          </a:p>
+        </p:txBody>
+      </p:sp>
+      <p:sp>
+        <p:nvSpPr>
+          <p:cNvPr id="8" name="TextBox 7"/>
+          <p:cNvSpPr txBox="1"/>
+          <p:nvPr/>
+        </p:nvSpPr>
+        <p:spPr>
+          <a:xfrm>
+            <a:off x="457200" y="1325880"/>
+            <a:ext cx="5577840" cy="4937760"/>
+          </a:xfrm>
+          <a:prstGeom prst="rect">
+            <a:avLst/>
+          </a:prstGeom>
+          <a:noFill/>
+        </p:spPr>
+        <p:txBody>
+          <a:bodyPr wrap="square" lIns="45720" rIns="45720">
+            <a:spAutoFit/>
+          </a:bodyPr>
+          <a:lstStyle/>
+          <a:p>
+            <a:pPr>
+              <a:lnSpc>
+                <a:spcPct val="105000"/>
+              </a:lnSpc>
+              <a:spcAft>
+                <a:spcPts val="500"/>
+              </a:spcAft>
+            </a:pPr>
+            <a:r>
+              <a:rPr sz="1100" b="0" i="0">
+                <a:solidFill>
+                  <a:srgbClr val="111111"/>
+                </a:solidFill>
+                <a:latin typeface="Arial"/>
+              </a:rPr>
+              <a:t>•  Sakana AI (Aug 2024). The AI Scientist. sakana.ai/ai-scientist; coverage: Ars Technica</a:t>
+            </a:r>
+          </a:p>
+          <a:p>
+            <a:pPr>
+              <a:lnSpc>
+                <a:spcPct val="105000"/>
+              </a:lnSpc>
+              <a:spcAft>
+                <a:spcPts val="500"/>
+              </a:spcAft>
+            </a:pPr>
+            <a:r>
+              <a:rPr sz="1100" b="0" i="0">
+                <a:solidFill>
+                  <a:srgbClr val="111111"/>
+                </a:solidFill>
+                <a:latin typeface="Arial"/>
+              </a:rPr>
+              <a:t>•  OpenAI (Dec 2024). o1 System Card, Apollo Research scheming evaluations. cdn.openai.com/o1-system-card-20241205.pdf</a:t>
+            </a:r>
+          </a:p>
+          <a:p>
+            <a:pPr>
+              <a:lnSpc>
+                <a:spcPct val="105000"/>
+              </a:lnSpc>
+              <a:spcAft>
+                <a:spcPts val="500"/>
+              </a:spcAft>
+            </a:pPr>
+            <a:r>
+              <a:rPr sz="1100" b="0" i="0">
+                <a:solidFill>
+                  <a:srgbClr val="111111"/>
+                </a:solidFill>
+                <a:latin typeface="Arial"/>
+              </a:rPr>
+              <a:t>•  Palisade Research (Dec 2024, Feb 2025). o1-preview hacks its chess environment. x.com/PalisadeAI; MIT Technology Review</a:t>
+            </a:r>
+          </a:p>
+          <a:p>
+            <a:pPr>
+              <a:lnSpc>
+                <a:spcPct val="105000"/>
+              </a:lnSpc>
+              <a:spcAft>
+                <a:spcPts val="500"/>
+              </a:spcAft>
+            </a:pPr>
+            <a:r>
+              <a:rPr sz="1100" b="0" i="0">
+                <a:solidFill>
+                  <a:srgbClr val="111111"/>
+                </a:solidFill>
+                <a:latin typeface="Arial"/>
+              </a:rPr>
+              <a:t>•  Baker et al., OpenAI (Mar 2025). Monitoring Reasoning Models for Misbehavior. arXiv:2503.11926</a:t>
+            </a:r>
+          </a:p>
+          <a:p>
+            <a:pPr>
+              <a:lnSpc>
+                <a:spcPct val="105000"/>
+              </a:lnSpc>
+              <a:spcAft>
+                <a:spcPts val="500"/>
+              </a:spcAft>
+            </a:pPr>
+            <a:r>
+              <a:rPr sz="1100" b="0" i="0">
+                <a:solidFill>
+                  <a:srgbClr val="111111"/>
+                </a:solidFill>
+                <a:latin typeface="Arial"/>
+              </a:rPr>
+              <a:t>•  Palisade Research (May 2025). o3 sabotages shutdown in 7/100 runs. BleepingComputer, The Register</a:t>
+            </a:r>
+          </a:p>
+          <a:p>
+            <a:pPr>
+              <a:lnSpc>
+                <a:spcPct val="105000"/>
+              </a:lnSpc>
+              <a:spcAft>
+                <a:spcPts val="500"/>
+              </a:spcAft>
+            </a:pPr>
+            <a:r>
+              <a:rPr sz="1100" b="0" i="0">
+                <a:solidFill>
+                  <a:srgbClr val="111111"/>
+                </a:solidFill>
+                <a:latin typeface="Arial"/>
+              </a:rPr>
+              <a:t>•  Anthropic (May 2025). System Card: Claude Opus 4 and Sonnet 4. anthropic.com/claude-4-system-card</a:t>
+            </a:r>
+          </a:p>
+          <a:p>
+            <a:pPr>
+              <a:lnSpc>
+                <a:spcPct val="105000"/>
+              </a:lnSpc>
+              <a:spcAft>
+                <a:spcPts val="500"/>
+              </a:spcAft>
+            </a:pPr>
+            <a:r>
+              <a:rPr sz="1100" b="0" i="0">
+                <a:solidFill>
+                  <a:srgbClr val="111111"/>
+                </a:solidFill>
+                <a:latin typeface="Arial"/>
+              </a:rPr>
+              <a:t>•  Anthropic (Jun 2025). Agentic Misalignment: How LLMs Could Be Insider Threats</a:t>
+            </a:r>
+          </a:p>
+        </p:txBody>
+      </p:sp>
+      <p:sp>
+        <p:nvSpPr>
+          <p:cNvPr id="9" name="TextBox 8"/>
+          <p:cNvSpPr txBox="1"/>
+          <p:nvPr/>
+        </p:nvSpPr>
+        <p:spPr>
+          <a:xfrm>
+            <a:off x="6263640" y="1325880"/>
+            <a:ext cx="5486400" cy="4937760"/>
+          </a:xfrm>
+          <a:prstGeom prst="rect">
+            <a:avLst/>
+          </a:prstGeom>
+          <a:noFill/>
+        </p:spPr>
+        <p:txBody>
+          <a:bodyPr wrap="square" lIns="45720" rIns="45720">
+            <a:spAutoFit/>
+          </a:bodyPr>
+          <a:lstStyle/>
+          <a:p>
+            <a:pPr>
+              <a:lnSpc>
+                <a:spcPct val="105000"/>
+              </a:lnSpc>
+              <a:spcAft>
+                <a:spcPts val="500"/>
+              </a:spcAft>
+            </a:pPr>
+            <a:r>
+              <a:rPr sz="1100" b="0" i="0">
+                <a:solidFill>
+                  <a:srgbClr val="111111"/>
+                </a:solidFill>
+                <a:latin typeface="Arial"/>
+              </a:rPr>
+              <a:t>•  Invariant Labs (May 2025). GitHub MCP private-repository exfiltration. github/github-mcp-server issue #844</a:t>
+            </a:r>
+          </a:p>
+          <a:p>
+            <a:pPr>
+              <a:lnSpc>
+                <a:spcPct val="105000"/>
+              </a:lnSpc>
+              <a:spcAft>
+                <a:spcPts val="500"/>
+              </a:spcAft>
+            </a:pPr>
+            <a:r>
+              <a:rPr sz="1100" b="0" i="0">
+                <a:solidFill>
+                  <a:srgbClr val="111111"/>
+                </a:solidFill>
+                <a:latin typeface="Arial"/>
+              </a:rPr>
+              <a:t>•  SaaStr / Replit (Jul 2025). Production database deleted during code freeze. Slashdot, Fortune</a:t>
+            </a:r>
+          </a:p>
+          <a:p>
+            <a:pPr>
+              <a:lnSpc>
+                <a:spcPct val="105000"/>
+              </a:lnSpc>
+              <a:spcAft>
+                <a:spcPts val="500"/>
+              </a:spcAft>
+            </a:pPr>
+            <a:r>
+              <a:rPr sz="1100" b="0" i="0">
+                <a:solidFill>
+                  <a:srgbClr val="111111"/>
+                </a:solidFill>
+                <a:latin typeface="Arial"/>
+              </a:rPr>
+              <a:t>•  AWS; 404 Media (Jul 2025). Amazon Q Developer extension 1.84.0 wiper prompt. SC Media</a:t>
+            </a:r>
+          </a:p>
+          <a:p>
+            <a:pPr>
+              <a:lnSpc>
+                <a:spcPct val="105000"/>
+              </a:lnSpc>
+              <a:spcAft>
+                <a:spcPts val="500"/>
+              </a:spcAft>
+            </a:pPr>
+            <a:r>
+              <a:rPr sz="1100" b="0" i="0">
+                <a:solidFill>
+                  <a:srgbClr val="111111"/>
+                </a:solidFill>
+                <a:latin typeface="Arial"/>
+              </a:rPr>
+              <a:t>•  AI Incident Database (Jul 2025). Incident 1178: Gemini CLI deletes user files. incidentdatabase.ai/cite/1178</a:t>
+            </a:r>
+          </a:p>
+          <a:p>
+            <a:pPr>
+              <a:lnSpc>
+                <a:spcPct val="105000"/>
+              </a:lnSpc>
+              <a:spcAft>
+                <a:spcPts val="500"/>
+              </a:spcAft>
+            </a:pPr>
+            <a:r>
+              <a:rPr sz="1100" b="0" i="0">
+                <a:solidFill>
+                  <a:srgbClr val="111111"/>
+                </a:solidFill>
+                <a:latin typeface="Arial"/>
+              </a:rPr>
+              <a:t>•  Brave Security (Aug 2025). Indirect prompt injection in Perplexity Comet. brave.com/blog</a:t>
+            </a:r>
+          </a:p>
+          <a:p>
+            <a:pPr>
+              <a:lnSpc>
+                <a:spcPct val="105000"/>
+              </a:lnSpc>
+              <a:spcAft>
+                <a:spcPts val="500"/>
+              </a:spcAft>
+            </a:pPr>
+            <a:r>
+              <a:rPr sz="1100" b="0" i="0">
+                <a:solidFill>
+                  <a:srgbClr val="111111"/>
+                </a:solidFill>
+                <a:latin typeface="Arial"/>
+              </a:rPr>
+              <a:t>•  OpenAI (Oct–Dec 2025). ChatGPT Atlas prompt-injection update. CyberScoop</a:t>
+            </a:r>
+          </a:p>
+          <a:p>
+            <a:pPr>
+              <a:lnSpc>
+                <a:spcPct val="105000"/>
+              </a:lnSpc>
+              <a:spcAft>
+                <a:spcPts val="500"/>
+              </a:spcAft>
+            </a:pPr>
+            <a:r>
+              <a:rPr sz="1100" b="0" i="0">
+                <a:solidFill>
+                  <a:srgbClr val="111111"/>
+                </a:solidFill>
+                <a:latin typeface="Arial"/>
+              </a:rPr>
+              <a:t>•  Anthropic (Nov 2025). Disrupting the first AI-orchestrated cyber espionage campaign (GTG-1002). AI Incident Database 1263</a:t>
             </a:r>
           </a:p>
         </p:txBody>
